--- a/docs/poster/poster.pptx
+++ b/docs/poster/poster.pptx
@@ -3097,7 +3097,7 @@
         <p:spPr>
           <a:xfrm>
             <a:off x="0" y="0"/>
-            <a:ext cx="43891200" cy="4864608"/>
+            <a:ext cx="43891200" cy="4498848"/>
           </a:xfrm>
           <a:prstGeom prst="rect">
             <a:avLst/>
@@ -3140,8 +3140,8 @@
         </p:nvSpPr>
         <p:spPr>
           <a:xfrm>
-            <a:off x="914400" y="411480"/>
-            <a:ext cx="42062400" cy="2377440"/>
+            <a:off x="685800" y="320040"/>
+            <a:ext cx="42519600" cy="2286000"/>
           </a:xfrm>
           <a:prstGeom prst="rect">
             <a:avLst/>
@@ -3160,7 +3160,7 @@
               </a:spcAft>
             </a:pPr>
             <a:r>
-              <a:rPr sz="6000" b="1" i="0">
+              <a:rPr sz="7000" b="1" i="0">
                 <a:solidFill>
                   <a:srgbClr val="FFFFFF"/>
                 </a:solidFill>
@@ -3176,7 +3176,7 @@
               </a:spcAft>
             </a:pPr>
             <a:r>
-              <a:rPr sz="6000" b="1" i="0">
+              <a:rPr sz="7000" b="1" i="0">
                 <a:solidFill>
                   <a:srgbClr val="FFFFFF"/>
                 </a:solidFill>
@@ -3195,7 +3195,7 @@
         </p:nvSpPr>
         <p:spPr>
           <a:xfrm>
-            <a:off x="914400" y="3063240"/>
+            <a:off x="914400" y="2697480"/>
             <a:ext cx="42062400" cy="731520"/>
           </a:xfrm>
           <a:prstGeom prst="rect">
@@ -3215,72 +3215,27 @@
               </a:spcAft>
             </a:pPr>
             <a:r>
-              <a:rPr sz="4200" b="0" i="0">
+              <a:rPr sz="4400" b="1" i="0">
                 <a:solidFill>
                   <a:srgbClr val="FFFFFF"/>
                 </a:solidFill>
                 <a:latin typeface="Arial"/>
               </a:rPr>
-              <a:t>John Roth</a:t>
-            </a:r>
-            <a:r>
-              <a:rPr sz="4200" b="0" i="0" baseline="30000">
-                <a:solidFill>
-                  <a:srgbClr val="FFFFFF"/>
-                </a:solidFill>
-                <a:latin typeface="Arial"/>
-              </a:rPr>
-              <a:t>1,2</a:t>
-            </a:r>
-            <a:r>
-              <a:rPr sz="4200" b="0" i="0">
-                <a:solidFill>
-                  <a:srgbClr val="FFFFFF"/>
-                </a:solidFill>
-                <a:latin typeface="Arial"/>
-              </a:rPr>
-              <a:t>        Kyle Wagner</a:t>
-            </a:r>
-            <a:r>
-              <a:rPr sz="4200" b="0" i="0" baseline="30000">
-                <a:solidFill>
-                  <a:srgbClr val="FFFFFF"/>
-                </a:solidFill>
-                <a:latin typeface="Arial"/>
-              </a:rPr>
-              <a:t>1,3</a:t>
-            </a:r>
-            <a:r>
-              <a:rPr sz="4200" b="0" i="0">
-                <a:solidFill>
-                  <a:srgbClr val="FFFFFF"/>
-                </a:solidFill>
-                <a:latin typeface="Arial"/>
-              </a:rPr>
-              <a:t>        Liv d'Aliberti</a:t>
-            </a:r>
-            <a:r>
-              <a:rPr sz="4200" b="0" i="0" baseline="30000">
-                <a:solidFill>
-                  <a:srgbClr val="FFFFFF"/>
-                </a:solidFill>
-                <a:latin typeface="Arial"/>
-              </a:rPr>
-              <a:t>1</a:t>
-            </a:r>
-          </a:p>
-        </p:txBody>
-      </p:sp>
-      <p:sp>
-        <p:nvSpPr>
-          <p:cNvPr id="5" name="affiliations"/>
+              <a:t>John Roth            Kyle Wagner            Liv d'Aliberti</a:t>
+            </a:r>
+          </a:p>
+        </p:txBody>
+      </p:sp>
+      <p:sp>
+        <p:nvSpPr>
+          <p:cNvPr id="5" name="affiliation"/>
           <p:cNvSpPr txBox="1"/>
           <p:nvPr/>
         </p:nvSpPr>
         <p:spPr>
           <a:xfrm>
-            <a:off x="914400" y="3886200"/>
-            <a:ext cx="42062400" cy="640080"/>
+            <a:off x="914400" y="3520440"/>
+            <a:ext cx="42062400" cy="548640"/>
           </a:xfrm>
           <a:prstGeom prst="rect">
             <a:avLst/>
@@ -3299,85 +3254,36 @@
               </a:spcAft>
             </a:pPr>
             <a:r>
-              <a:rPr sz="3000" b="0" i="0" baseline="30000">
-                <a:solidFill>
-                  <a:srgbClr val="DDE1E8"/>
-                </a:solidFill>
-                <a:latin typeface="Arial"/>
-              </a:rPr>
-              <a:t>1</a:t>
-            </a:r>
-            <a:r>
-              <a:rPr sz="3000" b="0" i="0">
-                <a:solidFill>
-                  <a:srgbClr val="DDE1E8"/>
-                </a:solidFill>
-                <a:latin typeface="Arial"/>
-              </a:rPr>
-              <a:t>Johns Hopkins University      </a:t>
-            </a:r>
-            <a:r>
-              <a:rPr sz="3000" b="0" i="0" baseline="30000">
-                <a:solidFill>
-                  <a:srgbClr val="DDE1E8"/>
-                </a:solidFill>
-                <a:latin typeface="Arial"/>
-              </a:rPr>
-              <a:t>2</a:t>
-            </a:r>
-            <a:r>
-              <a:rPr sz="3000" b="0" i="0">
-                <a:solidFill>
-                  <a:srgbClr val="DDE1E8"/>
-                </a:solidFill>
-                <a:latin typeface="Arial"/>
-              </a:rPr>
-              <a:t>The MITRE Corporation      </a:t>
-            </a:r>
-            <a:r>
-              <a:rPr sz="3000" b="0" i="0" baseline="30000">
-                <a:solidFill>
-                  <a:srgbClr val="DDE1E8"/>
-                </a:solidFill>
-                <a:latin typeface="Arial"/>
-              </a:rPr>
-              <a:t>3</a:t>
-            </a:r>
-            <a:r>
-              <a:rPr sz="3000" b="0" i="0">
-                <a:solidFill>
-                  <a:srgbClr val="DDE1E8"/>
-                </a:solidFill>
-                <a:latin typeface="Arial"/>
-              </a:rPr>
-              <a:t>Boeing – Phantom Works      {jroth32, kwagne35, odalibe1}@jh.edu</a:t>
-            </a:r>
-          </a:p>
-        </p:txBody>
-      </p:sp>
-      <p:sp>
-        <p:nvSpPr>
-          <p:cNvPr id="6" name="block: Why it matters"/>
+              <a:rPr sz="3400" b="0" i="0">
+                <a:solidFill>
+                  <a:srgbClr val="FFFFFF"/>
+                </a:solidFill>
+                <a:latin typeface="Arial"/>
+              </a:rPr>
+              <a:t>Johns Hopkins University</a:t>
+            </a:r>
+          </a:p>
+        </p:txBody>
+      </p:sp>
+      <p:sp>
+        <p:nvSpPr>
+          <p:cNvPr id="6" name="answer strip"/>
           <p:cNvSpPr/>
           <p:nvPr/>
         </p:nvSpPr>
         <p:spPr>
           <a:xfrm>
-            <a:off x="786384" y="5586984"/>
-            <a:ext cx="8805672" cy="6007608"/>
-          </a:xfrm>
-          <a:prstGeom prst="roundRect">
-            <a:avLst>
-              <a:gd name="adj" fmla="val 3805"/>
-            </a:avLst>
+            <a:off x="786384" y="5212080"/>
+            <a:ext cx="42309288" cy="950976"/>
+          </a:xfrm>
+          <a:prstGeom prst="rect">
+            <a:avLst/>
           </a:prstGeom>
           <a:solidFill>
-            <a:srgbClr val="F8F8F9"/>
+            <a:srgbClr val="DCEFF8"/>
           </a:solidFill>
-          <a:ln w="19050">
-            <a:solidFill>
-              <a:srgbClr val="14213D"/>
-            </a:solidFill>
+          <a:ln>
+            <a:noFill/>
           </a:ln>
           <a:effectLst/>
         </p:spPr>
@@ -3405,20 +3311,65 @@
       </p:sp>
       <p:sp>
         <p:nvSpPr>
-          <p:cNvPr id="7" name="block title: Why it matters"/>
+          <p:cNvPr id="7" name="answer"/>
+          <p:cNvSpPr txBox="1"/>
+          <p:nvPr/>
+        </p:nvSpPr>
+        <p:spPr>
+          <a:xfrm>
+            <a:off x="1005840" y="5212080"/>
+            <a:ext cx="41879520" cy="950976"/>
+          </a:xfrm>
+          <a:prstGeom prst="rect">
+            <a:avLst/>
+          </a:prstGeom>
+          <a:noFill/>
+        </p:spPr>
+        <p:txBody>
+          <a:bodyPr wrap="square" anchor="ctr" lIns="0" rIns="0" tIns="0" bIns="0">
+            <a:spAutoFit/>
+          </a:bodyPr>
+          <a:lstStyle/>
+          <a:p>
+            <a:pPr algn="ctr">
+              <a:spcAft>
+                <a:spcPts val="0"/>
+              </a:spcAft>
+            </a:pPr>
+            <a:r>
+              <a:rPr sz="3400" b="1" i="0">
+                <a:solidFill>
+                  <a:srgbClr val="1F2328"/>
+                </a:solidFill>
+                <a:latin typeface="Arial"/>
+              </a:rPr>
+              <a:t>Short answer: not consistently. </a:t>
+            </a:r>
+            <a:r>
+              <a:rPr sz="3400" b="0" i="0">
+                <a:solidFill>
+                  <a:srgbClr val="1F2328"/>
+                </a:solidFill>
+                <a:latin typeface="Arial"/>
+              </a:rPr>
+              <a:t>With 12 labeled scenes every pretrained encoder beats random initialization, but SAR pretraining beats optical only for the CNN, and only while labels are scarce.</a:t>
+            </a:r>
+          </a:p>
+        </p:txBody>
+      </p:sp>
+      <p:sp>
+        <p:nvSpPr>
+          <p:cNvPr id="8" name="footer bar"/>
           <p:cNvSpPr/>
           <p:nvPr/>
         </p:nvSpPr>
         <p:spPr>
           <a:xfrm>
-            <a:off x="786384" y="5586984"/>
-            <a:ext cx="8805672" cy="868680"/>
-          </a:xfrm>
-          <a:prstGeom prst="round2SameRect">
-            <a:avLst>
-              <a:gd name="adj1" fmla="val 25000"/>
-              <a:gd name="adj2" fmla="val 0"/>
-            </a:avLst>
+            <a:off x="0" y="31866840"/>
+            <a:ext cx="43891200" cy="1051560"/>
+          </a:xfrm>
+          <a:prstGeom prst="rect">
+            <a:avLst/>
           </a:prstGeom>
           <a:solidFill>
             <a:srgbClr val="14213D"/>
@@ -3443,32 +3394,214 @@
           </a:fontRef>
         </p:style>
         <p:txBody>
-          <a:bodyPr rtlCol="0" anchor="ctr" lIns="274320" wrap="square"/>
-          <a:lstStyle/>
-          <a:p>
-            <a:pPr algn="l"/>
-            <a:r>
-              <a:rPr sz="4000" b="1" i="0">
+          <a:bodyPr rtlCol="0" anchor="ctr"/>
+          <a:lstStyle/>
+          <a:p>
+            <a:pPr algn="ctr"/>
+          </a:p>
+        </p:txBody>
+      </p:sp>
+      <p:sp>
+        <p:nvSpPr>
+          <p:cNvPr id="9" name="footer left"/>
+          <p:cNvSpPr txBox="1"/>
+          <p:nvPr/>
+        </p:nvSpPr>
+        <p:spPr>
+          <a:xfrm>
+            <a:off x="822960" y="31866840"/>
+            <a:ext cx="12801600" cy="1051560"/>
+          </a:xfrm>
+          <a:prstGeom prst="rect">
+            <a:avLst/>
+          </a:prstGeom>
+          <a:noFill/>
+        </p:spPr>
+        <p:txBody>
+          <a:bodyPr wrap="square" anchor="ctr" lIns="0" rIns="0" tIns="0" bIns="0">
+            <a:spAutoFit/>
+          </a:bodyPr>
+          <a:lstStyle/>
+          <a:p>
+            <a:pPr algn="l">
+              <a:spcAft>
+                <a:spcPts val="0"/>
+              </a:spcAft>
+            </a:pPr>
+            <a:r>
+              <a:rPr sz="3000" b="0" i="0">
                 <a:solidFill>
                   <a:srgbClr val="FFFFFF"/>
                 </a:solidFill>
                 <a:latin typeface="Arial"/>
               </a:rPr>
-              <a:t>Why it matters</a:t>
-            </a:r>
-          </a:p>
-        </p:txBody>
-      </p:sp>
-      <p:sp>
-        <p:nvSpPr>
-          <p:cNvPr id="8" name="why"/>
+              <a:t>Johns Hopkins University</a:t>
+            </a:r>
+          </a:p>
+        </p:txBody>
+      </p:sp>
+      <p:sp>
+        <p:nvSpPr>
+          <p:cNvPr id="10" name="footer center"/>
           <p:cNvSpPr txBox="1"/>
           <p:nvPr/>
         </p:nvSpPr>
         <p:spPr>
           <a:xfrm>
-            <a:off x="1060704" y="6684264"/>
-            <a:ext cx="8257032" cy="4727448"/>
+            <a:off x="10972800" y="31866840"/>
+            <a:ext cx="21945600" cy="1051560"/>
+          </a:xfrm>
+          <a:prstGeom prst="rect">
+            <a:avLst/>
+          </a:prstGeom>
+          <a:noFill/>
+        </p:spPr>
+        <p:txBody>
+          <a:bodyPr wrap="square" anchor="ctr" lIns="0" rIns="0" tIns="0" bIns="0">
+            <a:spAutoFit/>
+          </a:bodyPr>
+          <a:lstStyle/>
+          <a:p>
+            <a:pPr algn="ctr">
+              <a:spcAft>
+                <a:spcPts val="0"/>
+              </a:spcAft>
+            </a:pPr>
+            <a:r>
+              <a:rPr sz="3000" b="0" i="0">
+                <a:solidFill>
+                  <a:srgbClr val="FFFFFF"/>
+                </a:solidFill>
+                <a:latin typeface="Arial"/>
+              </a:rPr>
+              <a:t>Applied Imagery Pattern Recognition (AIPR) 2026</a:t>
+            </a:r>
+          </a:p>
+        </p:txBody>
+      </p:sp>
+      <p:sp>
+        <p:nvSpPr>
+          <p:cNvPr id="11" name="footer right"/>
+          <p:cNvSpPr txBox="1"/>
+          <p:nvPr/>
+        </p:nvSpPr>
+        <p:spPr>
+          <a:xfrm>
+            <a:off x="30266640" y="31866840"/>
+            <a:ext cx="12801600" cy="1051560"/>
+          </a:xfrm>
+          <a:prstGeom prst="rect">
+            <a:avLst/>
+          </a:prstGeom>
+          <a:noFill/>
+        </p:spPr>
+        <p:txBody>
+          <a:bodyPr wrap="square" anchor="ctr" lIns="0" rIns="0" tIns="0" bIns="0">
+            <a:spAutoFit/>
+          </a:bodyPr>
+          <a:lstStyle/>
+          <a:p>
+            <a:pPr algn="r">
+              <a:spcAft>
+                <a:spcPts val="0"/>
+              </a:spcAft>
+            </a:pPr>
+            <a:r>
+              <a:rPr sz="3000" b="0" i="0">
+                <a:solidFill>
+                  <a:srgbClr val="FFFFFF"/>
+                </a:solidFill>
+                <a:latin typeface="Arial"/>
+              </a:rPr>
+              <a:t>{jroth32, kwagne35, odalibe1}@jh.edu</a:t>
+            </a:r>
+          </a:p>
+        </p:txBody>
+      </p:sp>
+      <p:sp>
+        <p:nvSpPr>
+          <p:cNvPr id="12" name="heading: Motivation"/>
+          <p:cNvSpPr txBox="1"/>
+          <p:nvPr/>
+        </p:nvSpPr>
+        <p:spPr>
+          <a:xfrm>
+            <a:off x="786384" y="6592824"/>
+            <a:ext cx="8805672" cy="685800"/>
+          </a:xfrm>
+          <a:prstGeom prst="rect">
+            <a:avLst/>
+          </a:prstGeom>
+          <a:noFill/>
+        </p:spPr>
+        <p:txBody>
+          <a:bodyPr wrap="square" anchor="b" lIns="0" rIns="0" tIns="0" bIns="0">
+            <a:spAutoFit/>
+          </a:bodyPr>
+          <a:lstStyle/>
+          <a:p>
+            <a:pPr algn="ctr">
+              <a:spcAft>
+                <a:spcPts val="0"/>
+              </a:spcAft>
+            </a:pPr>
+            <a:r>
+              <a:rPr sz="4200" b="1" i="0">
+                <a:solidFill>
+                  <a:srgbClr val="14213D"/>
+                </a:solidFill>
+                <a:latin typeface="Arial"/>
+              </a:rPr>
+              <a:t>Motivation</a:t>
+            </a:r>
+          </a:p>
+        </p:txBody>
+      </p:sp>
+      <p:cxnSp>
+        <p:nvCxnSpPr>
+          <p:cNvPr id="13" name="rule: Motivation"/>
+          <p:cNvCxnSpPr/>
+          <p:nvPr/>
+        </p:nvCxnSpPr>
+        <p:spPr>
+          <a:xfrm>
+            <a:off x="786384" y="7370064"/>
+            <a:ext cx="8805672" cy="0"/>
+          </a:xfrm>
+          <a:prstGeom prst="line">
+            <a:avLst/>
+          </a:prstGeom>
+          <a:ln w="57150">
+            <a:solidFill>
+              <a:srgbClr val="B8BEC8"/>
+            </a:solidFill>
+          </a:ln>
+        </p:spPr>
+        <p:style>
+          <a:lnRef idx="2">
+            <a:schemeClr val="accent1"/>
+          </a:lnRef>
+          <a:fillRef idx="0">
+            <a:schemeClr val="accent1"/>
+          </a:fillRef>
+          <a:effectRef idx="1">
+            <a:schemeClr val="accent1"/>
+          </a:effectRef>
+          <a:fontRef idx="minor">
+            <a:schemeClr val="tx1"/>
+          </a:fontRef>
+        </p:style>
+      </p:cxnSp>
+      <p:sp>
+        <p:nvSpPr>
+          <p:cNvPr id="14" name="motivation"/>
+          <p:cNvSpPr txBox="1"/>
+          <p:nvPr/>
+        </p:nvSpPr>
+        <p:spPr>
+          <a:xfrm>
+            <a:off x="1042416" y="7644384"/>
+            <a:ext cx="8293608" cy="5394960"/>
           </a:xfrm>
           <a:prstGeom prst="rect">
             <a:avLst/>
@@ -3485,15 +3618,15 @@
               <a:spcAft>
                 <a:spcPts val="800"/>
               </a:spcAft>
+              <a:buSzPct val="70000"/>
               <a:buClr>
                 <a:srgbClr val="14213D"/>
               </a:buClr>
-              <a:buSzPct val="70000"/>
               <a:buFont typeface="Arial"/>
               <a:buChar char="■"/>
             </a:pPr>
             <a:r>
-              <a:rPr sz="2700" b="1" i="0">
+              <a:rPr sz="2900" b="1" i="0">
                 <a:solidFill>
                   <a:srgbClr val="1F2328"/>
                 </a:solidFill>
@@ -3502,13 +3635,31 @@
               <a:t>Dark vessels</a:t>
             </a:r>
             <a:r>
-              <a:rPr sz="2700" b="0" i="0">
-                <a:solidFill>
-                  <a:srgbClr val="1F2328"/>
-                </a:solidFill>
-                <a:latin typeface="Arial"/>
-              </a:rPr>
-              <a:t> have no matching AIS report. Sentinel-1 SAR sees them at night and through cloud.</a:t>
+              <a:rPr sz="2900" b="0" i="0">
+                <a:solidFill>
+                  <a:srgbClr val="1F2328"/>
+                </a:solidFill>
+                <a:latin typeface="Arial"/>
+              </a:rPr>
+              <a:t> have no matching AIS report. Sentinel-1 SAR </a:t>
+            </a:r>
+            <a:r>
+              <a:rPr sz="2900" b="0" i="0">
+                <a:solidFill>
+                  <a:srgbClr val="5B6477"/>
+                </a:solidFill>
+                <a:latin typeface="Arial"/>
+              </a:rPr>
+              <a:t>[2]</a:t>
+            </a:r>
+            <a:r>
+              <a:rPr sz="2900" b="0" i="0">
+                <a:solidFill>
+                  <a:srgbClr val="1F2328"/>
+                </a:solidFill>
+                <a:latin typeface="Arial"/>
+              </a:rPr>
+              <a:t> sees them at night and through cloud.</a:t>
             </a:r>
           </a:p>
           <a:p>
@@ -3516,15 +3667,15 @@
               <a:spcAft>
                 <a:spcPts val="800"/>
               </a:spcAft>
+              <a:buSzPct val="70000"/>
               <a:buClr>
                 <a:srgbClr val="14213D"/>
               </a:buClr>
-              <a:buSzPct val="70000"/>
               <a:buFont typeface="Arial"/>
               <a:buChar char="■"/>
             </a:pPr>
             <a:r>
-              <a:rPr sz="2700" b="0" i="0">
+              <a:rPr sz="2900" b="0" i="0">
                 <a:solidFill>
                   <a:srgbClr val="1F2328"/>
                 </a:solidFill>
@@ -3538,15 +3689,15 @@
               <a:spcAft>
                 <a:spcPts val="800"/>
               </a:spcAft>
+              <a:buSzPct val="70000"/>
               <a:buClr>
                 <a:srgbClr val="14213D"/>
               </a:buClr>
-              <a:buSzPct val="70000"/>
               <a:buFont typeface="Arial"/>
               <a:buChar char="■"/>
             </a:pPr>
             <a:r>
-              <a:rPr sz="2700" b="1" i="0">
+              <a:rPr sz="2900" b="1" i="0">
                 <a:solidFill>
                   <a:srgbClr val="1F2328"/>
                 </a:solidFill>
@@ -3555,321 +3706,94 @@
               <a:t>Human-verified labels are scarce.</a:t>
             </a:r>
             <a:r>
-              <a:rPr sz="2700" b="0" i="0">
-                <a:solidFill>
-                  <a:srgbClr val="1F2328"/>
-                </a:solidFill>
-                <a:latin typeface="Arial"/>
-              </a:rPr>
-              <a:t> Pretraining can lower the label cost, but which source domain helps most?</a:t>
-            </a:r>
-          </a:p>
-        </p:txBody>
-      </p:sp>
-      <p:sp>
-        <p:nvSpPr>
-          <p:cNvPr id="9" name="block: Question"/>
-          <p:cNvSpPr/>
-          <p:nvPr/>
-        </p:nvSpPr>
-        <p:spPr>
-          <a:xfrm>
-            <a:off x="786384" y="12161520"/>
-            <a:ext cx="8805672" cy="3172968"/>
-          </a:xfrm>
-          <a:prstGeom prst="roundRect">
-            <a:avLst>
-              <a:gd name="adj" fmla="val 7204"/>
-            </a:avLst>
-          </a:prstGeom>
-          <a:solidFill>
-            <a:srgbClr val="F8F8F9"/>
-          </a:solidFill>
-          <a:ln w="19050">
+              <a:rPr sz="2900" b="0" i="0">
+                <a:solidFill>
+                  <a:srgbClr val="1F2328"/>
+                </a:solidFill>
+                <a:latin typeface="Arial"/>
+              </a:rPr>
+              <a:t> Pretraining can lower the label cost, but which source domain helps most, and does the answer depend on the backbone?</a:t>
+            </a:r>
+          </a:p>
+        </p:txBody>
+      </p:sp>
+      <p:sp>
+        <p:nvSpPr>
+          <p:cNvPr id="15" name="heading: Data: xView3-SAR [1]"/>
+          <p:cNvSpPr txBox="1"/>
+          <p:nvPr/>
+        </p:nvSpPr>
+        <p:spPr>
+          <a:xfrm>
+            <a:off x="786384" y="13350240"/>
+            <a:ext cx="8805672" cy="685800"/>
+          </a:xfrm>
+          <a:prstGeom prst="rect">
+            <a:avLst/>
+          </a:prstGeom>
+          <a:noFill/>
+        </p:spPr>
+        <p:txBody>
+          <a:bodyPr wrap="square" anchor="b" lIns="0" rIns="0" tIns="0" bIns="0">
+            <a:spAutoFit/>
+          </a:bodyPr>
+          <a:lstStyle/>
+          <a:p>
+            <a:pPr algn="ctr">
+              <a:spcAft>
+                <a:spcPts val="0"/>
+              </a:spcAft>
+            </a:pPr>
+            <a:r>
+              <a:rPr sz="4200" b="1" i="0">
+                <a:solidFill>
+                  <a:srgbClr val="14213D"/>
+                </a:solidFill>
+                <a:latin typeface="Arial"/>
+              </a:rPr>
+              <a:t>Data: xView3-SAR [1]</a:t>
+            </a:r>
+          </a:p>
+        </p:txBody>
+      </p:sp>
+      <p:cxnSp>
+        <p:nvCxnSpPr>
+          <p:cNvPr id="16" name="rule: Data: xView3-SAR [1]"/>
+          <p:cNvCxnSpPr/>
+          <p:nvPr/>
+        </p:nvCxnSpPr>
+        <p:spPr>
+          <a:xfrm>
+            <a:off x="786384" y="14127480"/>
+            <a:ext cx="8805672" cy="0"/>
+          </a:xfrm>
+          <a:prstGeom prst="line">
+            <a:avLst/>
+          </a:prstGeom>
+          <a:ln w="57150">
             <a:solidFill>
-              <a:srgbClr val="14213D"/>
+              <a:srgbClr val="B8BEC8"/>
             </a:solidFill>
           </a:ln>
-          <a:effectLst/>
         </p:spPr>
         <p:style>
-          <a:lnRef idx="1">
+          <a:lnRef idx="2">
             <a:schemeClr val="accent1"/>
           </a:lnRef>
-          <a:fillRef idx="3">
+          <a:fillRef idx="0">
             <a:schemeClr val="accent1"/>
           </a:fillRef>
-          <a:effectRef idx="2">
+          <a:effectRef idx="1">
             <a:schemeClr val="accent1"/>
           </a:effectRef>
           <a:fontRef idx="minor">
-            <a:schemeClr val="lt1"/>
+            <a:schemeClr val="tx1"/>
           </a:fontRef>
         </p:style>
-        <p:txBody>
-          <a:bodyPr rtlCol="0" anchor="ctr"/>
-          <a:lstStyle/>
-          <a:p>
-            <a:pPr algn="ctr"/>
-          </a:p>
-        </p:txBody>
-      </p:sp>
-      <p:sp>
-        <p:nvSpPr>
-          <p:cNvPr id="10" name="block title: Question"/>
-          <p:cNvSpPr/>
-          <p:nvPr/>
-        </p:nvSpPr>
-        <p:spPr>
-          <a:xfrm>
-            <a:off x="786384" y="12161520"/>
-            <a:ext cx="8805672" cy="868680"/>
-          </a:xfrm>
-          <a:prstGeom prst="round2SameRect">
-            <a:avLst>
-              <a:gd name="adj1" fmla="val 25000"/>
-              <a:gd name="adj2" fmla="val 0"/>
-            </a:avLst>
-          </a:prstGeom>
-          <a:solidFill>
-            <a:srgbClr val="14213D"/>
-          </a:solidFill>
-          <a:ln>
-            <a:noFill/>
-          </a:ln>
-          <a:effectLst/>
-        </p:spPr>
-        <p:style>
-          <a:lnRef idx="1">
-            <a:schemeClr val="accent1"/>
-          </a:lnRef>
-          <a:fillRef idx="3">
-            <a:schemeClr val="accent1"/>
-          </a:fillRef>
-          <a:effectRef idx="2">
-            <a:schemeClr val="accent1"/>
-          </a:effectRef>
-          <a:fontRef idx="minor">
-            <a:schemeClr val="lt1"/>
-          </a:fontRef>
-        </p:style>
-        <p:txBody>
-          <a:bodyPr rtlCol="0" anchor="ctr" lIns="274320" wrap="square"/>
-          <a:lstStyle/>
-          <a:p>
-            <a:pPr algn="l"/>
-            <a:r>
-              <a:rPr sz="4000" b="1" i="0">
-                <a:solidFill>
-                  <a:srgbClr val="FFFFFF"/>
-                </a:solidFill>
-                <a:latin typeface="Arial"/>
-              </a:rPr>
-              <a:t>Question</a:t>
-            </a:r>
-          </a:p>
-        </p:txBody>
-      </p:sp>
-      <p:sp>
-        <p:nvSpPr>
-          <p:cNvPr id="11" name="question"/>
-          <p:cNvSpPr txBox="1"/>
-          <p:nvPr/>
-        </p:nvSpPr>
-        <p:spPr>
-          <a:xfrm>
-            <a:off x="1060704" y="13258800"/>
-            <a:ext cx="8257032" cy="1892808"/>
-          </a:xfrm>
-          <a:prstGeom prst="rect">
-            <a:avLst/>
-          </a:prstGeom>
-          <a:noFill/>
-        </p:spPr>
-        <p:txBody>
-          <a:bodyPr wrap="square" anchor="t" lIns="0" rIns="0" tIns="0" bIns="0">
-            <a:spAutoFit/>
-          </a:bodyPr>
-          <a:lstStyle/>
-          <a:p>
-            <a:pPr algn="l">
-              <a:spcAft>
-                <a:spcPts val="800"/>
-              </a:spcAft>
-            </a:pPr>
-            <a:r>
-              <a:rPr sz="2700" b="0" i="0">
-                <a:solidFill>
-                  <a:srgbClr val="1F2328"/>
-                </a:solidFill>
-                <a:latin typeface="Arial"/>
-              </a:rPr>
-              <a:t>Does </a:t>
-            </a:r>
-            <a:r>
-              <a:rPr sz="2700" b="1" i="0">
-                <a:solidFill>
-                  <a:srgbClr val="0072B2"/>
-                </a:solidFill>
-                <a:latin typeface="Arial"/>
-              </a:rPr>
-              <a:t>SAR</a:t>
-            </a:r>
-            <a:r>
-              <a:rPr sz="2700" b="0" i="0">
-                <a:solidFill>
-                  <a:srgbClr val="1F2328"/>
-                </a:solidFill>
-                <a:latin typeface="Arial"/>
-              </a:rPr>
-              <a:t> pretraining beat </a:t>
-            </a:r>
-            <a:r>
-              <a:rPr sz="2700" b="1" i="0">
-                <a:solidFill>
-                  <a:srgbClr val="9A6700"/>
-                </a:solidFill>
-                <a:latin typeface="Arial"/>
-              </a:rPr>
-              <a:t>optical remote-sensing</a:t>
-            </a:r>
-            <a:r>
-              <a:rPr sz="2700" b="0" i="0">
-                <a:solidFill>
-                  <a:srgbClr val="1F2328"/>
-                </a:solidFill>
-                <a:latin typeface="Arial"/>
-              </a:rPr>
-              <a:t> and </a:t>
-            </a:r>
-            <a:r>
-              <a:rPr sz="2700" b="1" i="0">
-                <a:solidFill>
-                  <a:srgbClr val="009E73"/>
-                </a:solidFill>
-                <a:latin typeface="Arial"/>
-              </a:rPr>
-              <a:t>ImageNet</a:t>
-            </a:r>
-            <a:r>
-              <a:rPr sz="2700" b="0" i="0">
-                <a:solidFill>
-                  <a:srgbClr val="1F2328"/>
-                </a:solidFill>
-                <a:latin typeface="Arial"/>
-              </a:rPr>
-              <a:t> pretraining when labels are few? Does the answer hold for both a ViT and a CNN?</a:t>
-            </a:r>
-          </a:p>
-        </p:txBody>
-      </p:sp>
-      <p:sp>
-        <p:nvSpPr>
-          <p:cNvPr id="12" name="block: Data: xView3-SAR"/>
-          <p:cNvSpPr/>
-          <p:nvPr/>
-        </p:nvSpPr>
-        <p:spPr>
-          <a:xfrm>
-            <a:off x="786384" y="15910559"/>
-            <a:ext cx="8805672" cy="10890504"/>
-          </a:xfrm>
-          <a:prstGeom prst="roundRect">
-            <a:avLst>
-              <a:gd name="adj" fmla="val 2596"/>
-            </a:avLst>
-          </a:prstGeom>
-          <a:solidFill>
-            <a:srgbClr val="F8F8F9"/>
-          </a:solidFill>
-          <a:ln w="19050">
-            <a:solidFill>
-              <a:srgbClr val="14213D"/>
-            </a:solidFill>
-          </a:ln>
-          <a:effectLst/>
-        </p:spPr>
-        <p:style>
-          <a:lnRef idx="1">
-            <a:schemeClr val="accent1"/>
-          </a:lnRef>
-          <a:fillRef idx="3">
-            <a:schemeClr val="accent1"/>
-          </a:fillRef>
-          <a:effectRef idx="2">
-            <a:schemeClr val="accent1"/>
-          </a:effectRef>
-          <a:fontRef idx="minor">
-            <a:schemeClr val="lt1"/>
-          </a:fontRef>
-        </p:style>
-        <p:txBody>
-          <a:bodyPr rtlCol="0" anchor="ctr"/>
-          <a:lstStyle/>
-          <a:p>
-            <a:pPr algn="ctr"/>
-          </a:p>
-        </p:txBody>
-      </p:sp>
-      <p:sp>
-        <p:nvSpPr>
-          <p:cNvPr id="13" name="block title: Data: xView3-SAR"/>
-          <p:cNvSpPr/>
-          <p:nvPr/>
-        </p:nvSpPr>
-        <p:spPr>
-          <a:xfrm>
-            <a:off x="786384" y="15910559"/>
-            <a:ext cx="8805672" cy="868680"/>
-          </a:xfrm>
-          <a:prstGeom prst="round2SameRect">
-            <a:avLst>
-              <a:gd name="adj1" fmla="val 25000"/>
-              <a:gd name="adj2" fmla="val 0"/>
-            </a:avLst>
-          </a:prstGeom>
-          <a:solidFill>
-            <a:srgbClr val="14213D"/>
-          </a:solidFill>
-          <a:ln>
-            <a:noFill/>
-          </a:ln>
-          <a:effectLst/>
-        </p:spPr>
-        <p:style>
-          <a:lnRef idx="1">
-            <a:schemeClr val="accent1"/>
-          </a:lnRef>
-          <a:fillRef idx="3">
-            <a:schemeClr val="accent1"/>
-          </a:fillRef>
-          <a:effectRef idx="2">
-            <a:schemeClr val="accent1"/>
-          </a:effectRef>
-          <a:fontRef idx="minor">
-            <a:schemeClr val="lt1"/>
-          </a:fontRef>
-        </p:style>
-        <p:txBody>
-          <a:bodyPr rtlCol="0" anchor="ctr" lIns="274320" wrap="square"/>
-          <a:lstStyle/>
-          <a:p>
-            <a:pPr algn="l"/>
-            <a:r>
-              <a:rPr sz="4000" b="1" i="0">
-                <a:solidFill>
-                  <a:srgbClr val="FFFFFF"/>
-                </a:solidFill>
-                <a:latin typeface="Arial"/>
-              </a:rPr>
-              <a:t>Data: xView3-SAR</a:t>
-            </a:r>
-          </a:p>
-        </p:txBody>
-      </p:sp>
+      </p:cxnSp>
       <p:pic>
         <p:nvPicPr>
-          <p:cNvPr id="14" name="scene context" descr="scene_context.png"/>
+          <p:cNvPr id="17" name="scene context" descr="scene_context.png"/>
           <p:cNvPicPr>
             <a:picLocks noChangeAspect="1"/>
           </p:cNvPicPr>
@@ -3883,8 +3807,8 @@
         </p:blipFill>
         <p:spPr>
           <a:xfrm>
-            <a:off x="1060704" y="17007839"/>
-            <a:ext cx="8257032" cy="3986153"/>
+            <a:off x="1788840" y="14401800"/>
+            <a:ext cx="6800758" cy="3283125"/>
           </a:xfrm>
           <a:prstGeom prst="rect">
             <a:avLst/>
@@ -3893,14 +3817,14 @@
       </p:pic>
       <p:sp>
         <p:nvSpPr>
-          <p:cNvPr id="15" name="scene caption"/>
+          <p:cNvPr id="18" name="scene caption"/>
           <p:cNvSpPr txBox="1"/>
           <p:nvPr/>
         </p:nvSpPr>
         <p:spPr>
           <a:xfrm>
-            <a:off x="1060704" y="21085433"/>
-            <a:ext cx="8257032" cy="548640"/>
+            <a:off x="1042416" y="17776365"/>
+            <a:ext cx="8293608" cy="548640"/>
           </a:xfrm>
           <a:prstGeom prst="rect">
             <a:avLst/>
@@ -3913,7 +3837,7 @@
           </a:bodyPr>
           <a:lstStyle/>
           <a:p>
-            <a:pPr algn="l">
+            <a:pPr algn="ctr">
               <a:spcAft>
                 <a:spcPts val="800"/>
               </a:spcAft>
@@ -3932,14 +3856,14 @@
       </p:sp>
       <p:sp>
         <p:nvSpPr>
-          <p:cNvPr id="16" name="data bullets"/>
+          <p:cNvPr id="19" name="data bullets"/>
           <p:cNvSpPr txBox="1"/>
           <p:nvPr/>
         </p:nvSpPr>
         <p:spPr>
           <a:xfrm>
-            <a:off x="1060704" y="21771233"/>
-            <a:ext cx="8257032" cy="4846951"/>
+            <a:off x="1042416" y="18553605"/>
+            <a:ext cx="8293608" cy="5220795"/>
           </a:xfrm>
           <a:prstGeom prst="rect">
             <a:avLst/>
@@ -3956,15 +3880,15 @@
               <a:spcAft>
                 <a:spcPts val="800"/>
               </a:spcAft>
+              <a:buSzPct val="70000"/>
               <a:buClr>
                 <a:srgbClr val="14213D"/>
               </a:buClr>
-              <a:buSzPct val="70000"/>
               <a:buFont typeface="Arial"/>
               <a:buChar char="■"/>
             </a:pPr>
             <a:r>
-              <a:rPr sz="2700" b="0" i="0">
+              <a:rPr sz="2900" b="0" i="0">
                 <a:solidFill>
                   <a:srgbClr val="1F2328"/>
                 </a:solidFill>
@@ -3973,7 +3897,7 @@
               <a:t>150 frozen study scenes: </a:t>
             </a:r>
             <a:r>
-              <a:rPr sz="2700" b="1" i="0">
+              <a:rPr sz="2900" b="1" i="0">
                 <a:solidFill>
                   <a:srgbClr val="1F2328"/>
                 </a:solidFill>
@@ -3982,7 +3906,7 @@
               <a:t>111 train, 23 dev, 16 test</a:t>
             </a:r>
             <a:r>
-              <a:rPr sz="2700" b="0" i="0">
+              <a:rPr sz="2900" b="0" i="0">
                 <a:solidFill>
                   <a:srgbClr val="1F2328"/>
                 </a:solidFill>
@@ -3996,15 +3920,15 @@
               <a:spcAft>
                 <a:spcPts val="800"/>
               </a:spcAft>
+              <a:buSzPct val="70000"/>
               <a:buClr>
                 <a:srgbClr val="14213D"/>
               </a:buClr>
-              <a:buSzPct val="70000"/>
               <a:buFont typeface="Arial"/>
               <a:buChar char="■"/>
             </a:pPr>
             <a:r>
-              <a:rPr sz="2700" b="0" i="0">
+              <a:rPr sz="2900" b="0" i="0">
                 <a:solidFill>
                   <a:srgbClr val="1F2328"/>
                 </a:solidFill>
@@ -4013,7 +3937,7 @@
               <a:t>Nested budgets: </a:t>
             </a:r>
             <a:r>
-              <a:rPr sz="2700" b="1" i="0">
+              <a:rPr sz="2900" b="1" i="0">
                 <a:solidFill>
                   <a:srgbClr val="1F2328"/>
                 </a:solidFill>
@@ -4022,7 +3946,7 @@
               <a:t>12 ⊂ 28 ⊂ 56 ⊂ 111</a:t>
             </a:r>
             <a:r>
-              <a:rPr sz="2700" b="0" i="0">
+              <a:rPr sz="2900" b="0" i="0">
                 <a:solidFill>
                   <a:srgbClr val="1F2328"/>
                 </a:solidFill>
@@ -4036,15 +3960,15 @@
               <a:spcAft>
                 <a:spcPts val="800"/>
               </a:spcAft>
+              <a:buSzPct val="70000"/>
               <a:buClr>
                 <a:srgbClr val="14213D"/>
               </a:buClr>
-              <a:buSzPct val="70000"/>
               <a:buFont typeface="Arial"/>
               <a:buChar char="■"/>
             </a:pPr>
             <a:r>
-              <a:rPr sz="2700" b="1" i="0">
+              <a:rPr sz="2900" b="1" i="0">
                 <a:solidFill>
                   <a:srgbClr val="1F2328"/>
                 </a:solidFill>
@@ -4053,7 +3977,7 @@
               <a:t>50 near-shore, human-verified scenes</a:t>
             </a:r>
             <a:r>
-              <a:rPr sz="2700" b="0" i="0">
+              <a:rPr sz="2900" b="0" i="0">
                 <a:solidFill>
                   <a:srgbClr val="1F2328"/>
                 </a:solidFill>
@@ -4067,139 +3991,109 @@
               <a:spcAft>
                 <a:spcPts val="800"/>
               </a:spcAft>
+              <a:buSzPct val="70000"/>
               <a:buClr>
                 <a:srgbClr val="14213D"/>
               </a:buClr>
-              <a:buSzPct val="70000"/>
               <a:buFont typeface="Arial"/>
               <a:buChar char="■"/>
             </a:pPr>
             <a:r>
-              <a:rPr sz="2700" b="0" i="0">
-                <a:solidFill>
-                  <a:srgbClr val="1F2328"/>
-                </a:solidFill>
-                <a:latin typeface="Arial"/>
-              </a:rPr>
-              <a:t>Input [VH, VV, VH − VV] in dB, 10 m pixels.</a:t>
-            </a:r>
-          </a:p>
-        </p:txBody>
-      </p:sp>
-      <p:sp>
-        <p:nvSpPr>
-          <p:cNvPr id="17" name="block: Fix before the final cohort"/>
-          <p:cNvSpPr/>
-          <p:nvPr/>
-        </p:nvSpPr>
-        <p:spPr>
-          <a:xfrm>
-            <a:off x="786384" y="27377136"/>
-            <a:ext cx="8805672" cy="3931920"/>
-          </a:xfrm>
-          <a:prstGeom prst="roundRect">
-            <a:avLst>
-              <a:gd name="adj" fmla="val 5813"/>
-            </a:avLst>
-          </a:prstGeom>
-          <a:solidFill>
-            <a:srgbClr val="FFF4DE"/>
-          </a:solidFill>
-          <a:ln w="19050">
+              <a:rPr sz="2900" b="0" i="0">
+                <a:solidFill>
+                  <a:srgbClr val="1F2328"/>
+                </a:solidFill>
+                <a:latin typeface="Arial"/>
+              </a:rPr>
+              <a:t>Input [VH, VV, VH−VV] in dB, 10 m pixels.</a:t>
+            </a:r>
+          </a:p>
+        </p:txBody>
+      </p:sp>
+      <p:sp>
+        <p:nvSpPr>
+          <p:cNvPr id="20" name="heading: References"/>
+          <p:cNvSpPr txBox="1"/>
+          <p:nvPr/>
+        </p:nvSpPr>
+        <p:spPr>
+          <a:xfrm>
+            <a:off x="786384" y="23938992"/>
+            <a:ext cx="8805672" cy="685800"/>
+          </a:xfrm>
+          <a:prstGeom prst="rect">
+            <a:avLst/>
+          </a:prstGeom>
+          <a:noFill/>
+        </p:spPr>
+        <p:txBody>
+          <a:bodyPr wrap="square" anchor="b" lIns="0" rIns="0" tIns="0" bIns="0">
+            <a:spAutoFit/>
+          </a:bodyPr>
+          <a:lstStyle/>
+          <a:p>
+            <a:pPr algn="ctr">
+              <a:spcAft>
+                <a:spcPts val="0"/>
+              </a:spcAft>
+            </a:pPr>
+            <a:r>
+              <a:rPr sz="4200" b="1" i="0">
+                <a:solidFill>
+                  <a:srgbClr val="14213D"/>
+                </a:solidFill>
+                <a:latin typeface="Arial"/>
+              </a:rPr>
+              <a:t>References</a:t>
+            </a:r>
+          </a:p>
+        </p:txBody>
+      </p:sp>
+      <p:cxnSp>
+        <p:nvCxnSpPr>
+          <p:cNvPr id="21" name="rule: References"/>
+          <p:cNvCxnSpPr/>
+          <p:nvPr/>
+        </p:nvCxnSpPr>
+        <p:spPr>
+          <a:xfrm>
+            <a:off x="786384" y="24716232"/>
+            <a:ext cx="8805672" cy="0"/>
+          </a:xfrm>
+          <a:prstGeom prst="line">
+            <a:avLst/>
+          </a:prstGeom>
+          <a:ln w="57150">
             <a:solidFill>
-              <a:srgbClr val="C48700"/>
+              <a:srgbClr val="B8BEC8"/>
             </a:solidFill>
           </a:ln>
-          <a:effectLst/>
         </p:spPr>
         <p:style>
-          <a:lnRef idx="1">
+          <a:lnRef idx="2">
             <a:schemeClr val="accent1"/>
           </a:lnRef>
-          <a:fillRef idx="3">
+          <a:fillRef idx="0">
             <a:schemeClr val="accent1"/>
           </a:fillRef>
-          <a:effectRef idx="2">
+          <a:effectRef idx="1">
             <a:schemeClr val="accent1"/>
           </a:effectRef>
           <a:fontRef idx="minor">
-            <a:schemeClr val="lt1"/>
+            <a:schemeClr val="tx1"/>
           </a:fontRef>
         </p:style>
-        <p:txBody>
-          <a:bodyPr rtlCol="0" anchor="ctr"/>
-          <a:lstStyle/>
-          <a:p>
-            <a:pPr algn="ctr"/>
-          </a:p>
-        </p:txBody>
-      </p:sp>
-      <p:sp>
-        <p:nvSpPr>
-          <p:cNvPr id="18" name="block title: Fix before the final cohort"/>
-          <p:cNvSpPr/>
-          <p:nvPr/>
-        </p:nvSpPr>
-        <p:spPr>
-          <a:xfrm>
-            <a:off x="786384" y="27377136"/>
-            <a:ext cx="8805672" cy="868680"/>
-          </a:xfrm>
-          <a:prstGeom prst="round2SameRect">
-            <a:avLst>
-              <a:gd name="adj1" fmla="val 25000"/>
-              <a:gd name="adj2" fmla="val 0"/>
-            </a:avLst>
-          </a:prstGeom>
-          <a:solidFill>
-            <a:srgbClr val="C48700"/>
-          </a:solidFill>
-          <a:ln>
-            <a:noFill/>
-          </a:ln>
-          <a:effectLst/>
-        </p:spPr>
-        <p:style>
-          <a:lnRef idx="1">
-            <a:schemeClr val="accent1"/>
-          </a:lnRef>
-          <a:fillRef idx="3">
-            <a:schemeClr val="accent1"/>
-          </a:fillRef>
-          <a:effectRef idx="2">
-            <a:schemeClr val="accent1"/>
-          </a:effectRef>
-          <a:fontRef idx="minor">
-            <a:schemeClr val="lt1"/>
-          </a:fontRef>
-        </p:style>
-        <p:txBody>
-          <a:bodyPr rtlCol="0" anchor="ctr" lIns="274320" wrap="square"/>
-          <a:lstStyle/>
-          <a:p>
-            <a:pPr algn="l"/>
-            <a:r>
-              <a:rPr sz="4000" b="1" i="0">
-                <a:solidFill>
-                  <a:srgbClr val="FFFFFF"/>
-                </a:solidFill>
-                <a:latin typeface="Arial"/>
-              </a:rPr>
-              <a:t>Fix before the final cohort</a:t>
-            </a:r>
-          </a:p>
-        </p:txBody>
-      </p:sp>
-      <p:sp>
-        <p:nvSpPr>
-          <p:cNvPr id="19" name="stem fix"/>
+      </p:cxnSp>
+      <p:sp>
+        <p:nvSpPr>
+          <p:cNvPr id="22" name="references"/>
           <p:cNvSpPr txBox="1"/>
           <p:nvPr/>
         </p:nvSpPr>
         <p:spPr>
           <a:xfrm>
-            <a:off x="1060704" y="28474416"/>
-            <a:ext cx="8257032" cy="2651759"/>
+            <a:off x="1042416" y="24990552"/>
+            <a:ext cx="8293608" cy="6647688"/>
           </a:xfrm>
           <a:prstGeom prst="rect">
             <a:avLst/>
@@ -4214,172 +4108,390 @@
           <a:p>
             <a:pPr algn="l">
               <a:spcAft>
-                <a:spcPts val="800"/>
+                <a:spcPts val="300"/>
               </a:spcAft>
             </a:pPr>
             <a:r>
-              <a:rPr sz="2700" b="0" i="0">
-                <a:solidFill>
-                  <a:srgbClr val="1F2328"/>
-                </a:solidFill>
-                <a:latin typeface="Arial"/>
-              </a:rPr>
-              <a:t>BigEarthNet-S2 expects 10 optical bands. The first adapter kept 3 band kernels and scaled them by 10/3: first-layer weight norm </a:t>
-            </a:r>
-            <a:r>
-              <a:rPr sz="2700" b="1" i="0">
-                <a:solidFill>
-                  <a:srgbClr val="1F2328"/>
-                </a:solidFill>
-                <a:latin typeface="Arial"/>
-              </a:rPr>
-              <a:t>5.85×</a:t>
-            </a:r>
-            <a:r>
-              <a:rPr sz="2700" b="0" i="0">
-                <a:solidFill>
-                  <a:srgbClr val="1F2328"/>
-                </a:solidFill>
-                <a:latin typeface="Arial"/>
-              </a:rPr>
-              <a:t>. A seeded 3-channel stem plus every other transferred tensor raised dev F1 from 0.799 to 0.837 (12 scenes). We then retrained </a:t>
-            </a:r>
-            <a:r>
-              <a:rPr sz="2700" b="1" i="0">
-                <a:solidFill>
-                  <a:srgbClr val="1F2328"/>
-                </a:solidFill>
-                <a:latin typeface="Arial"/>
-              </a:rPr>
-              <a:t>all 32 cells</a:t>
-            </a:r>
-            <a:r>
-              <a:rPr sz="2700" b="0" i="0">
-                <a:solidFill>
-                  <a:srgbClr val="1F2328"/>
-                </a:solidFill>
-                <a:latin typeface="Arial"/>
-              </a:rPr>
-              <a:t> from initialization.</a:t>
-            </a:r>
-          </a:p>
-        </p:txBody>
-      </p:sp>
-      <p:sp>
-        <p:nvSpPr>
-          <p:cNvPr id="20" name="block: 8 arms × 4 budgets = 32 cells"/>
-          <p:cNvSpPr/>
-          <p:nvPr/>
-        </p:nvSpPr>
-        <p:spPr>
-          <a:xfrm>
-            <a:off x="10241280" y="5586984"/>
-            <a:ext cx="8805672" cy="8385048"/>
-          </a:xfrm>
-          <a:prstGeom prst="roundRect">
-            <a:avLst>
-              <a:gd name="adj" fmla="val 2726"/>
-            </a:avLst>
-          </a:prstGeom>
-          <a:solidFill>
-            <a:srgbClr val="F8F8F9"/>
-          </a:solidFill>
-          <a:ln w="19050">
+              <a:rPr sz="1700" b="0" i="0">
+                <a:solidFill>
+                  <a:srgbClr val="5B6477"/>
+                </a:solidFill>
+                <a:latin typeface="Arial"/>
+              </a:rPr>
+              <a:t>[1]  </a:t>
+            </a:r>
+            <a:r>
+              <a:rPr sz="1700" b="0" i="0">
+                <a:solidFill>
+                  <a:srgbClr val="1F2328"/>
+                </a:solidFill>
+                <a:latin typeface="Arial"/>
+              </a:rPr>
+              <a:t>F. S. Paolo et al. xView3-SAR: Detecting dark fishing activity using SAR imagery. NeurIPS 2022.</a:t>
+            </a:r>
+          </a:p>
+          <a:p>
+            <a:pPr algn="l">
+              <a:spcAft>
+                <a:spcPts val="300"/>
+              </a:spcAft>
+            </a:pPr>
+            <a:r>
+              <a:rPr sz="1700" b="0" i="0">
+                <a:solidFill>
+                  <a:srgbClr val="5B6477"/>
+                </a:solidFill>
+                <a:latin typeface="Arial"/>
+              </a:rPr>
+              <a:t>[2]  </a:t>
+            </a:r>
+            <a:r>
+              <a:rPr sz="1700" b="0" i="0">
+                <a:solidFill>
+                  <a:srgbClr val="1F2328"/>
+                </a:solidFill>
+                <a:latin typeface="Arial"/>
+              </a:rPr>
+              <a:t>R. Torres et al. GMES Sentinel-1 mission. Remote Sens. Environ. 2012.</a:t>
+            </a:r>
+          </a:p>
+          <a:p>
+            <a:pPr algn="l">
+              <a:spcAft>
+                <a:spcPts val="300"/>
+              </a:spcAft>
+            </a:pPr>
+            <a:r>
+              <a:rPr sz="1700" b="0" i="0">
+                <a:solidFill>
+                  <a:srgbClr val="5B6477"/>
+                </a:solidFill>
+                <a:latin typeface="Arial"/>
+              </a:rPr>
+              <a:t>[3]  </a:t>
+            </a:r>
+            <a:r>
+              <a:rPr sz="1700" b="0" i="0">
+                <a:solidFill>
+                  <a:srgbClr val="1F2328"/>
+                </a:solidFill>
+                <a:latin typeface="Arial"/>
+              </a:rPr>
+              <a:t>A. Dosovitskiy et al. An image is worth 16×16 words. ICLR 2021.</a:t>
+            </a:r>
+          </a:p>
+          <a:p>
+            <a:pPr algn="l">
+              <a:spcAft>
+                <a:spcPts val="300"/>
+              </a:spcAft>
+            </a:pPr>
+            <a:r>
+              <a:rPr sz="1700" b="0" i="0">
+                <a:solidFill>
+                  <a:srgbClr val="5B6477"/>
+                </a:solidFill>
+                <a:latin typeface="Arial"/>
+              </a:rPr>
+              <a:t>[4]  </a:t>
+            </a:r>
+            <a:r>
+              <a:rPr sz="1700" b="0" i="0">
+                <a:solidFill>
+                  <a:srgbClr val="1F2328"/>
+                </a:solidFill>
+                <a:latin typeface="Arial"/>
+              </a:rPr>
+              <a:t>S. Woo et al. ConvNeXt V2: Co-designing and scaling ConvNets with masked autoencoders. CVPR 2023.</a:t>
+            </a:r>
+          </a:p>
+          <a:p>
+            <a:pPr algn="l">
+              <a:spcAft>
+                <a:spcPts val="300"/>
+              </a:spcAft>
+            </a:pPr>
+            <a:r>
+              <a:rPr sz="1700" b="0" i="0">
+                <a:solidFill>
+                  <a:srgbClr val="5B6477"/>
+                </a:solidFill>
+                <a:latin typeface="Arial"/>
+              </a:rPr>
+              <a:t>[5]  </a:t>
+            </a:r>
+            <a:r>
+              <a:rPr sz="1700" b="0" i="0">
+                <a:solidFill>
+                  <a:srgbClr val="1F2328"/>
+                </a:solidFill>
+                <a:latin typeface="Arial"/>
+              </a:rPr>
+              <a:t>A. Steiner et al. How to train your ViT? TMLR 2022.</a:t>
+            </a:r>
+          </a:p>
+          <a:p>
+            <a:pPr algn="l">
+              <a:spcAft>
+                <a:spcPts val="300"/>
+              </a:spcAft>
+            </a:pPr>
+            <a:r>
+              <a:rPr sz="1700" b="0" i="0">
+                <a:solidFill>
+                  <a:srgbClr val="5B6477"/>
+                </a:solidFill>
+                <a:latin typeface="Arial"/>
+              </a:rPr>
+              <a:t>[6]  </a:t>
+            </a:r>
+            <a:r>
+              <a:rPr sz="1700" b="0" i="0">
+                <a:solidFill>
+                  <a:srgbClr val="1F2328"/>
+                </a:solidFill>
+                <a:latin typeface="Arial"/>
+              </a:rPr>
+              <a:t>J. Straka and I. Gruber. SatDINO: Self-supervised pretraining for remote sensing. arXiv:2508.21402, 2025.</a:t>
+            </a:r>
+          </a:p>
+          <a:p>
+            <a:pPr algn="l">
+              <a:spcAft>
+                <a:spcPts val="300"/>
+              </a:spcAft>
+            </a:pPr>
+            <a:r>
+              <a:rPr sz="1700" b="0" i="0">
+                <a:solidFill>
+                  <a:srgbClr val="5B6477"/>
+                </a:solidFill>
+                <a:latin typeface="Arial"/>
+              </a:rPr>
+              <a:t>[7]  </a:t>
+            </a:r>
+            <a:r>
+              <a:rPr sz="1700" b="0" i="0">
+                <a:solidFill>
+                  <a:srgbClr val="1F2328"/>
+                </a:solidFill>
+                <a:latin typeface="Arial"/>
+              </a:rPr>
+              <a:t>D. Liu et al. SARMAE: Masked autoencoder for SAR representation learning. CVPR 2026.</a:t>
+            </a:r>
+          </a:p>
+          <a:p>
+            <a:pPr algn="l">
+              <a:spcAft>
+                <a:spcPts val="300"/>
+              </a:spcAft>
+            </a:pPr>
+            <a:r>
+              <a:rPr sz="1700" b="0" i="0">
+                <a:solidFill>
+                  <a:srgbClr val="5B6477"/>
+                </a:solidFill>
+                <a:latin typeface="Arial"/>
+              </a:rPr>
+              <a:t>[8]  </a:t>
+            </a:r>
+            <a:r>
+              <a:rPr sz="1700" b="0" i="0">
+                <a:solidFill>
+                  <a:srgbClr val="1F2328"/>
+                </a:solidFill>
+                <a:latin typeface="Arial"/>
+              </a:rPr>
+              <a:t>K. N. Clasen et al. reBEN: Refined BigEarthNet dataset. IGARSS 2025.</a:t>
+            </a:r>
+          </a:p>
+          <a:p>
+            <a:pPr algn="l">
+              <a:spcAft>
+                <a:spcPts val="300"/>
+              </a:spcAft>
+            </a:pPr>
+            <a:r>
+              <a:rPr sz="1700" b="0" i="0">
+                <a:solidFill>
+                  <a:srgbClr val="5B6477"/>
+                </a:solidFill>
+                <a:latin typeface="Arial"/>
+              </a:rPr>
+              <a:t>[9]  </a:t>
+            </a:r>
+            <a:r>
+              <a:rPr sz="1700" b="0" i="0">
+                <a:solidFill>
+                  <a:srgbClr val="1F2328"/>
+                </a:solidFill>
+                <a:latin typeface="Arial"/>
+              </a:rPr>
+              <a:t>X. Zhou, D. Wang, and P. Krähenbühl. Objects as points. arXiv:1904.07850, 2019.</a:t>
+            </a:r>
+          </a:p>
+          <a:p>
+            <a:pPr algn="l">
+              <a:spcAft>
+                <a:spcPts val="300"/>
+              </a:spcAft>
+            </a:pPr>
+            <a:r>
+              <a:rPr sz="1700" b="0" i="0">
+                <a:solidFill>
+                  <a:srgbClr val="5B6477"/>
+                </a:solidFill>
+                <a:latin typeface="Arial"/>
+              </a:rPr>
+              <a:t>[10]  </a:t>
+            </a:r>
+            <a:r>
+              <a:rPr sz="1700" b="0" i="0">
+                <a:solidFill>
+                  <a:srgbClr val="1F2328"/>
+                </a:solidFill>
+                <a:latin typeface="Arial"/>
+              </a:rPr>
+              <a:t>T.-Y. Lin et al. Focal loss for dense object detection. ICCV 2017.</a:t>
+            </a:r>
+          </a:p>
+          <a:p>
+            <a:pPr algn="l">
+              <a:spcAft>
+                <a:spcPts val="300"/>
+              </a:spcAft>
+            </a:pPr>
+            <a:r>
+              <a:rPr sz="1700" b="0" i="0">
+                <a:solidFill>
+                  <a:srgbClr val="5B6477"/>
+                </a:solidFill>
+                <a:latin typeface="Arial"/>
+              </a:rPr>
+              <a:t>[11]  </a:t>
+            </a:r>
+            <a:r>
+              <a:rPr sz="1700" b="0" i="0">
+                <a:solidFill>
+                  <a:srgbClr val="1F2328"/>
+                </a:solidFill>
+                <a:latin typeface="Arial"/>
+              </a:rPr>
+              <a:t>A. Fuller, K. Millard, and J. R. Green. CROMA: Contrastive radar-optical masked autoencoders. NeurIPS 2023.</a:t>
+            </a:r>
+          </a:p>
+          <a:p>
+            <a:pPr algn="l">
+              <a:spcAft>
+                <a:spcPts val="300"/>
+              </a:spcAft>
+            </a:pPr>
+            <a:r>
+              <a:rPr sz="1700" b="0" i="0">
+                <a:solidFill>
+                  <a:srgbClr val="5B6477"/>
+                </a:solidFill>
+                <a:latin typeface="Arial"/>
+              </a:rPr>
+              <a:t>[12]  </a:t>
+            </a:r>
+            <a:r>
+              <a:rPr sz="1700" b="0" i="0">
+                <a:solidFill>
+                  <a:srgbClr val="1F2328"/>
+                </a:solidFill>
+                <a:latin typeface="Arial"/>
+              </a:rPr>
+              <a:t>Z. Xiong et al. Neural plasticity-inspired multimodal foundation model for Earth observation (DOFA). arXiv:2403.15356, 2024.</a:t>
+            </a:r>
+          </a:p>
+        </p:txBody>
+      </p:sp>
+      <p:sp>
+        <p:nvSpPr>
+          <p:cNvPr id="23" name="heading: 8 arms × 4 budgets = 32 cells"/>
+          <p:cNvSpPr txBox="1"/>
+          <p:nvPr/>
+        </p:nvSpPr>
+        <p:spPr>
+          <a:xfrm>
+            <a:off x="10241280" y="6693408"/>
+            <a:ext cx="8805672" cy="685800"/>
+          </a:xfrm>
+          <a:prstGeom prst="rect">
+            <a:avLst/>
+          </a:prstGeom>
+          <a:noFill/>
+        </p:spPr>
+        <p:txBody>
+          <a:bodyPr wrap="square" anchor="b" lIns="0" rIns="0" tIns="0" bIns="0">
+            <a:spAutoFit/>
+          </a:bodyPr>
+          <a:lstStyle/>
+          <a:p>
+            <a:pPr algn="ctr">
+              <a:spcAft>
+                <a:spcPts val="0"/>
+              </a:spcAft>
+            </a:pPr>
+            <a:r>
+              <a:rPr sz="4200" b="1" i="0">
+                <a:solidFill>
+                  <a:srgbClr val="14213D"/>
+                </a:solidFill>
+                <a:latin typeface="Arial"/>
+              </a:rPr>
+              <a:t>8 arms × 4 budgets = 32 cells</a:t>
+            </a:r>
+          </a:p>
+        </p:txBody>
+      </p:sp>
+      <p:cxnSp>
+        <p:nvCxnSpPr>
+          <p:cNvPr id="24" name="rule: 8 arms × 4 budgets = 32 cells"/>
+          <p:cNvCxnSpPr/>
+          <p:nvPr/>
+        </p:nvCxnSpPr>
+        <p:spPr>
+          <a:xfrm>
+            <a:off x="10241280" y="7470648"/>
+            <a:ext cx="8805672" cy="0"/>
+          </a:xfrm>
+          <a:prstGeom prst="line">
+            <a:avLst/>
+          </a:prstGeom>
+          <a:ln w="57150">
             <a:solidFill>
-              <a:srgbClr val="14213D"/>
+              <a:srgbClr val="B8BEC8"/>
             </a:solidFill>
           </a:ln>
-          <a:effectLst/>
         </p:spPr>
         <p:style>
-          <a:lnRef idx="1">
+          <a:lnRef idx="2">
             <a:schemeClr val="accent1"/>
           </a:lnRef>
-          <a:fillRef idx="3">
+          <a:fillRef idx="0">
             <a:schemeClr val="accent1"/>
           </a:fillRef>
-          <a:effectRef idx="2">
+          <a:effectRef idx="1">
             <a:schemeClr val="accent1"/>
           </a:effectRef>
           <a:fontRef idx="minor">
-            <a:schemeClr val="lt1"/>
+            <a:schemeClr val="tx1"/>
           </a:fontRef>
         </p:style>
-        <p:txBody>
-          <a:bodyPr rtlCol="0" anchor="ctr"/>
-          <a:lstStyle/>
-          <a:p>
-            <a:pPr algn="ctr"/>
-          </a:p>
-        </p:txBody>
-      </p:sp>
-      <p:sp>
-        <p:nvSpPr>
-          <p:cNvPr id="21" name="block title: 8 arms × 4 budgets = 32 cells"/>
-          <p:cNvSpPr/>
-          <p:nvPr/>
-        </p:nvSpPr>
-        <p:spPr>
-          <a:xfrm>
-            <a:off x="10241280" y="5586984"/>
-            <a:ext cx="8805672" cy="868680"/>
-          </a:xfrm>
-          <a:prstGeom prst="round2SameRect">
-            <a:avLst>
-              <a:gd name="adj1" fmla="val 25000"/>
-              <a:gd name="adj2" fmla="val 0"/>
-            </a:avLst>
-          </a:prstGeom>
-          <a:solidFill>
-            <a:srgbClr val="14213D"/>
-          </a:solidFill>
-          <a:ln>
-            <a:noFill/>
-          </a:ln>
-          <a:effectLst/>
-        </p:spPr>
-        <p:style>
-          <a:lnRef idx="1">
-            <a:schemeClr val="accent1"/>
-          </a:lnRef>
-          <a:fillRef idx="3">
-            <a:schemeClr val="accent1"/>
-          </a:fillRef>
-          <a:effectRef idx="2">
-            <a:schemeClr val="accent1"/>
-          </a:effectRef>
-          <a:fontRef idx="minor">
-            <a:schemeClr val="lt1"/>
-          </a:fontRef>
-        </p:style>
-        <p:txBody>
-          <a:bodyPr rtlCol="0" anchor="ctr" lIns="274320" wrap="square"/>
-          <a:lstStyle/>
-          <a:p>
-            <a:pPr algn="l"/>
-            <a:r>
-              <a:rPr sz="4000" b="1" i="0">
-                <a:solidFill>
-                  <a:srgbClr val="FFFFFF"/>
-                </a:solidFill>
-                <a:latin typeface="Arial"/>
-              </a:rPr>
-              <a:t>8 arms × 4 budgets = 32 cells</a:t>
-            </a:r>
-          </a:p>
-        </p:txBody>
-      </p:sp>
+      </p:cxnSp>
       <p:graphicFrame>
         <p:nvGraphicFramePr>
-          <p:cNvPr id="22" name="Table 21"/>
+          <p:cNvPr id="25" name="Table 24"/>
           <p:cNvGraphicFramePr>
             <a:graphicFrameLocks noGrp="1"/>
           </p:cNvGraphicFramePr>
           <p:nvPr/>
         </p:nvGraphicFramePr>
         <p:xfrm>
-          <a:off x="10515600" y="6684264"/>
-          <a:ext cx="8257032" cy="4206240"/>
+          <a:off x="10497311" y="7744968"/>
+          <a:ext cx="8293608" cy="4023360"/>
         </p:xfrm>
         <a:graphic>
           <a:graphicData uri="http://schemas.openxmlformats.org/drawingml/2006/table">
@@ -4388,11 +4500,11 @@
                 <a:tableStyleId>{5C22544A-7EE6-4342-B048-85BDC9FD1C3A}</a:tableStyleId>
               </a:tblPr>
               <a:tblGrid>
-                <a:gridCol w="1691640"/>
-                <a:gridCol w="3108960"/>
-                <a:gridCol w="3456432"/>
+                <a:gridCol w="2057400"/>
+                <a:gridCol w="3017520"/>
+                <a:gridCol w="3218688"/>
               </a:tblGrid>
-              <a:tr h="841248">
+              <a:tr h="804672">
                 <a:tc>
                   <a:txBody>
                     <a:bodyPr/>
@@ -4425,7 +4537,7 @@
                           </a:solidFill>
                           <a:latin typeface="Arial"/>
                         </a:rPr>
-                        <a:t>ViT-B/16 (86M)</a:t>
+                        <a:t>ViT-B/16 [3]</a:t>
                       </a:r>
                     </a:p>
                   </a:txBody>
@@ -4445,7 +4557,7 @@
                           </a:solidFill>
                           <a:latin typeface="Arial"/>
                         </a:rPr>
-                        <a:t>ConvNeXt-V2-B (89M)</a:t>
+                        <a:t>ConvNeXt V2 [4]</a:t>
                       </a:r>
                     </a:p>
                   </a:txBody>
@@ -4454,7 +4566,7 @@
                   </a:tcPr>
                 </a:tc>
               </a:tr>
-              <a:tr h="841248">
+              <a:tr h="804672">
                 <a:tc>
                   <a:txBody>
                     <a:bodyPr/>
@@ -4516,7 +4628,7 @@
                   </a:tcPr>
                 </a:tc>
               </a:tr>
-              <a:tr h="841248">
+              <a:tr h="804672">
                 <a:tc>
                   <a:txBody>
                     <a:bodyPr/>
@@ -4549,7 +4661,7 @@
                           </a:solidFill>
                           <a:latin typeface="Arial"/>
                         </a:rPr>
-                        <a:t>SatDINO (fMoW-RGB)</a:t>
+                        <a:t>SatDINO [6] (fMoW-RGB)</a:t>
                       </a:r>
                     </a:p>
                   </a:txBody>
@@ -4569,7 +4681,7 @@
                           </a:solidFill>
                           <a:latin typeface="Arial"/>
                         </a:rPr>
-                        <a:t>BigEarthNet-S2</a:t>
+                        <a:t>BigEarthNet-S2 [8]</a:t>
                       </a:r>
                     </a:p>
                   </a:txBody>
@@ -4578,7 +4690,7 @@
                   </a:tcPr>
                 </a:tc>
               </a:tr>
-              <a:tr h="841248">
+              <a:tr h="804672">
                 <a:tc>
                   <a:txBody>
                     <a:bodyPr/>
@@ -4611,7 +4723,7 @@
                           </a:solidFill>
                           <a:latin typeface="Arial"/>
                         </a:rPr>
-                        <a:t>SARMAE (SAR-1M)</a:t>
+                        <a:t>SARMAE [7] (SAR-1M)</a:t>
                       </a:r>
                     </a:p>
                   </a:txBody>
@@ -4631,7 +4743,7 @@
                           </a:solidFill>
                           <a:latin typeface="Arial"/>
                         </a:rPr>
-                        <a:t>BigEarthNet-S1</a:t>
+                        <a:t>BigEarthNet-S1 [8]</a:t>
                       </a:r>
                     </a:p>
                   </a:txBody>
@@ -4640,7 +4752,7 @@
                   </a:tcPr>
                 </a:tc>
               </a:tr>
-              <a:tr h="841248">
+              <a:tr h="804672">
                 <a:tc>
                   <a:txBody>
                     <a:bodyPr/>
@@ -4673,7 +4785,7 @@
                           </a:solidFill>
                           <a:latin typeface="Arial"/>
                         </a:rPr>
-                        <a:t>AugReg</a:t>
+                        <a:t>AugReg [5]</a:t>
                       </a:r>
                     </a:p>
                   </a:txBody>
@@ -4693,7 +4805,7 @@
                           </a:solidFill>
                           <a:latin typeface="Arial"/>
                         </a:rPr>
-                        <a:t>FCMAE</a:t>
+                        <a:t>FCMAE [4]</a:t>
                       </a:r>
                     </a:p>
                   </a:txBody>
@@ -4708,14 +4820,14 @@
       </p:graphicFrame>
       <p:sp>
         <p:nvSpPr>
-          <p:cNvPr id="23" name="design note"/>
+          <p:cNvPr id="26" name="design note"/>
           <p:cNvSpPr txBox="1"/>
           <p:nvPr/>
         </p:nvSpPr>
         <p:spPr>
           <a:xfrm>
-            <a:off x="10515600" y="11119104"/>
-            <a:ext cx="8257032" cy="2670048"/>
+            <a:off x="10497311" y="12042648"/>
+            <a:ext cx="8293608" cy="2011680"/>
           </a:xfrm>
           <a:prstGeom prst="rect">
             <a:avLst/>
@@ -4734,16 +4846,16 @@
               </a:spcAft>
             </a:pPr>
             <a:r>
-              <a:rPr sz="2700" b="0" i="0">
-                <a:solidFill>
-                  <a:srgbClr val="1F2328"/>
-                </a:solidFill>
-                <a:latin typeface="Arial"/>
-              </a:rPr>
-              <a:t>Only the initialization changes inside a track. We compare domains </a:t>
-            </a:r>
-            <a:r>
-              <a:rPr sz="2700" b="1" i="0">
+              <a:rPr sz="2900" b="0" i="0">
+                <a:solidFill>
+                  <a:srgbClr val="1F2328"/>
+                </a:solidFill>
+                <a:latin typeface="Arial"/>
+              </a:rPr>
+              <a:t>Only the initialization changes inside a track (86M vs. 89M parameters). We compare domains </a:t>
+            </a:r>
+            <a:r>
+              <a:rPr sz="2900" b="1" i="0">
                 <a:solidFill>
                   <a:srgbClr val="1F2328"/>
                 </a:solidFill>
@@ -4752,7 +4864,7 @@
               <a:t>within</a:t>
             </a:r>
             <a:r>
-              <a:rPr sz="2700" b="0" i="0">
+              <a:rPr sz="2900" b="0" i="0">
                 <a:solidFill>
                   <a:srgbClr val="1F2328"/>
                 </a:solidFill>
@@ -4765,117 +4877,87 @@
       </p:sp>
       <p:sp>
         <p:nvSpPr>
-          <p:cNvPr id="24" name="block: One shared point detector"/>
-          <p:cNvSpPr/>
-          <p:nvPr/>
-        </p:nvSpPr>
-        <p:spPr>
-          <a:xfrm>
-            <a:off x="10241280" y="14548104"/>
-            <a:ext cx="8805672" cy="8458200"/>
-          </a:xfrm>
-          <a:prstGeom prst="roundRect">
-            <a:avLst>
-              <a:gd name="adj" fmla="val 2702"/>
-            </a:avLst>
-          </a:prstGeom>
-          <a:solidFill>
-            <a:srgbClr val="F8F8F9"/>
-          </a:solidFill>
-          <a:ln w="19050">
+          <p:cNvPr id="27" name="heading: One shared point detector"/>
+          <p:cNvSpPr txBox="1"/>
+          <p:nvPr/>
+        </p:nvSpPr>
+        <p:spPr>
+          <a:xfrm>
+            <a:off x="10241280" y="14694408"/>
+            <a:ext cx="8805672" cy="685800"/>
+          </a:xfrm>
+          <a:prstGeom prst="rect">
+            <a:avLst/>
+          </a:prstGeom>
+          <a:noFill/>
+        </p:spPr>
+        <p:txBody>
+          <a:bodyPr wrap="square" anchor="b" lIns="0" rIns="0" tIns="0" bIns="0">
+            <a:spAutoFit/>
+          </a:bodyPr>
+          <a:lstStyle/>
+          <a:p>
+            <a:pPr algn="ctr">
+              <a:spcAft>
+                <a:spcPts val="0"/>
+              </a:spcAft>
+            </a:pPr>
+            <a:r>
+              <a:rPr sz="4200" b="1" i="0">
+                <a:solidFill>
+                  <a:srgbClr val="14213D"/>
+                </a:solidFill>
+                <a:latin typeface="Arial"/>
+              </a:rPr>
+              <a:t>One shared point detector</a:t>
+            </a:r>
+          </a:p>
+        </p:txBody>
+      </p:sp>
+      <p:cxnSp>
+        <p:nvCxnSpPr>
+          <p:cNvPr id="28" name="rule: One shared point detector"/>
+          <p:cNvCxnSpPr/>
+          <p:nvPr/>
+        </p:nvCxnSpPr>
+        <p:spPr>
+          <a:xfrm>
+            <a:off x="10241280" y="15471648"/>
+            <a:ext cx="8805672" cy="0"/>
+          </a:xfrm>
+          <a:prstGeom prst="line">
+            <a:avLst/>
+          </a:prstGeom>
+          <a:ln w="57150">
             <a:solidFill>
-              <a:srgbClr val="14213D"/>
+              <a:srgbClr val="B8BEC8"/>
             </a:solidFill>
           </a:ln>
-          <a:effectLst/>
         </p:spPr>
         <p:style>
-          <a:lnRef idx="1">
+          <a:lnRef idx="2">
             <a:schemeClr val="accent1"/>
           </a:lnRef>
-          <a:fillRef idx="3">
+          <a:fillRef idx="0">
             <a:schemeClr val="accent1"/>
           </a:fillRef>
-          <a:effectRef idx="2">
+          <a:effectRef idx="1">
             <a:schemeClr val="accent1"/>
           </a:effectRef>
           <a:fontRef idx="minor">
-            <a:schemeClr val="lt1"/>
+            <a:schemeClr val="tx1"/>
           </a:fontRef>
         </p:style>
-        <p:txBody>
-          <a:bodyPr rtlCol="0" anchor="ctr"/>
-          <a:lstStyle/>
-          <a:p>
-            <a:pPr algn="ctr"/>
-          </a:p>
-        </p:txBody>
-      </p:sp>
-      <p:sp>
-        <p:nvSpPr>
-          <p:cNvPr id="25" name="block title: One shared point detector"/>
+      </p:cxnSp>
+      <p:sp>
+        <p:nvSpPr>
+          <p:cNvPr id="29" name="input"/>
           <p:cNvSpPr/>
           <p:nvPr/>
         </p:nvSpPr>
         <p:spPr>
           <a:xfrm>
-            <a:off x="10241280" y="14548104"/>
-            <a:ext cx="8805672" cy="868680"/>
-          </a:xfrm>
-          <a:prstGeom prst="round2SameRect">
-            <a:avLst>
-              <a:gd name="adj1" fmla="val 25000"/>
-              <a:gd name="adj2" fmla="val 0"/>
-            </a:avLst>
-          </a:prstGeom>
-          <a:solidFill>
-            <a:srgbClr val="14213D"/>
-          </a:solidFill>
-          <a:ln>
-            <a:noFill/>
-          </a:ln>
-          <a:effectLst/>
-        </p:spPr>
-        <p:style>
-          <a:lnRef idx="1">
-            <a:schemeClr val="accent1"/>
-          </a:lnRef>
-          <a:fillRef idx="3">
-            <a:schemeClr val="accent1"/>
-          </a:fillRef>
-          <a:effectRef idx="2">
-            <a:schemeClr val="accent1"/>
-          </a:effectRef>
-          <a:fontRef idx="minor">
-            <a:schemeClr val="lt1"/>
-          </a:fontRef>
-        </p:style>
-        <p:txBody>
-          <a:bodyPr rtlCol="0" anchor="ctr" lIns="274320" wrap="square"/>
-          <a:lstStyle/>
-          <a:p>
-            <a:pPr algn="l"/>
-            <a:r>
-              <a:rPr sz="4000" b="1" i="0">
-                <a:solidFill>
-                  <a:srgbClr val="FFFFFF"/>
-                </a:solidFill>
-                <a:latin typeface="Arial"/>
-              </a:rPr>
-              <a:t>One shared point detector</a:t>
-            </a:r>
-          </a:p>
-        </p:txBody>
-      </p:sp>
-      <p:sp>
-        <p:nvSpPr>
-          <p:cNvPr id="26" name="input"/>
-          <p:cNvSpPr/>
-          <p:nvPr/>
-        </p:nvSpPr>
-        <p:spPr>
-          <a:xfrm>
-            <a:off x="10515600" y="16285464"/>
+            <a:off x="10497311" y="16431768"/>
             <a:ext cx="1737360" cy="1143000"/>
           </a:xfrm>
           <a:prstGeom prst="roundRect">
@@ -4906,7 +4988,7 @@
           </a:fontRef>
         </p:style>
         <p:txBody>
-          <a:bodyPr rtlCol="0" anchor="ctr" wrap="square" lIns="73152" rIns="73152"/>
+          <a:bodyPr rtlCol="0" anchor="ctr" wrap="square" lIns="109728" rIns="109728"/>
           <a:lstStyle/>
           <a:p>
             <a:pPr algn="ctr"/>
@@ -4929,7 +5011,7 @@
                 </a:solidFill>
                 <a:latin typeface="Arial"/>
               </a:rPr>
-              <a:t>VH − VV]</a:t>
+              <a:t>VH−VV]</a:t>
             </a:r>
           </a:p>
           <a:p>
@@ -4948,13 +5030,13 @@
       </p:sp>
       <p:sp>
         <p:nvSpPr>
-          <p:cNvPr id="27" name="encoder group"/>
+          <p:cNvPr id="30" name="encoder group"/>
           <p:cNvSpPr/>
           <p:nvPr/>
         </p:nvSpPr>
         <p:spPr>
           <a:xfrm>
-            <a:off x="12618719" y="15919704"/>
+            <a:off x="12600432" y="16066008"/>
             <a:ext cx="3566160" cy="1965960"/>
           </a:xfrm>
           <a:prstGeom prst="roundRect">
@@ -4993,13 +5075,13 @@
       </p:sp>
       <p:sp>
         <p:nvSpPr>
-          <p:cNvPr id="28" name="encoder group label"/>
+          <p:cNvPr id="31" name="encoder group label"/>
           <p:cNvSpPr txBox="1"/>
           <p:nvPr/>
         </p:nvSpPr>
         <p:spPr>
           <a:xfrm>
-            <a:off x="12618719" y="15553944"/>
+            <a:off x="12600432" y="15700248"/>
             <a:ext cx="3566160" cy="365760"/>
           </a:xfrm>
           <a:prstGeom prst="rect">
@@ -5019,7 +5101,7 @@
               </a:spcAft>
             </a:pPr>
             <a:r>
-              <a:rPr sz="1500" b="0" i="0">
+              <a:rPr sz="1700" b="0" i="0">
                 <a:solidFill>
                   <a:srgbClr val="6B7280"/>
                 </a:solidFill>
@@ -5032,13 +5114,13 @@
       </p:sp>
       <p:sp>
         <p:nvSpPr>
-          <p:cNvPr id="29" name="ViT encoder"/>
+          <p:cNvPr id="32" name="ViT encoder"/>
           <p:cNvSpPr/>
           <p:nvPr/>
         </p:nvSpPr>
         <p:spPr>
           <a:xfrm>
-            <a:off x="12755880" y="16011144"/>
+            <a:off x="12737592" y="16157448"/>
             <a:ext cx="3291840" cy="777240"/>
           </a:xfrm>
           <a:prstGeom prst="roundRect">
@@ -5069,12 +5151,12 @@
           </a:fontRef>
         </p:style>
         <p:txBody>
-          <a:bodyPr rtlCol="0" anchor="ctr" wrap="square" lIns="73152" rIns="73152"/>
+          <a:bodyPr rtlCol="0" anchor="ctr" wrap="square" lIns="109728" rIns="109728"/>
           <a:lstStyle/>
           <a:p>
             <a:pPr algn="ctr"/>
             <a:r>
-              <a:rPr sz="2200" b="0" i="0">
+              <a:rPr sz="1900" b="0" i="0">
                 <a:solidFill>
                   <a:srgbClr val="1F2328"/>
                 </a:solidFill>
@@ -5087,13 +5169,13 @@
       </p:sp>
       <p:sp>
         <p:nvSpPr>
-          <p:cNvPr id="30" name="CNN encoder"/>
+          <p:cNvPr id="33" name="CNN encoder"/>
           <p:cNvSpPr/>
           <p:nvPr/>
         </p:nvSpPr>
         <p:spPr>
           <a:xfrm>
-            <a:off x="12755880" y="17016984"/>
+            <a:off x="12737592" y="17163288"/>
             <a:ext cx="3291840" cy="777240"/>
           </a:xfrm>
           <a:prstGeom prst="roundRect">
@@ -5124,12 +5206,12 @@
           </a:fontRef>
         </p:style>
         <p:txBody>
-          <a:bodyPr rtlCol="0" anchor="ctr" wrap="square" lIns="73152" rIns="73152"/>
+          <a:bodyPr rtlCol="0" anchor="ctr" wrap="square" lIns="109728" rIns="109728"/>
           <a:lstStyle/>
           <a:p>
             <a:pPr algn="ctr"/>
             <a:r>
-              <a:rPr sz="2200" b="0" i="0">
+              <a:rPr sz="1900" b="0" i="0">
                 <a:solidFill>
                   <a:srgbClr val="1F2328"/>
                 </a:solidFill>
@@ -5142,14 +5224,14 @@
       </p:sp>
       <p:sp>
         <p:nvSpPr>
-          <p:cNvPr id="31" name="head"/>
+          <p:cNvPr id="34" name="head"/>
           <p:cNvSpPr/>
           <p:nvPr/>
         </p:nvSpPr>
         <p:spPr>
           <a:xfrm>
-            <a:off x="16642080" y="16285464"/>
-            <a:ext cx="2130552" cy="1143000"/>
+            <a:off x="16623792" y="16431768"/>
+            <a:ext cx="2167127" cy="1143000"/>
           </a:xfrm>
           <a:prstGeom prst="roundRect">
             <a:avLst/>
@@ -5179,7 +5261,7 @@
           </a:fontRef>
         </p:style>
         <p:txBody>
-          <a:bodyPr rtlCol="0" anchor="ctr" wrap="square" lIns="73152" rIns="73152"/>
+          <a:bodyPr rtlCol="0" anchor="ctr" wrap="square" lIns="109728" rIns="109728"/>
           <a:lstStyle/>
           <a:p>
             <a:pPr algn="ctr"/>
@@ -5209,13 +5291,13 @@
       </p:sp>
       <p:cxnSp>
         <p:nvCxnSpPr>
-          <p:cNvPr id="32" name="input to ViT"/>
+          <p:cNvPr id="35" name="input to ViT"/>
           <p:cNvCxnSpPr/>
           <p:nvPr/>
         </p:nvCxnSpPr>
         <p:spPr>
           <a:xfrm flipV="1">
-            <a:off x="12252960" y="16399764"/>
+            <a:off x="12234672" y="16546068"/>
             <a:ext cx="502920" cy="480060"/>
           </a:xfrm>
           <a:prstGeom prst="bentConnector3">
@@ -5245,13 +5327,13 @@
       </p:cxnSp>
       <p:cxnSp>
         <p:nvCxnSpPr>
-          <p:cNvPr id="33" name="input to CNN"/>
+          <p:cNvPr id="36" name="input to CNN"/>
           <p:cNvCxnSpPr/>
           <p:nvPr/>
         </p:nvCxnSpPr>
         <p:spPr>
           <a:xfrm>
-            <a:off x="12252960" y="16879824"/>
+            <a:off x="12234672" y="17026128"/>
             <a:ext cx="502920" cy="525780"/>
           </a:xfrm>
           <a:prstGeom prst="bentConnector3">
@@ -5281,13 +5363,13 @@
       </p:cxnSp>
       <p:cxnSp>
         <p:nvCxnSpPr>
-          <p:cNvPr id="34" name="encoders to head"/>
+          <p:cNvPr id="37" name="encoders to head"/>
           <p:cNvCxnSpPr/>
           <p:nvPr/>
         </p:nvCxnSpPr>
         <p:spPr>
           <a:xfrm>
-            <a:off x="16184880" y="16879824"/>
+            <a:off x="16166592" y="17026128"/>
             <a:ext cx="457200" cy="0"/>
           </a:xfrm>
           <a:prstGeom prst="line">
@@ -5317,14 +5399,14 @@
       </p:cxnSp>
       <p:sp>
         <p:nvSpPr>
-          <p:cNvPr id="35" name="scoring"/>
+          <p:cNvPr id="38" name="scoring"/>
           <p:cNvSpPr/>
           <p:nvPr/>
         </p:nvSpPr>
         <p:spPr>
           <a:xfrm>
-            <a:off x="10515600" y="18205704"/>
-            <a:ext cx="2478024" cy="1143000"/>
+            <a:off x="10497311" y="18352008"/>
+            <a:ext cx="2490216" cy="1143000"/>
           </a:xfrm>
           <a:prstGeom prst="roundRect">
             <a:avLst/>
@@ -5354,7 +5436,7 @@
           </a:fontRef>
         </p:style>
         <p:txBody>
-          <a:bodyPr rtlCol="0" anchor="ctr" wrap="square" lIns="73152" rIns="73152"/>
+          <a:bodyPr rtlCol="0" anchor="ctr" wrap="square" lIns="109728" rIns="109728"/>
           <a:lstStyle/>
           <a:p>
             <a:pPr algn="ctr"/>
@@ -5372,14 +5454,14 @@
       </p:sp>
       <p:sp>
         <p:nvSpPr>
-          <p:cNvPr id="36" name="threshold"/>
+          <p:cNvPr id="39" name="threshold"/>
           <p:cNvSpPr/>
           <p:nvPr/>
         </p:nvSpPr>
         <p:spPr>
           <a:xfrm>
-            <a:off x="13405104" y="18205704"/>
-            <a:ext cx="2478024" cy="1143000"/>
+            <a:off x="13399008" y="18352008"/>
+            <a:ext cx="2490216" cy="1143000"/>
           </a:xfrm>
           <a:prstGeom prst="roundRect">
             <a:avLst/>
@@ -5409,7 +5491,7 @@
           </a:fontRef>
         </p:style>
         <p:txBody>
-          <a:bodyPr rtlCol="0" anchor="ctr" wrap="square" lIns="73152" rIns="73152"/>
+          <a:bodyPr rtlCol="0" anchor="ctr" wrap="square" lIns="109728" rIns="109728"/>
           <a:lstStyle/>
           <a:p>
             <a:pPr algn="ctr"/>
@@ -5427,14 +5509,14 @@
       </p:sp>
       <p:sp>
         <p:nvSpPr>
-          <p:cNvPr id="37" name="decode"/>
+          <p:cNvPr id="40" name="decode"/>
           <p:cNvSpPr/>
           <p:nvPr/>
         </p:nvSpPr>
         <p:spPr>
           <a:xfrm>
-            <a:off x="16294608" y="18205704"/>
-            <a:ext cx="2478024" cy="1143000"/>
+            <a:off x="16300703" y="18352008"/>
+            <a:ext cx="2490216" cy="1143000"/>
           </a:xfrm>
           <a:prstGeom prst="roundRect">
             <a:avLst/>
@@ -5464,7 +5546,7 @@
           </a:fontRef>
         </p:style>
         <p:txBody>
-          <a:bodyPr rtlCol="0" anchor="ctr" wrap="square" lIns="73152" rIns="73152"/>
+          <a:bodyPr rtlCol="0" anchor="ctr" wrap="square" lIns="109728" rIns="109728"/>
           <a:lstStyle/>
           <a:p>
             <a:pPr algn="ctr"/>
@@ -5482,13 +5564,13 @@
       </p:sp>
       <p:cxnSp>
         <p:nvCxnSpPr>
-          <p:cNvPr id="38" name="head to decode"/>
+          <p:cNvPr id="41" name="head to decode"/>
           <p:cNvCxnSpPr/>
           <p:nvPr/>
         </p:nvCxnSpPr>
         <p:spPr>
           <a:xfrm>
-            <a:off x="17707356" y="17428464"/>
+            <a:off x="17707356" y="17574768"/>
             <a:ext cx="0" cy="777240"/>
           </a:xfrm>
           <a:prstGeom prst="line">
@@ -5518,13 +5600,13 @@
       </p:cxnSp>
       <p:cxnSp>
         <p:nvCxnSpPr>
-          <p:cNvPr id="39" name="decode to threshold"/>
+          <p:cNvPr id="42" name="decode to threshold"/>
           <p:cNvCxnSpPr/>
           <p:nvPr/>
         </p:nvCxnSpPr>
         <p:spPr>
           <a:xfrm flipH="1">
-            <a:off x="15883128" y="18777204"/>
+            <a:off x="15889223" y="18923508"/>
             <a:ext cx="411480" cy="0"/>
           </a:xfrm>
           <a:prstGeom prst="line">
@@ -5554,13 +5636,13 @@
       </p:cxnSp>
       <p:cxnSp>
         <p:nvCxnSpPr>
-          <p:cNvPr id="40" name="threshold to scoring"/>
+          <p:cNvPr id="43" name="threshold to scoring"/>
           <p:cNvCxnSpPr/>
           <p:nvPr/>
         </p:nvCxnSpPr>
         <p:spPr>
           <a:xfrm flipH="1">
-            <a:off x="12993624" y="18777204"/>
+            <a:off x="12987527" y="18923508"/>
             <a:ext cx="411480" cy="0"/>
           </a:xfrm>
           <a:prstGeom prst="line">
@@ -5590,14 +5672,14 @@
       </p:cxnSp>
       <p:sp>
         <p:nvSpPr>
-          <p:cNvPr id="41" name="detector bullets"/>
+          <p:cNvPr id="44" name="detector bullets"/>
           <p:cNvSpPr txBox="1"/>
           <p:nvPr/>
         </p:nvSpPr>
         <p:spPr>
           <a:xfrm>
-            <a:off x="10515600" y="19440144"/>
-            <a:ext cx="8257032" cy="3383280"/>
+            <a:off x="10497311" y="19815048"/>
+            <a:ext cx="8293608" cy="3410711"/>
           </a:xfrm>
           <a:prstGeom prst="rect">
             <a:avLst/>
@@ -5614,21 +5696,57 @@
               <a:spcAft>
                 <a:spcPts val="800"/>
               </a:spcAft>
+              <a:buSzPct val="70000"/>
               <a:buClr>
                 <a:srgbClr val="14213D"/>
               </a:buClr>
-              <a:buSzPct val="70000"/>
               <a:buFont typeface="Arial"/>
               <a:buChar char="■"/>
             </a:pPr>
             <a:r>
-              <a:rPr sz="2700" b="0" i="0">
-                <a:solidFill>
-                  <a:srgbClr val="1F2328"/>
-                </a:solidFill>
-                <a:latin typeface="Arial"/>
-              </a:rPr>
-              <a:t>CenterNet-style Gaussian heatmap and focal loss; F1 with 200 m geographic matching.</a:t>
+              <a:rPr sz="2900" b="0" i="0">
+                <a:solidFill>
+                  <a:srgbClr val="1F2328"/>
+                </a:solidFill>
+                <a:latin typeface="Arial"/>
+              </a:rPr>
+              <a:t>CenterNet-style heatmap </a:t>
+            </a:r>
+            <a:r>
+              <a:rPr sz="2900" b="0" i="0">
+                <a:solidFill>
+                  <a:srgbClr val="5B6477"/>
+                </a:solidFill>
+                <a:latin typeface="Arial"/>
+              </a:rPr>
+              <a:t>[9]</a:t>
+            </a:r>
+            <a:r>
+              <a:rPr sz="2900" b="0" i="0">
+                <a:solidFill>
+                  <a:srgbClr val="1F2328"/>
+                </a:solidFill>
+                <a:latin typeface="Arial"/>
+              </a:rPr>
+              <a:t> with focal loss </a:t>
+            </a:r>
+            <a:r>
+              <a:rPr sz="2900" b="0" i="0">
+                <a:solidFill>
+                  <a:srgbClr val="5B6477"/>
+                </a:solidFill>
+                <a:latin typeface="Arial"/>
+              </a:rPr>
+              <a:t>[10]</a:t>
+            </a:r>
+            <a:r>
+              <a:rPr sz="2900" b="0" i="0">
+                <a:solidFill>
+                  <a:srgbClr val="1F2328"/>
+                </a:solidFill>
+                <a:latin typeface="Arial"/>
+              </a:rPr>
+              <a:t>; F1 with 200 m geographic matching.</a:t>
             </a:r>
           </a:p>
           <a:p>
@@ -5636,15 +5754,15 @@
               <a:spcAft>
                 <a:spcPts val="800"/>
               </a:spcAft>
+              <a:buSzPct val="70000"/>
               <a:buClr>
                 <a:srgbClr val="14213D"/>
               </a:buClr>
-              <a:buSzPct val="70000"/>
               <a:buFont typeface="Arial"/>
               <a:buChar char="■"/>
             </a:pPr>
             <a:r>
-              <a:rPr sz="2700" b="0" i="0">
+              <a:rPr sz="2900" b="0" i="0">
                 <a:solidFill>
                   <a:srgbClr val="1F2328"/>
                 </a:solidFill>
@@ -5657,117 +5775,87 @@
       </p:sp>
       <p:sp>
         <p:nvSpPr>
-          <p:cNvPr id="42" name="block: Once-only held-out protocol"/>
-          <p:cNvSpPr/>
-          <p:nvPr/>
-        </p:nvSpPr>
-        <p:spPr>
-          <a:xfrm>
-            <a:off x="10241280" y="23573232"/>
-            <a:ext cx="8805672" cy="5888736"/>
-          </a:xfrm>
-          <a:prstGeom prst="roundRect">
-            <a:avLst>
-              <a:gd name="adj" fmla="val 3881"/>
-            </a:avLst>
-          </a:prstGeom>
-          <a:solidFill>
-            <a:srgbClr val="F8F8F9"/>
-          </a:solidFill>
-          <a:ln w="19050">
+          <p:cNvPr id="45" name="heading: Once-only held-out protocol"/>
+          <p:cNvSpPr txBox="1"/>
+          <p:nvPr/>
+        </p:nvSpPr>
+        <p:spPr>
+          <a:xfrm>
+            <a:off x="10241280" y="23436072"/>
+            <a:ext cx="8805672" cy="685800"/>
+          </a:xfrm>
+          <a:prstGeom prst="rect">
+            <a:avLst/>
+          </a:prstGeom>
+          <a:noFill/>
+        </p:spPr>
+        <p:txBody>
+          <a:bodyPr wrap="square" anchor="b" lIns="0" rIns="0" tIns="0" bIns="0">
+            <a:spAutoFit/>
+          </a:bodyPr>
+          <a:lstStyle/>
+          <a:p>
+            <a:pPr algn="ctr">
+              <a:spcAft>
+                <a:spcPts val="0"/>
+              </a:spcAft>
+            </a:pPr>
+            <a:r>
+              <a:rPr sz="4200" b="1" i="0">
+                <a:solidFill>
+                  <a:srgbClr val="14213D"/>
+                </a:solidFill>
+                <a:latin typeface="Arial"/>
+              </a:rPr>
+              <a:t>Once-only held-out protocol</a:t>
+            </a:r>
+          </a:p>
+        </p:txBody>
+      </p:sp>
+      <p:cxnSp>
+        <p:nvCxnSpPr>
+          <p:cNvPr id="46" name="rule: Once-only held-out protocol"/>
+          <p:cNvCxnSpPr/>
+          <p:nvPr/>
+        </p:nvCxnSpPr>
+        <p:spPr>
+          <a:xfrm>
+            <a:off x="10241280" y="24213312"/>
+            <a:ext cx="8805672" cy="0"/>
+          </a:xfrm>
+          <a:prstGeom prst="line">
+            <a:avLst/>
+          </a:prstGeom>
+          <a:ln w="57150">
             <a:solidFill>
-              <a:srgbClr val="14213D"/>
+              <a:srgbClr val="B8BEC8"/>
             </a:solidFill>
           </a:ln>
-          <a:effectLst/>
         </p:spPr>
         <p:style>
-          <a:lnRef idx="1">
+          <a:lnRef idx="2">
             <a:schemeClr val="accent1"/>
           </a:lnRef>
-          <a:fillRef idx="3">
+          <a:fillRef idx="0">
             <a:schemeClr val="accent1"/>
           </a:fillRef>
-          <a:effectRef idx="2">
+          <a:effectRef idx="1">
             <a:schemeClr val="accent1"/>
           </a:effectRef>
           <a:fontRef idx="minor">
-            <a:schemeClr val="lt1"/>
+            <a:schemeClr val="tx1"/>
           </a:fontRef>
         </p:style>
-        <p:txBody>
-          <a:bodyPr rtlCol="0" anchor="ctr"/>
-          <a:lstStyle/>
-          <a:p>
-            <a:pPr algn="ctr"/>
-          </a:p>
-        </p:txBody>
-      </p:sp>
-      <p:sp>
-        <p:nvSpPr>
-          <p:cNvPr id="43" name="block title: Once-only held-out protocol"/>
+      </p:cxnSp>
+      <p:sp>
+        <p:nvSpPr>
+          <p:cNvPr id="47" name="step 1 number"/>
           <p:cNvSpPr/>
           <p:nvPr/>
         </p:nvSpPr>
         <p:spPr>
           <a:xfrm>
-            <a:off x="10241280" y="23573232"/>
-            <a:ext cx="8805672" cy="868680"/>
-          </a:xfrm>
-          <a:prstGeom prst="round2SameRect">
-            <a:avLst>
-              <a:gd name="adj1" fmla="val 25000"/>
-              <a:gd name="adj2" fmla="val 0"/>
-            </a:avLst>
-          </a:prstGeom>
-          <a:solidFill>
-            <a:srgbClr val="14213D"/>
-          </a:solidFill>
-          <a:ln>
-            <a:noFill/>
-          </a:ln>
-          <a:effectLst/>
-        </p:spPr>
-        <p:style>
-          <a:lnRef idx="1">
-            <a:schemeClr val="accent1"/>
-          </a:lnRef>
-          <a:fillRef idx="3">
-            <a:schemeClr val="accent1"/>
-          </a:fillRef>
-          <a:effectRef idx="2">
-            <a:schemeClr val="accent1"/>
-          </a:effectRef>
-          <a:fontRef idx="minor">
-            <a:schemeClr val="lt1"/>
-          </a:fontRef>
-        </p:style>
-        <p:txBody>
-          <a:bodyPr rtlCol="0" anchor="ctr" lIns="274320" wrap="square"/>
-          <a:lstStyle/>
-          <a:p>
-            <a:pPr algn="l"/>
-            <a:r>
-              <a:rPr sz="4000" b="1" i="0">
-                <a:solidFill>
-                  <a:srgbClr val="FFFFFF"/>
-                </a:solidFill>
-                <a:latin typeface="Arial"/>
-              </a:rPr>
-              <a:t>Once-only held-out protocol</a:t>
-            </a:r>
-          </a:p>
-        </p:txBody>
-      </p:sp>
-      <p:sp>
-        <p:nvSpPr>
-          <p:cNvPr id="44" name="step 1 number"/>
-          <p:cNvSpPr/>
-          <p:nvPr/>
-        </p:nvSpPr>
-        <p:spPr>
-          <a:xfrm>
-            <a:off x="10698480" y="24899112"/>
+            <a:off x="10634472" y="24716232"/>
             <a:ext cx="548640" cy="548640"/>
           </a:xfrm>
           <a:prstGeom prst="ellipse">
@@ -5798,7 +5886,7 @@
           </a:fontRef>
         </p:style>
         <p:txBody>
-          <a:bodyPr rtlCol="0" anchor="ctr" wrap="square" lIns="73152" rIns="73152"/>
+          <a:bodyPr rtlCol="0" anchor="ctr" wrap="square" lIns="109728" rIns="109728"/>
           <a:lstStyle/>
           <a:p>
             <a:pPr algn="ctr"/>
@@ -5816,14 +5904,14 @@
       </p:sp>
       <p:sp>
         <p:nvSpPr>
-          <p:cNvPr id="45" name="step 1"/>
+          <p:cNvPr id="48" name="step 1"/>
           <p:cNvSpPr/>
           <p:nvPr/>
         </p:nvSpPr>
         <p:spPr>
           <a:xfrm>
-            <a:off x="11521440" y="24716232"/>
-            <a:ext cx="7068312" cy="914400"/>
+            <a:off x="11457432" y="24487632"/>
+            <a:ext cx="7196328" cy="1005840"/>
           </a:xfrm>
           <a:prstGeom prst="roundRect">
             <a:avLst/>
@@ -5853,7 +5941,7 @@
           </a:fontRef>
         </p:style>
         <p:txBody>
-          <a:bodyPr rtlCol="0" anchor="ctr" wrap="square" lIns="73152" rIns="73152"/>
+          <a:bodyPr rtlCol="0" anchor="ctr" wrap="square" lIns="109728" rIns="109728"/>
           <a:lstStyle/>
           <a:p>
             <a:pPr algn="l"/>
@@ -5880,14 +5968,14 @@
       </p:sp>
       <p:cxnSp>
         <p:nvCxnSpPr>
-          <p:cNvPr id="46" name="step arrow 1"/>
+          <p:cNvPr id="49" name="step arrow 1"/>
           <p:cNvCxnSpPr/>
           <p:nvPr/>
         </p:nvCxnSpPr>
         <p:spPr>
           <a:xfrm>
-            <a:off x="15055596" y="25630632"/>
-            <a:ext cx="0" cy="292608"/>
+            <a:off x="15055596" y="25493472"/>
+            <a:ext cx="0" cy="502920"/>
           </a:xfrm>
           <a:prstGeom prst="line">
             <a:avLst/>
@@ -5916,13 +6004,13 @@
       </p:cxnSp>
       <p:sp>
         <p:nvSpPr>
-          <p:cNvPr id="47" name="step 2 number"/>
+          <p:cNvPr id="50" name="step 2 number"/>
           <p:cNvSpPr/>
           <p:nvPr/>
         </p:nvSpPr>
         <p:spPr>
           <a:xfrm>
-            <a:off x="10698480" y="26106120"/>
+            <a:off x="10634472" y="26224992"/>
             <a:ext cx="548640" cy="548640"/>
           </a:xfrm>
           <a:prstGeom prst="ellipse">
@@ -5953,7 +6041,7 @@
           </a:fontRef>
         </p:style>
         <p:txBody>
-          <a:bodyPr rtlCol="0" anchor="ctr" wrap="square" lIns="73152" rIns="73152"/>
+          <a:bodyPr rtlCol="0" anchor="ctr" wrap="square" lIns="109728" rIns="109728"/>
           <a:lstStyle/>
           <a:p>
             <a:pPr algn="ctr"/>
@@ -5971,14 +6059,14 @@
       </p:sp>
       <p:sp>
         <p:nvSpPr>
-          <p:cNvPr id="48" name="step 2"/>
+          <p:cNvPr id="51" name="step 2"/>
           <p:cNvSpPr/>
           <p:nvPr/>
         </p:nvSpPr>
         <p:spPr>
           <a:xfrm>
-            <a:off x="11521440" y="25923240"/>
-            <a:ext cx="7068312" cy="914400"/>
+            <a:off x="11457432" y="25996392"/>
+            <a:ext cx="7196328" cy="1005840"/>
           </a:xfrm>
           <a:prstGeom prst="roundRect">
             <a:avLst/>
@@ -6008,7 +6096,7 @@
           </a:fontRef>
         </p:style>
         <p:txBody>
-          <a:bodyPr rtlCol="0" anchor="ctr" wrap="square" lIns="73152" rIns="73152"/>
+          <a:bodyPr rtlCol="0" anchor="ctr" wrap="square" lIns="109728" rIns="109728"/>
           <a:lstStyle/>
           <a:p>
             <a:pPr algn="l"/>
@@ -6035,14 +6123,14 @@
       </p:sp>
       <p:cxnSp>
         <p:nvCxnSpPr>
-          <p:cNvPr id="49" name="step arrow 2"/>
+          <p:cNvPr id="52" name="step arrow 2"/>
           <p:cNvCxnSpPr/>
           <p:nvPr/>
         </p:nvCxnSpPr>
         <p:spPr>
           <a:xfrm>
-            <a:off x="15055596" y="26837640"/>
-            <a:ext cx="0" cy="292608"/>
+            <a:off x="15055596" y="27002232"/>
+            <a:ext cx="0" cy="502920"/>
           </a:xfrm>
           <a:prstGeom prst="line">
             <a:avLst/>
@@ -6071,13 +6159,13 @@
       </p:cxnSp>
       <p:sp>
         <p:nvSpPr>
-          <p:cNvPr id="50" name="step 3 number"/>
+          <p:cNvPr id="53" name="step 3 number"/>
           <p:cNvSpPr/>
           <p:nvPr/>
         </p:nvSpPr>
         <p:spPr>
           <a:xfrm>
-            <a:off x="10698480" y="27313128"/>
+            <a:off x="10634472" y="27733752"/>
             <a:ext cx="548640" cy="548640"/>
           </a:xfrm>
           <a:prstGeom prst="ellipse">
@@ -6108,7 +6196,7 @@
           </a:fontRef>
         </p:style>
         <p:txBody>
-          <a:bodyPr rtlCol="0" anchor="ctr" wrap="square" lIns="73152" rIns="73152"/>
+          <a:bodyPr rtlCol="0" anchor="ctr" wrap="square" lIns="109728" rIns="109728"/>
           <a:lstStyle/>
           <a:p>
             <a:pPr algn="ctr"/>
@@ -6126,14 +6214,14 @@
       </p:sp>
       <p:sp>
         <p:nvSpPr>
-          <p:cNvPr id="51" name="step 3"/>
+          <p:cNvPr id="54" name="step 3"/>
           <p:cNvSpPr/>
           <p:nvPr/>
         </p:nvSpPr>
         <p:spPr>
           <a:xfrm>
-            <a:off x="11521440" y="27130248"/>
-            <a:ext cx="7068312" cy="914400"/>
+            <a:off x="11457432" y="27505152"/>
+            <a:ext cx="7196328" cy="1005840"/>
           </a:xfrm>
           <a:prstGeom prst="roundRect">
             <a:avLst/>
@@ -6163,7 +6251,7 @@
           </a:fontRef>
         </p:style>
         <p:txBody>
-          <a:bodyPr rtlCol="0" anchor="ctr" wrap="square" lIns="73152" rIns="73152"/>
+          <a:bodyPr rtlCol="0" anchor="ctr" wrap="square" lIns="109728" rIns="109728"/>
           <a:lstStyle/>
           <a:p>
             <a:pPr algn="l"/>
@@ -6190,14 +6278,14 @@
       </p:sp>
       <p:cxnSp>
         <p:nvCxnSpPr>
-          <p:cNvPr id="52" name="step arrow 3"/>
+          <p:cNvPr id="55" name="step arrow 3"/>
           <p:cNvCxnSpPr/>
           <p:nvPr/>
         </p:nvCxnSpPr>
         <p:spPr>
           <a:xfrm>
-            <a:off x="15055596" y="28044648"/>
-            <a:ext cx="0" cy="292608"/>
+            <a:off x="15055596" y="28510992"/>
+            <a:ext cx="0" cy="502920"/>
           </a:xfrm>
           <a:prstGeom prst="line">
             <a:avLst/>
@@ -6226,13 +6314,13 @@
       </p:cxnSp>
       <p:sp>
         <p:nvSpPr>
-          <p:cNvPr id="53" name="step 4 number"/>
+          <p:cNvPr id="56" name="step 4 number"/>
           <p:cNvSpPr/>
           <p:nvPr/>
         </p:nvSpPr>
         <p:spPr>
           <a:xfrm>
-            <a:off x="10698480" y="28520136"/>
+            <a:off x="10634472" y="29242512"/>
             <a:ext cx="548640" cy="548640"/>
           </a:xfrm>
           <a:prstGeom prst="ellipse">
@@ -6263,7 +6351,7 @@
           </a:fontRef>
         </p:style>
         <p:txBody>
-          <a:bodyPr rtlCol="0" anchor="ctr" wrap="square" lIns="73152" rIns="73152"/>
+          <a:bodyPr rtlCol="0" anchor="ctr" wrap="square" lIns="109728" rIns="109728"/>
           <a:lstStyle/>
           <a:p>
             <a:pPr algn="ctr"/>
@@ -6281,14 +6369,14 @@
       </p:sp>
       <p:sp>
         <p:nvSpPr>
-          <p:cNvPr id="54" name="step 4"/>
+          <p:cNvPr id="57" name="step 4"/>
           <p:cNvSpPr/>
           <p:nvPr/>
         </p:nvSpPr>
         <p:spPr>
           <a:xfrm>
-            <a:off x="11521440" y="28337256"/>
-            <a:ext cx="7068312" cy="914400"/>
+            <a:off x="11457432" y="29013912"/>
+            <a:ext cx="7196328" cy="1005840"/>
           </a:xfrm>
           <a:prstGeom prst="roundRect">
             <a:avLst/>
@@ -6318,7 +6406,7 @@
           </a:fontRef>
         </p:style>
         <p:txBody>
-          <a:bodyPr rtlCol="0" anchor="ctr" wrap="square" lIns="73152" rIns="73152"/>
+          <a:bodyPr rtlCol="0" anchor="ctr" wrap="square" lIns="109728" rIns="109728"/>
           <a:lstStyle/>
           <a:p>
             <a:pPr algn="l"/>
@@ -6345,111 +6433,81 @@
       </p:sp>
       <p:sp>
         <p:nvSpPr>
-          <p:cNvPr id="55" name="block: Pretraining helps most when labels are scarce"/>
-          <p:cNvSpPr/>
-          <p:nvPr/>
-        </p:nvSpPr>
-        <p:spPr>
-          <a:xfrm>
-            <a:off x="19687032" y="5586984"/>
-            <a:ext cx="13962888" cy="12883896"/>
-          </a:xfrm>
-          <a:prstGeom prst="roundRect">
-            <a:avLst>
-              <a:gd name="adj" fmla="val 1774"/>
-            </a:avLst>
-          </a:prstGeom>
-          <a:solidFill>
-            <a:srgbClr val="F8F8F9"/>
-          </a:solidFill>
-          <a:ln w="19050">
+          <p:cNvPr id="58" name="heading: Pretraining helps most when labels are scarce"/>
+          <p:cNvSpPr txBox="1"/>
+          <p:nvPr/>
+        </p:nvSpPr>
+        <p:spPr>
+          <a:xfrm>
+            <a:off x="19687032" y="6702552"/>
+            <a:ext cx="13962888" cy="685800"/>
+          </a:xfrm>
+          <a:prstGeom prst="rect">
+            <a:avLst/>
+          </a:prstGeom>
+          <a:noFill/>
+        </p:spPr>
+        <p:txBody>
+          <a:bodyPr wrap="square" anchor="b" lIns="0" rIns="0" tIns="0" bIns="0">
+            <a:spAutoFit/>
+          </a:bodyPr>
+          <a:lstStyle/>
+          <a:p>
+            <a:pPr algn="ctr">
+              <a:spcAft>
+                <a:spcPts val="0"/>
+              </a:spcAft>
+            </a:pPr>
+            <a:r>
+              <a:rPr sz="4200" b="1" i="0">
+                <a:solidFill>
+                  <a:srgbClr val="14213D"/>
+                </a:solidFill>
+                <a:latin typeface="Arial"/>
+              </a:rPr>
+              <a:t>Pretraining helps most when labels are scarce</a:t>
+            </a:r>
+          </a:p>
+        </p:txBody>
+      </p:sp>
+      <p:cxnSp>
+        <p:nvCxnSpPr>
+          <p:cNvPr id="59" name="rule: Pretraining helps most when labels are scarce"/>
+          <p:cNvCxnSpPr/>
+          <p:nvPr/>
+        </p:nvCxnSpPr>
+        <p:spPr>
+          <a:xfrm>
+            <a:off x="19687032" y="7479792"/>
+            <a:ext cx="13962888" cy="0"/>
+          </a:xfrm>
+          <a:prstGeom prst="line">
+            <a:avLst/>
+          </a:prstGeom>
+          <a:ln w="57150">
             <a:solidFill>
-              <a:srgbClr val="14213D"/>
+              <a:srgbClr val="B8BEC8"/>
             </a:solidFill>
           </a:ln>
-          <a:effectLst/>
         </p:spPr>
         <p:style>
-          <a:lnRef idx="1">
+          <a:lnRef idx="2">
             <a:schemeClr val="accent1"/>
           </a:lnRef>
-          <a:fillRef idx="3">
+          <a:fillRef idx="0">
             <a:schemeClr val="accent1"/>
           </a:fillRef>
-          <a:effectRef idx="2">
+          <a:effectRef idx="1">
             <a:schemeClr val="accent1"/>
           </a:effectRef>
           <a:fontRef idx="minor">
-            <a:schemeClr val="lt1"/>
+            <a:schemeClr val="tx1"/>
           </a:fontRef>
         </p:style>
-        <p:txBody>
-          <a:bodyPr rtlCol="0" anchor="ctr"/>
-          <a:lstStyle/>
-          <a:p>
-            <a:pPr algn="ctr"/>
-          </a:p>
-        </p:txBody>
-      </p:sp>
-      <p:sp>
-        <p:nvSpPr>
-          <p:cNvPr id="56" name="block title: Pretraining helps most when labels are scarce"/>
-          <p:cNvSpPr/>
-          <p:nvPr/>
-        </p:nvSpPr>
-        <p:spPr>
-          <a:xfrm>
-            <a:off x="19687032" y="5586984"/>
-            <a:ext cx="13962888" cy="868680"/>
-          </a:xfrm>
-          <a:prstGeom prst="round2SameRect">
-            <a:avLst>
-              <a:gd name="adj1" fmla="val 25000"/>
-              <a:gd name="adj2" fmla="val 0"/>
-            </a:avLst>
-          </a:prstGeom>
-          <a:solidFill>
-            <a:srgbClr val="14213D"/>
-          </a:solidFill>
-          <a:ln>
-            <a:noFill/>
-          </a:ln>
-          <a:effectLst/>
-        </p:spPr>
-        <p:style>
-          <a:lnRef idx="1">
-            <a:schemeClr val="accent1"/>
-          </a:lnRef>
-          <a:fillRef idx="3">
-            <a:schemeClr val="accent1"/>
-          </a:fillRef>
-          <a:effectRef idx="2">
-            <a:schemeClr val="accent1"/>
-          </a:effectRef>
-          <a:fontRef idx="minor">
-            <a:schemeClr val="lt1"/>
-          </a:fontRef>
-        </p:style>
-        <p:txBody>
-          <a:bodyPr rtlCol="0" anchor="ctr" lIns="274320" wrap="square"/>
-          <a:lstStyle/>
-          <a:p>
-            <a:pPr algn="l"/>
-            <a:r>
-              <a:rPr sz="4000" b="1" i="0">
-                <a:solidFill>
-                  <a:srgbClr val="FFFFFF"/>
-                </a:solidFill>
-                <a:latin typeface="Arial"/>
-              </a:rPr>
-              <a:t>Pretraining helps most when labels are scarce</a:t>
-            </a:r>
-          </a:p>
-        </p:txBody>
-      </p:sp>
+      </p:cxnSp>
       <p:pic>
         <p:nvPicPr>
-          <p:cNvPr id="57" name="figure: label efficiency" descr="poster_label_efficiency.png"/>
+          <p:cNvPr id="60" name="figure: label efficiency" descr="poster_label_efficiency.png"/>
           <p:cNvPicPr>
             <a:picLocks noChangeAspect="1"/>
           </p:cNvPicPr>
@@ -6463,8 +6521,8 @@
         </p:blipFill>
         <p:spPr>
           <a:xfrm>
-            <a:off x="20144232" y="6684264"/>
-            <a:ext cx="13048488" cy="10242830"/>
+            <a:off x="20034504" y="7754112"/>
+            <a:ext cx="13267944" cy="9211221"/>
           </a:xfrm>
           <a:prstGeom prst="rect">
             <a:avLst/>
@@ -6473,14 +6531,14 @@
       </p:pic>
       <p:sp>
         <p:nvSpPr>
-          <p:cNvPr id="58" name="figure 1 caption"/>
+          <p:cNvPr id="61" name="figure 1 caption"/>
           <p:cNvSpPr txBox="1"/>
           <p:nvPr/>
         </p:nvSpPr>
         <p:spPr>
           <a:xfrm>
-            <a:off x="19961352" y="17064254"/>
-            <a:ext cx="13414248" cy="1223746"/>
+            <a:off x="19943064" y="17102493"/>
+            <a:ext cx="13450824" cy="914400"/>
           </a:xfrm>
           <a:prstGeom prst="rect">
             <a:avLst/>
@@ -6505,118 +6563,88 @@
                 </a:solidFill>
                 <a:latin typeface="Arial"/>
               </a:rPr>
-              <a:t>F1 with 200 m matching. Each of the 32 cells is scored once with the threshold it picked on 8 dev scenes. Top: 16 held-out test scenes. Bottom: 50 near-shore, human-verified scenes. Seed 0; no intervals.</a:t>
-            </a:r>
-          </a:p>
-        </p:txBody>
-      </p:sp>
-      <p:sp>
-        <p:nvSpPr>
-          <p:cNvPr id="59" name="block: SAR vs. optical depends on backbone and budget"/>
-          <p:cNvSpPr/>
-          <p:nvPr/>
-        </p:nvSpPr>
-        <p:spPr>
-          <a:xfrm>
-            <a:off x="19687032" y="19046952"/>
-            <a:ext cx="13962888" cy="8147304"/>
-          </a:xfrm>
-          <a:prstGeom prst="roundRect">
-            <a:avLst>
-              <a:gd name="adj" fmla="val 2805"/>
-            </a:avLst>
-          </a:prstGeom>
-          <a:solidFill>
-            <a:srgbClr val="F8F8F9"/>
-          </a:solidFill>
-          <a:ln w="19050">
+              <a:t>F1 with 200 m matching. Each of the 32 cells is scored once with the threshold it picked on 8 dev scenes. Top: 16 held-out test scenes. Bottom: 50 near-shore, human-verified scenes. Seed 0.</a:t>
+            </a:r>
+          </a:p>
+        </p:txBody>
+      </p:sp>
+      <p:sp>
+        <p:nvSpPr>
+          <p:cNvPr id="62" name="heading: SAR vs. optical depends on backbone and budget"/>
+          <p:cNvSpPr txBox="1"/>
+          <p:nvPr/>
+        </p:nvSpPr>
+        <p:spPr>
+          <a:xfrm>
+            <a:off x="19687032" y="18717768"/>
+            <a:ext cx="13962888" cy="685800"/>
+          </a:xfrm>
+          <a:prstGeom prst="rect">
+            <a:avLst/>
+          </a:prstGeom>
+          <a:noFill/>
+        </p:spPr>
+        <p:txBody>
+          <a:bodyPr wrap="square" anchor="b" lIns="0" rIns="0" tIns="0" bIns="0">
+            <a:spAutoFit/>
+          </a:bodyPr>
+          <a:lstStyle/>
+          <a:p>
+            <a:pPr algn="ctr">
+              <a:spcAft>
+                <a:spcPts val="0"/>
+              </a:spcAft>
+            </a:pPr>
+            <a:r>
+              <a:rPr sz="4200" b="1" i="0">
+                <a:solidFill>
+                  <a:srgbClr val="14213D"/>
+                </a:solidFill>
+                <a:latin typeface="Arial"/>
+              </a:rPr>
+              <a:t>SAR vs. optical depends on backbone and budget</a:t>
+            </a:r>
+          </a:p>
+        </p:txBody>
+      </p:sp>
+      <p:cxnSp>
+        <p:nvCxnSpPr>
+          <p:cNvPr id="63" name="rule: SAR vs. optical depends on backbone and budget"/>
+          <p:cNvCxnSpPr/>
+          <p:nvPr/>
+        </p:nvCxnSpPr>
+        <p:spPr>
+          <a:xfrm>
+            <a:off x="19687032" y="19495008"/>
+            <a:ext cx="13962888" cy="0"/>
+          </a:xfrm>
+          <a:prstGeom prst="line">
+            <a:avLst/>
+          </a:prstGeom>
+          <a:ln w="57150">
             <a:solidFill>
-              <a:srgbClr val="14213D"/>
+              <a:srgbClr val="B8BEC8"/>
             </a:solidFill>
           </a:ln>
-          <a:effectLst/>
         </p:spPr>
         <p:style>
-          <a:lnRef idx="1">
+          <a:lnRef idx="2">
             <a:schemeClr val="accent1"/>
           </a:lnRef>
-          <a:fillRef idx="3">
+          <a:fillRef idx="0">
             <a:schemeClr val="accent1"/>
           </a:fillRef>
-          <a:effectRef idx="2">
+          <a:effectRef idx="1">
             <a:schemeClr val="accent1"/>
           </a:effectRef>
           <a:fontRef idx="minor">
-            <a:schemeClr val="lt1"/>
+            <a:schemeClr val="tx1"/>
           </a:fontRef>
         </p:style>
-        <p:txBody>
-          <a:bodyPr rtlCol="0" anchor="ctr"/>
-          <a:lstStyle/>
-          <a:p>
-            <a:pPr algn="ctr"/>
-          </a:p>
-        </p:txBody>
-      </p:sp>
-      <p:sp>
-        <p:nvSpPr>
-          <p:cNvPr id="60" name="block title: SAR vs. optical depends on backbone and budget"/>
-          <p:cNvSpPr/>
-          <p:nvPr/>
-        </p:nvSpPr>
-        <p:spPr>
-          <a:xfrm>
-            <a:off x="19687032" y="19046952"/>
-            <a:ext cx="13962888" cy="868680"/>
-          </a:xfrm>
-          <a:prstGeom prst="round2SameRect">
-            <a:avLst>
-              <a:gd name="adj1" fmla="val 25000"/>
-              <a:gd name="adj2" fmla="val 0"/>
-            </a:avLst>
-          </a:prstGeom>
-          <a:solidFill>
-            <a:srgbClr val="14213D"/>
-          </a:solidFill>
-          <a:ln>
-            <a:noFill/>
-          </a:ln>
-          <a:effectLst/>
-        </p:spPr>
-        <p:style>
-          <a:lnRef idx="1">
-            <a:schemeClr val="accent1"/>
-          </a:lnRef>
-          <a:fillRef idx="3">
-            <a:schemeClr val="accent1"/>
-          </a:fillRef>
-          <a:effectRef idx="2">
-            <a:schemeClr val="accent1"/>
-          </a:effectRef>
-          <a:fontRef idx="minor">
-            <a:schemeClr val="lt1"/>
-          </a:fontRef>
-        </p:style>
-        <p:txBody>
-          <a:bodyPr rtlCol="0" anchor="ctr" lIns="274320" wrap="square"/>
-          <a:lstStyle/>
-          <a:p>
-            <a:pPr algn="l"/>
-            <a:r>
-              <a:rPr sz="4000" b="1" i="0">
-                <a:solidFill>
-                  <a:srgbClr val="FFFFFF"/>
-                </a:solidFill>
-                <a:latin typeface="Arial"/>
-              </a:rPr>
-              <a:t>SAR vs. optical depends on backbone and budget</a:t>
-            </a:r>
-          </a:p>
-        </p:txBody>
-      </p:sp>
+      </p:cxnSp>
       <p:pic>
         <p:nvPicPr>
-          <p:cNvPr id="61" name="figure: SAR minus optical" descr="poster_sar_minus_optical.png"/>
+          <p:cNvPr id="64" name="figure: SAR minus optical" descr="poster_sar_minus_optical.png"/>
           <p:cNvPicPr>
             <a:picLocks noChangeAspect="1"/>
           </p:cNvPicPr>
@@ -6630,8 +6658,8 @@
         </p:blipFill>
         <p:spPr>
           <a:xfrm>
-            <a:off x="20144232" y="20144231"/>
-            <a:ext cx="13048488" cy="5655797"/>
+            <a:off x="20034504" y="19769328"/>
+            <a:ext cx="13267944" cy="5539106"/>
           </a:xfrm>
           <a:prstGeom prst="rect">
             <a:avLst/>
@@ -6640,14 +6668,14 @@
       </p:pic>
       <p:sp>
         <p:nvSpPr>
-          <p:cNvPr id="62" name="figure 2 caption"/>
+          <p:cNvPr id="65" name="figure 2 caption"/>
           <p:cNvSpPr txBox="1"/>
           <p:nvPr/>
         </p:nvSpPr>
         <p:spPr>
           <a:xfrm>
-            <a:off x="19961352" y="25937188"/>
-            <a:ext cx="13414248" cy="1074187"/>
+            <a:off x="19943064" y="25445594"/>
+            <a:ext cx="13450824" cy="914400"/>
           </a:xfrm>
           <a:prstGeom prst="rect">
             <a:avLst/>
@@ -6672,125 +6700,21 @@
                 </a:solidFill>
                 <a:latin typeface="Arial"/>
               </a:rPr>
-              <a:t>Gray band: the largest test-F1 change across 28 cells that we retrained with the same recipe and seed (±0.043). A contrast inside the band is within rerun variation.</a:t>
-            </a:r>
-          </a:p>
-        </p:txBody>
-      </p:sp>
-      <p:sp>
-        <p:nvSpPr>
-          <p:cNvPr id="63" name="block: The verified scenes are a coastal stress test"/>
-          <p:cNvSpPr/>
-          <p:nvPr/>
-        </p:nvSpPr>
-        <p:spPr>
-          <a:xfrm>
-            <a:off x="19687032" y="27761184"/>
-            <a:ext cx="13962888" cy="3602736"/>
-          </a:xfrm>
-          <a:prstGeom prst="roundRect">
-            <a:avLst>
-              <a:gd name="adj" fmla="val 6345"/>
-            </a:avLst>
-          </a:prstGeom>
-          <a:solidFill>
-            <a:srgbClr val="F8F8F9"/>
-          </a:solidFill>
-          <a:ln w="19050">
-            <a:solidFill>
-              <a:srgbClr val="14213D"/>
-            </a:solidFill>
-          </a:ln>
-          <a:effectLst/>
-        </p:spPr>
-        <p:style>
-          <a:lnRef idx="1">
-            <a:schemeClr val="accent1"/>
-          </a:lnRef>
-          <a:fillRef idx="3">
-            <a:schemeClr val="accent1"/>
-          </a:fillRef>
-          <a:effectRef idx="2">
-            <a:schemeClr val="accent1"/>
-          </a:effectRef>
-          <a:fontRef idx="minor">
-            <a:schemeClr val="lt1"/>
-          </a:fontRef>
-        </p:style>
-        <p:txBody>
-          <a:bodyPr rtlCol="0" anchor="ctr"/>
-          <a:lstStyle/>
-          <a:p>
-            <a:pPr algn="ctr"/>
-          </a:p>
-        </p:txBody>
-      </p:sp>
-      <p:sp>
-        <p:nvSpPr>
-          <p:cNvPr id="64" name="block title: The verified scenes are a coastal stress test"/>
-          <p:cNvSpPr/>
-          <p:nvPr/>
-        </p:nvSpPr>
-        <p:spPr>
-          <a:xfrm>
-            <a:off x="19687032" y="27761184"/>
-            <a:ext cx="13962888" cy="868680"/>
-          </a:xfrm>
-          <a:prstGeom prst="round2SameRect">
-            <a:avLst>
-              <a:gd name="adj1" fmla="val 25000"/>
-              <a:gd name="adj2" fmla="val 0"/>
-            </a:avLst>
-          </a:prstGeom>
-          <a:solidFill>
-            <a:srgbClr val="14213D"/>
-          </a:solidFill>
-          <a:ln>
-            <a:noFill/>
-          </a:ln>
-          <a:effectLst/>
-        </p:spPr>
-        <p:style>
-          <a:lnRef idx="1">
-            <a:schemeClr val="accent1"/>
-          </a:lnRef>
-          <a:fillRef idx="3">
-            <a:schemeClr val="accent1"/>
-          </a:fillRef>
-          <a:effectRef idx="2">
-            <a:schemeClr val="accent1"/>
-          </a:effectRef>
-          <a:fontRef idx="minor">
-            <a:schemeClr val="lt1"/>
-          </a:fontRef>
-        </p:style>
-        <p:txBody>
-          <a:bodyPr rtlCol="0" anchor="ctr" lIns="274320" wrap="square"/>
-          <a:lstStyle/>
-          <a:p>
-            <a:pPr algn="l"/>
-            <a:r>
-              <a:rPr sz="4000" b="1" i="0">
-                <a:solidFill>
-                  <a:srgbClr val="FFFFFF"/>
-                </a:solidFill>
-                <a:latin typeface="Arial"/>
-              </a:rPr>
-              <a:t>The verified scenes are a coastal stress test</a:t>
-            </a:r>
-          </a:p>
-        </p:txBody>
-      </p:sp>
-      <p:sp>
-        <p:nvSpPr>
-          <p:cNvPr id="65" name="stat 1 value"/>
+              <a:t>Bars: 95% intervals from 10,000 paired scene resamples. They cover scene sampling only: retraining 28 unchanged cells moved test F1 by up to 0.043.</a:t>
+            </a:r>
+          </a:p>
+        </p:txBody>
+      </p:sp>
+      <p:sp>
+        <p:nvSpPr>
+          <p:cNvPr id="66" name="heading: The verified scenes expose a coastal label gap"/>
           <p:cNvSpPr txBox="1"/>
           <p:nvPr/>
         </p:nvSpPr>
         <p:spPr>
           <a:xfrm>
-            <a:off x="19961352" y="28812744"/>
-            <a:ext cx="4471416" cy="868680"/>
+            <a:off x="19687032" y="27038808"/>
+            <a:ext cx="13962888" cy="685800"/>
           </a:xfrm>
           <a:prstGeom prst="rect">
             <a:avLst/>
@@ -6798,7 +6722,7 @@
           <a:noFill/>
         </p:spPr>
         <p:txBody>
-          <a:bodyPr wrap="square" anchor="t" lIns="0" rIns="0" tIns="0" bIns="0">
+          <a:bodyPr wrap="square" anchor="b" lIns="0" rIns="0" tIns="0" bIns="0">
             <a:spAutoFit/>
           </a:bodyPr>
           <a:lstStyle/>
@@ -6809,27 +6733,62 @@
               </a:spcAft>
             </a:pPr>
             <a:r>
-              <a:rPr sz="5000" b="1" i="0">
+              <a:rPr sz="4200" b="1" i="0">
                 <a:solidFill>
                   <a:srgbClr val="14213D"/>
                 </a:solidFill>
                 <a:latin typeface="Arial"/>
               </a:rPr>
-              <a:t>0.409–0.574</a:t>
-            </a:r>
-          </a:p>
-        </p:txBody>
-      </p:sp>
-      <p:sp>
-        <p:nvSpPr>
-          <p:cNvPr id="66" name="stat 1 label"/>
+              <a:t>The verified scenes expose a coastal label gap</a:t>
+            </a:r>
+          </a:p>
+        </p:txBody>
+      </p:sp>
+      <p:cxnSp>
+        <p:nvCxnSpPr>
+          <p:cNvPr id="67" name="rule: The verified scenes expose a coastal label gap"/>
+          <p:cNvCxnSpPr/>
+          <p:nvPr/>
+        </p:nvCxnSpPr>
+        <p:spPr>
+          <a:xfrm>
+            <a:off x="19687032" y="27816048"/>
+            <a:ext cx="13962888" cy="0"/>
+          </a:xfrm>
+          <a:prstGeom prst="line">
+            <a:avLst/>
+          </a:prstGeom>
+          <a:ln w="57150">
+            <a:solidFill>
+              <a:srgbClr val="B8BEC8"/>
+            </a:solidFill>
+          </a:ln>
+        </p:spPr>
+        <p:style>
+          <a:lnRef idx="2">
+            <a:schemeClr val="accent1"/>
+          </a:lnRef>
+          <a:fillRef idx="0">
+            <a:schemeClr val="accent1"/>
+          </a:fillRef>
+          <a:effectRef idx="1">
+            <a:schemeClr val="accent1"/>
+          </a:effectRef>
+          <a:fontRef idx="minor">
+            <a:schemeClr val="tx1"/>
+          </a:fontRef>
+        </p:style>
+      </p:cxnSp>
+      <p:sp>
+        <p:nvSpPr>
+          <p:cNvPr id="68" name="stat 1 value"/>
           <p:cNvSpPr txBox="1"/>
           <p:nvPr/>
         </p:nvSpPr>
         <p:spPr>
           <a:xfrm>
-            <a:off x="19961352" y="29727144"/>
-            <a:ext cx="4471416" cy="822960"/>
+            <a:off x="19943064" y="27998928"/>
+            <a:ext cx="4483608" cy="822960"/>
           </a:xfrm>
           <a:prstGeom prst="rect">
             <a:avLst/>
@@ -6848,15 +6807,38 @@
               </a:spcAft>
             </a:pPr>
             <a:r>
-              <a:rPr sz="2000" b="0" i="0">
-                <a:solidFill>
-                  <a:srgbClr val="1F2328"/>
-                </a:solidFill>
-                <a:latin typeface="Arial"/>
-              </a:rPr>
-              <a:t>verified F1, all 32 cells</a:t>
-            </a:r>
-          </a:p>
+              <a:rPr sz="5200" b="1" i="0">
+                <a:solidFill>
+                  <a:srgbClr val="14213D"/>
+                </a:solidFill>
+                <a:latin typeface="Arial"/>
+              </a:rPr>
+              <a:t>0.4% → 31%</a:t>
+            </a:r>
+          </a:p>
+        </p:txBody>
+      </p:sp>
+      <p:sp>
+        <p:nvSpPr>
+          <p:cNvPr id="69" name="stat 1 label"/>
+          <p:cNvSpPr txBox="1"/>
+          <p:nvPr/>
+        </p:nvSpPr>
+        <p:spPr>
+          <a:xfrm>
+            <a:off x="19943064" y="28867608"/>
+            <a:ext cx="4483608" cy="777240"/>
+          </a:xfrm>
+          <a:prstGeom prst="rect">
+            <a:avLst/>
+          </a:prstGeom>
+          <a:noFill/>
+        </p:spPr>
+        <p:txBody>
+          <a:bodyPr wrap="square" anchor="t" lIns="0" rIns="0" tIns="0" bIns="0">
+            <a:spAutoFit/>
+          </a:bodyPr>
+          <a:lstStyle/>
           <a:p>
             <a:pPr algn="ctr">
               <a:spcAft>
@@ -6870,32 +6852,9 @@
                 </a:solidFill>
                 <a:latin typeface="Arial"/>
               </a:rPr>
-              <a:t>(test: 0.657–0.888)</a:t>
-            </a:r>
-          </a:p>
-        </p:txBody>
-      </p:sp>
-      <p:sp>
-        <p:nvSpPr>
-          <p:cNvPr id="67" name="stat 2 value"/>
-          <p:cNvSpPr txBox="1"/>
-          <p:nvPr/>
-        </p:nvSpPr>
-        <p:spPr>
-          <a:xfrm>
-            <a:off x="24432768" y="28812744"/>
-            <a:ext cx="4471416" cy="868680"/>
-          </a:xfrm>
-          <a:prstGeom prst="rect">
-            <a:avLst/>
-          </a:prstGeom>
-          <a:noFill/>
-        </p:spPr>
-        <p:txBody>
-          <a:bodyPr wrap="square" anchor="t" lIns="0" rIns="0" tIns="0" bIns="0">
-            <a:spAutoFit/>
-          </a:bodyPr>
-          <a:lstStyle/>
+              <a:t>vessels within 2 km of shore:</a:t>
+            </a:r>
+          </a:p>
           <a:p>
             <a:pPr algn="ctr">
               <a:spcAft>
@@ -6903,27 +6862,27 @@
               </a:spcAft>
             </a:pPr>
             <a:r>
-              <a:rPr sz="5000" b="1" i="0">
-                <a:solidFill>
-                  <a:srgbClr val="14213D"/>
-                </a:solidFill>
-                <a:latin typeface="Arial"/>
-              </a:rPr>
-              <a:t>≤ 0.228</a:t>
-            </a:r>
-          </a:p>
-        </p:txBody>
-      </p:sp>
-      <p:sp>
-        <p:nvSpPr>
-          <p:cNvPr id="68" name="stat 2 label"/>
+              <a:rPr sz="2000" b="0" i="0">
+                <a:solidFill>
+                  <a:srgbClr val="1F2328"/>
+                </a:solidFill>
+                <a:latin typeface="Arial"/>
+              </a:rPr>
+              <a:t>training labels → verified scenes</a:t>
+            </a:r>
+          </a:p>
+        </p:txBody>
+      </p:sp>
+      <p:sp>
+        <p:nvSpPr>
+          <p:cNvPr id="70" name="stat 2 value"/>
           <p:cNvSpPr txBox="1"/>
           <p:nvPr/>
         </p:nvSpPr>
         <p:spPr>
           <a:xfrm>
-            <a:off x="24432768" y="29727144"/>
-            <a:ext cx="4471416" cy="822960"/>
+            <a:off x="24426672" y="27998928"/>
+            <a:ext cx="4483608" cy="822960"/>
           </a:xfrm>
           <a:prstGeom prst="rect">
             <a:avLst/>
@@ -6942,15 +6901,38 @@
               </a:spcAft>
             </a:pPr>
             <a:r>
-              <a:rPr sz="2000" b="0" i="0">
-                <a:solidFill>
-                  <a:srgbClr val="1F2328"/>
-                </a:solidFill>
-                <a:latin typeface="Arial"/>
-              </a:rPr>
-              <a:t>dark-vessel recall</a:t>
-            </a:r>
-          </a:p>
+              <a:rPr sz="5200" b="1" i="0">
+                <a:solidFill>
+                  <a:srgbClr val="14213D"/>
+                </a:solidFill>
+                <a:latin typeface="Arial"/>
+              </a:rPr>
+              <a:t>34 / 4,302</a:t>
+            </a:r>
+          </a:p>
+        </p:txBody>
+      </p:sp>
+      <p:sp>
+        <p:nvSpPr>
+          <p:cNvPr id="71" name="stat 2 label"/>
+          <p:cNvSpPr txBox="1"/>
+          <p:nvPr/>
+        </p:nvSpPr>
+        <p:spPr>
+          <a:xfrm>
+            <a:off x="24426672" y="28867608"/>
+            <a:ext cx="4483608" cy="777240"/>
+          </a:xfrm>
+          <a:prstGeom prst="rect">
+            <a:avLst/>
+          </a:prstGeom>
+          <a:noFill/>
+        </p:spPr>
+        <p:txBody>
+          <a:bodyPr wrap="square" anchor="t" lIns="0" rIns="0" tIns="0" bIns="0">
+            <a:spAutoFit/>
+          </a:bodyPr>
+          <a:lstStyle/>
           <a:p>
             <a:pPr algn="ctr">
               <a:spcAft>
@@ -6964,32 +6946,9 @@
                 </a:solidFill>
                 <a:latin typeface="Arial"/>
               </a:rPr>
-              <a:t>(3,644 dark vessels)</a:t>
-            </a:r>
-          </a:p>
-        </p:txBody>
-      </p:sp>
-      <p:sp>
-        <p:nvSpPr>
-          <p:cNvPr id="69" name="stat 3 value"/>
-          <p:cNvSpPr txBox="1"/>
-          <p:nvPr/>
-        </p:nvSpPr>
-        <p:spPr>
-          <a:xfrm>
-            <a:off x="28904184" y="28812744"/>
-            <a:ext cx="4471416" cy="868680"/>
-          </a:xfrm>
-          <a:prstGeom prst="rect">
-            <a:avLst/>
-          </a:prstGeom>
-          <a:noFill/>
-        </p:spPr>
-        <p:txBody>
-          <a:bodyPr wrap="square" anchor="t" lIns="0" rIns="0" tIns="0" bIns="0">
-            <a:spAutoFit/>
-          </a:bodyPr>
-          <a:lstStyle/>
+              <a:t>best cell's predictions</a:t>
+            </a:r>
+          </a:p>
           <a:p>
             <a:pPr algn="ctr">
               <a:spcAft>
@@ -6997,27 +6956,27 @@
               </a:spcAft>
             </a:pPr>
             <a:r>
-              <a:rPr sz="5000" b="1" i="0">
-                <a:solidFill>
-                  <a:srgbClr val="14213D"/>
-                </a:solidFill>
-                <a:latin typeface="Arial"/>
-              </a:rPr>
-              <a:t>≤ 0.041</a:t>
-            </a:r>
-          </a:p>
-        </p:txBody>
-      </p:sp>
-      <p:sp>
-        <p:nvSpPr>
-          <p:cNvPr id="70" name="stat 3 label"/>
+              <a:rPr sz="2000" b="0" i="0">
+                <a:solidFill>
+                  <a:srgbClr val="1F2328"/>
+                </a:solidFill>
+                <a:latin typeface="Arial"/>
+              </a:rPr>
+              <a:t>within 2 km of shore</a:t>
+            </a:r>
+          </a:p>
+        </p:txBody>
+      </p:sp>
+      <p:sp>
+        <p:nvSpPr>
+          <p:cNvPr id="72" name="stat 3 value"/>
           <p:cNvSpPr txBox="1"/>
           <p:nvPr/>
         </p:nvSpPr>
         <p:spPr>
           <a:xfrm>
-            <a:off x="28904184" y="29727144"/>
-            <a:ext cx="4471416" cy="822960"/>
+            <a:off x="28910280" y="27998928"/>
+            <a:ext cx="4483608" cy="822960"/>
           </a:xfrm>
           <a:prstGeom prst="rect">
             <a:avLst/>
@@ -7036,15 +6995,38 @@
               </a:spcAft>
             </a:pPr>
             <a:r>
-              <a:rPr sz="2000" b="0" i="0">
-                <a:solidFill>
-                  <a:srgbClr val="1F2328"/>
-                </a:solidFill>
-                <a:latin typeface="Arial"/>
-              </a:rPr>
-              <a:t>near-shore F1</a:t>
-            </a:r>
-          </a:p>
+              <a:rPr sz="5200" b="1" i="0">
+                <a:solidFill>
+                  <a:srgbClr val="14213D"/>
+                </a:solidFill>
+                <a:latin typeface="Arial"/>
+              </a:rPr>
+              <a:t>0.724</a:t>
+            </a:r>
+          </a:p>
+        </p:txBody>
+      </p:sp>
+      <p:sp>
+        <p:nvSpPr>
+          <p:cNvPr id="73" name="stat 3 label"/>
+          <p:cNvSpPr txBox="1"/>
+          <p:nvPr/>
+        </p:nvSpPr>
+        <p:spPr>
+          <a:xfrm>
+            <a:off x="28910280" y="28867608"/>
+            <a:ext cx="4483608" cy="777240"/>
+          </a:xfrm>
+          <a:prstGeom prst="rect">
+            <a:avLst/>
+          </a:prstGeom>
+          <a:noFill/>
+        </p:spPr>
+        <p:txBody>
+          <a:bodyPr wrap="square" anchor="t" lIns="0" rIns="0" tIns="0" bIns="0">
+            <a:spAutoFit/>
+          </a:bodyPr>
+          <a:lstStyle/>
           <a:p>
             <a:pPr algn="ctr">
               <a:spcAft>
@@ -7058,21 +7040,37 @@
                 </a:solidFill>
                 <a:latin typeface="Arial"/>
               </a:rPr>
-              <a:t>(2,686 vessels within 2 km)</a:t>
-            </a:r>
-          </a:p>
-        </p:txBody>
-      </p:sp>
-      <p:sp>
-        <p:nvSpPr>
-          <p:cNvPr id="71" name="stat note"/>
+              <a:t>best cell's offshore verified F1</a:t>
+            </a:r>
+          </a:p>
+          <a:p>
+            <a:pPr algn="ctr">
+              <a:spcAft>
+                <a:spcPts val="0"/>
+              </a:spcAft>
+            </a:pPr>
+            <a:r>
+              <a:rPr sz="2000" b="0" i="0">
+                <a:solidFill>
+                  <a:srgbClr val="1F2328"/>
+                </a:solidFill>
+                <a:latin typeface="Arial"/>
+              </a:rPr>
+              <a:t>(0.574 overall)</a:t>
+            </a:r>
+          </a:p>
+        </p:txBody>
+      </p:sp>
+      <p:sp>
+        <p:nvSpPr>
+          <p:cNvPr id="74" name="stat note"/>
           <p:cNvSpPr txBox="1"/>
           <p:nvPr/>
         </p:nvSpPr>
         <p:spPr>
           <a:xfrm>
-            <a:off x="19961352" y="30641544"/>
-            <a:ext cx="13414248" cy="548640"/>
+            <a:off x="19943064" y="29782008"/>
+            <a:ext cx="13450824" cy="822960"/>
           </a:xfrm>
           <a:prstGeom prst="rect">
             <a:avLst/>
@@ -7097,125 +7095,21 @@
                 </a:solidFill>
                 <a:latin typeface="Arial"/>
               </a:rPr>
-              <a:t>Precision stays at 0.639–0.909 while recall falls to 0.286–0.434: the detectors miss coastal vessels rather than over-fire.</a:t>
-            </a:r>
-          </a:p>
-        </p:txBody>
-      </p:sp>
-      <p:sp>
-        <p:nvSpPr>
-          <p:cNvPr id="72" name="block: Findings"/>
-          <p:cNvSpPr/>
-          <p:nvPr/>
-        </p:nvSpPr>
-        <p:spPr>
-          <a:xfrm>
-            <a:off x="34299144" y="5586984"/>
-            <a:ext cx="8805672" cy="11274552"/>
-          </a:xfrm>
-          <a:prstGeom prst="roundRect">
-            <a:avLst>
-              <a:gd name="adj" fmla="val 2596"/>
-            </a:avLst>
-          </a:prstGeom>
-          <a:solidFill>
-            <a:srgbClr val="F8F8F9"/>
-          </a:solidFill>
-          <a:ln w="19050">
-            <a:solidFill>
-              <a:srgbClr val="14213D"/>
-            </a:solidFill>
-          </a:ln>
-          <a:effectLst/>
-        </p:spPr>
-        <p:style>
-          <a:lnRef idx="1">
-            <a:schemeClr val="accent1"/>
-          </a:lnRef>
-          <a:fillRef idx="3">
-            <a:schemeClr val="accent1"/>
-          </a:fillRef>
-          <a:effectRef idx="2">
-            <a:schemeClr val="accent1"/>
-          </a:effectRef>
-          <a:fontRef idx="minor">
-            <a:schemeClr val="lt1"/>
-          </a:fontRef>
-        </p:style>
-        <p:txBody>
-          <a:bodyPr rtlCol="0" anchor="ctr"/>
-          <a:lstStyle/>
-          <a:p>
-            <a:pPr algn="ctr"/>
-          </a:p>
-        </p:txBody>
-      </p:sp>
-      <p:sp>
-        <p:nvSpPr>
-          <p:cNvPr id="73" name="block title: Findings"/>
-          <p:cNvSpPr/>
-          <p:nvPr/>
-        </p:nvSpPr>
-        <p:spPr>
-          <a:xfrm>
-            <a:off x="34299144" y="5586984"/>
-            <a:ext cx="8805672" cy="868680"/>
-          </a:xfrm>
-          <a:prstGeom prst="round2SameRect">
-            <a:avLst>
-              <a:gd name="adj1" fmla="val 25000"/>
-              <a:gd name="adj2" fmla="val 0"/>
-            </a:avLst>
-          </a:prstGeom>
-          <a:solidFill>
-            <a:srgbClr val="14213D"/>
-          </a:solidFill>
-          <a:ln>
-            <a:noFill/>
-          </a:ln>
-          <a:effectLst/>
-        </p:spPr>
-        <p:style>
-          <a:lnRef idx="1">
-            <a:schemeClr val="accent1"/>
-          </a:lnRef>
-          <a:fillRef idx="3">
-            <a:schemeClr val="accent1"/>
-          </a:fillRef>
-          <a:effectRef idx="2">
-            <a:schemeClr val="accent1"/>
-          </a:effectRef>
-          <a:fontRef idx="minor">
-            <a:schemeClr val="lt1"/>
-          </a:fontRef>
-        </p:style>
-        <p:txBody>
-          <a:bodyPr rtlCol="0" anchor="ctr" lIns="274320" wrap="square"/>
-          <a:lstStyle/>
-          <a:p>
-            <a:pPr algn="l"/>
-            <a:r>
-              <a:rPr sz="4000" b="1" i="0">
-                <a:solidFill>
-                  <a:srgbClr val="FFFFFF"/>
-                </a:solidFill>
-                <a:latin typeface="Arial"/>
-              </a:rPr>
-              <a:t>Findings</a:t>
-            </a:r>
-          </a:p>
-        </p:txBody>
-      </p:sp>
-      <p:sp>
-        <p:nvSpPr>
-          <p:cNvPr id="74" name="hero number"/>
+              <a:t>Every cell reaches at most 0.021 near-shore recall and 0.228 dark-vessel recall, while precision stays at 0.639–0.909: the detectors learned to stay silent near shore.</a:t>
+            </a:r>
+          </a:p>
+        </p:txBody>
+      </p:sp>
+      <p:sp>
+        <p:nvSpPr>
+          <p:cNvPr id="75" name="heading: Findings"/>
           <p:cNvSpPr txBox="1"/>
           <p:nvPr/>
         </p:nvSpPr>
         <p:spPr>
           <a:xfrm>
-            <a:off x="34573463" y="6684264"/>
-            <a:ext cx="8257032" cy="1005840"/>
+            <a:off x="34299144" y="6702552"/>
+            <a:ext cx="8805672" cy="685800"/>
           </a:xfrm>
           <a:prstGeom prst="rect">
             <a:avLst/>
@@ -7223,7 +7117,7 @@
           <a:noFill/>
         </p:spPr>
         <p:txBody>
-          <a:bodyPr wrap="square" anchor="t" lIns="0" rIns="0" tIns="0" bIns="0">
+          <a:bodyPr wrap="square" anchor="b" lIns="0" rIns="0" tIns="0" bIns="0">
             <a:spAutoFit/>
           </a:bodyPr>
           <a:lstStyle/>
@@ -7234,27 +7128,101 @@
               </a:spcAft>
             </a:pPr>
             <a:r>
+              <a:rPr sz="4200" b="1" i="0">
+                <a:solidFill>
+                  <a:srgbClr val="14213D"/>
+                </a:solidFill>
+                <a:latin typeface="Arial"/>
+              </a:rPr>
+              <a:t>Findings</a:t>
+            </a:r>
+          </a:p>
+        </p:txBody>
+      </p:sp>
+      <p:cxnSp>
+        <p:nvCxnSpPr>
+          <p:cNvPr id="76" name="rule: Findings"/>
+          <p:cNvCxnSpPr/>
+          <p:nvPr/>
+        </p:nvCxnSpPr>
+        <p:spPr>
+          <a:xfrm>
+            <a:off x="34299144" y="7479792"/>
+            <a:ext cx="8805672" cy="0"/>
+          </a:xfrm>
+          <a:prstGeom prst="line">
+            <a:avLst/>
+          </a:prstGeom>
+          <a:ln w="57150">
+            <a:solidFill>
+              <a:srgbClr val="B8BEC8"/>
+            </a:solidFill>
+          </a:ln>
+        </p:spPr>
+        <p:style>
+          <a:lnRef idx="2">
+            <a:schemeClr val="accent1"/>
+          </a:lnRef>
+          <a:fillRef idx="0">
+            <a:schemeClr val="accent1"/>
+          </a:fillRef>
+          <a:effectRef idx="1">
+            <a:schemeClr val="accent1"/>
+          </a:effectRef>
+          <a:fontRef idx="minor">
+            <a:schemeClr val="tx1"/>
+          </a:fontRef>
+        </p:style>
+      </p:cxnSp>
+      <p:sp>
+        <p:nvSpPr>
+          <p:cNvPr id="77" name="hero number"/>
+          <p:cNvSpPr txBox="1"/>
+          <p:nvPr/>
+        </p:nvSpPr>
+        <p:spPr>
+          <a:xfrm>
+            <a:off x="34555176" y="7662672"/>
+            <a:ext cx="8293608" cy="1005840"/>
+          </a:xfrm>
+          <a:prstGeom prst="rect">
+            <a:avLst/>
+          </a:prstGeom>
+          <a:noFill/>
+        </p:spPr>
+        <p:txBody>
+          <a:bodyPr wrap="square" anchor="t" lIns="0" rIns="0" tIns="0" bIns="0">
+            <a:spAutoFit/>
+          </a:bodyPr>
+          <a:lstStyle/>
+          <a:p>
+            <a:pPr algn="ctr">
+              <a:spcAft>
+                <a:spcPts val="0"/>
+              </a:spcAft>
+            </a:pPr>
+            <a:r>
               <a:rPr sz="6000" b="1" i="0">
                 <a:solidFill>
                   <a:srgbClr val="009E73"/>
                 </a:solidFill>
                 <a:latin typeface="Arial"/>
               </a:rPr>
-              <a:t>12 ≈ 111</a:t>
-            </a:r>
-          </a:p>
-        </p:txBody>
-      </p:sp>
-      <p:sp>
-        <p:nvSpPr>
-          <p:cNvPr id="75" name="hero caption"/>
+              <a:t>12 / 12</a:t>
+            </a:r>
+          </a:p>
+        </p:txBody>
+      </p:sp>
+      <p:sp>
+        <p:nvSpPr>
+          <p:cNvPr id="78" name="hero caption"/>
           <p:cNvSpPr txBox="1"/>
           <p:nvPr/>
         </p:nvSpPr>
         <p:spPr>
           <a:xfrm>
-            <a:off x="34573463" y="7735824"/>
-            <a:ext cx="8257032" cy="1188720"/>
+            <a:off x="34555176" y="8714232"/>
+            <a:ext cx="8293608" cy="1005840"/>
           </a:xfrm>
           <a:prstGeom prst="rect">
             <a:avLst/>
@@ -7273,27 +7241,27 @@
               </a:spcAft>
             </a:pPr>
             <a:r>
-              <a:rPr sz="2700" b="0" i="0">
-                <a:solidFill>
-                  <a:srgbClr val="1F2328"/>
-                </a:solidFill>
-                <a:latin typeface="Arial"/>
-              </a:rPr>
-              <a:t>On the verified scenes, ImageNet ViT with 12 training scenes matches random ViT with 111 (0.523 vs. 0.522 F1).</a:t>
-            </a:r>
-          </a:p>
-        </p:txBody>
-      </p:sp>
-      <p:sp>
-        <p:nvSpPr>
-          <p:cNvPr id="76" name="findings"/>
+              <a:rPr sz="2900" b="0" i="0">
+                <a:solidFill>
+                  <a:srgbClr val="1F2328"/>
+                </a:solidFill>
+                <a:latin typeface="Arial"/>
+              </a:rPr>
+              <a:t>pretrained-vs-random comparisons at 12 training scenes have a 95% interval above zero.</a:t>
+            </a:r>
+          </a:p>
+        </p:txBody>
+      </p:sp>
+      <p:sp>
+        <p:nvSpPr>
+          <p:cNvPr id="79" name="findings"/>
           <p:cNvSpPr txBox="1"/>
           <p:nvPr/>
         </p:nvSpPr>
         <p:spPr>
           <a:xfrm>
-            <a:off x="34573463" y="9198864"/>
-            <a:ext cx="8257032" cy="7479792"/>
+            <a:off x="34555176" y="9994392"/>
+            <a:ext cx="8293608" cy="8567928"/>
           </a:xfrm>
           <a:prstGeom prst="rect">
             <a:avLst/>
@@ -7317,7 +7285,7 @@
               <a:buAutoNum type="arabicPlain"/>
             </a:pPr>
             <a:r>
-              <a:rPr sz="2700" b="1" i="0">
+              <a:rPr sz="2900" b="1" i="0">
                 <a:solidFill>
                   <a:srgbClr val="1F2328"/>
                 </a:solidFill>
@@ -7326,13 +7294,13 @@
               <a:t>Pretraining pays off with few labels.</a:t>
             </a:r>
             <a:r>
-              <a:rPr sz="2700" b="0" i="0">
-                <a:solidFill>
-                  <a:srgbClr val="1F2328"/>
-                </a:solidFill>
-                <a:latin typeface="Arial"/>
-              </a:rPr>
-              <a:t> At 12 scenes every pretrained arm beats random: +0.063 to +0.143 test F1, +0.048 to +0.111 verified F1.</a:t>
+              <a:rPr sz="2900" b="0" i="0">
+                <a:solidFill>
+                  <a:srgbClr val="1F2328"/>
+                </a:solidFill>
+                <a:latin typeface="Arial"/>
+              </a:rPr>
+              <a:t> Gains at 12 scenes: +0.063 to +0.143 test F1, +0.048 to +0.111 verified F1.</a:t>
             </a:r>
           </a:p>
           <a:p>
@@ -7347,22 +7315,22 @@
               <a:buAutoNum type="arabicPlain"/>
             </a:pPr>
             <a:r>
-              <a:rPr sz="2700" b="1" i="0">
-                <a:solidFill>
-                  <a:srgbClr val="1F2328"/>
-                </a:solidFill>
-                <a:latin typeface="Arial"/>
-              </a:rPr>
-              <a:t>SAR beats optical only while labels are scarce.</a:t>
-            </a:r>
-            <a:r>
-              <a:rPr sz="2700" b="0" i="0">
-                <a:solidFill>
-                  <a:srgbClr val="1F2328"/>
-                </a:solidFill>
-                <a:latin typeface="Arial"/>
-              </a:rPr>
-              <a:t> CNN: +0.080 test F1 at 12 scenes, −0.018 at 111. ViT: no stable order.</a:t>
+              <a:rPr sz="2900" b="1" i="0">
+                <a:solidFill>
+                  <a:srgbClr val="1F2328"/>
+                </a:solidFill>
+                <a:latin typeface="Arial"/>
+              </a:rPr>
+              <a:t>SAR beats optical only for the CNN, and only with few labels:</a:t>
+            </a:r>
+            <a:r>
+              <a:rPr sz="2900" b="0" i="0">
+                <a:solidFill>
+                  <a:srgbClr val="1F2328"/>
+                </a:solidFill>
+                <a:latin typeface="Arial"/>
+              </a:rPr>
+              <a:t> +0.080 [+0.036, +0.121] test F1 at 12 scenes, but −0.073 [−0.101, −0.046] verified F1 at 111. ViT: no stable order.</a:t>
             </a:r>
           </a:p>
           <a:p>
@@ -7377,7 +7345,7 @@
               <a:buAutoNum type="arabicPlain"/>
             </a:pPr>
             <a:r>
-              <a:rPr sz="2700" b="1" i="0">
+              <a:rPr sz="2900" b="1" i="0">
                 <a:solidFill>
                   <a:srgbClr val="1F2328"/>
                 </a:solidFill>
@@ -7386,13 +7354,13 @@
               <a:t>The input adapter matters.</a:t>
             </a:r>
             <a:r>
-              <a:rPr sz="2700" b="0" i="0">
-                <a:solidFill>
-                  <a:srgbClr val="1F2328"/>
-                </a:solidFill>
-                <a:latin typeface="Arial"/>
-              </a:rPr>
-              <a:t> With a seeded 3-channel stem, BigEarthNet-S2 beats random at every budget (+0.025 to +0.063 test F1).</a:t>
+              <a:rPr sz="2900" b="0" i="0">
+                <a:solidFill>
+                  <a:srgbClr val="1F2328"/>
+                </a:solidFill>
+                <a:latin typeface="Arial"/>
+              </a:rPr>
+              <a:t> With a seeded 3-channel stem instead of band slicing, BigEarthNet-S2 beats random at every budget (+0.025 to +0.063 test F1).</a:t>
             </a:r>
           </a:p>
           <a:p>
@@ -7407,140 +7375,110 @@
               <a:buAutoNum type="arabicPlain"/>
             </a:pPr>
             <a:r>
-              <a:rPr sz="2700" b="1" i="0">
-                <a:solidFill>
-                  <a:srgbClr val="1F2328"/>
-                </a:solidFill>
-                <a:latin typeface="Arial"/>
-              </a:rPr>
-              <a:t>Coastal and dark vessels stay hard.</a:t>
-            </a:r>
-            <a:r>
-              <a:rPr sz="2700" b="0" i="0">
-                <a:solidFill>
-                  <a:srgbClr val="1F2328"/>
-                </a:solidFill>
-                <a:latin typeface="Arial"/>
-              </a:rPr>
-              <a:t> Verified F1 is 0.409–0.574 (test: 0.657–0.888). Dark-vessel recall ≤ 0.228; near-shore F1 ≤ 0.041.</a:t>
-            </a:r>
-          </a:p>
-        </p:txBody>
-      </p:sp>
-      <p:sp>
-        <p:nvSpPr>
-          <p:cNvPr id="77" name="block: Limits"/>
-          <p:cNvSpPr/>
-          <p:nvPr/>
-        </p:nvSpPr>
-        <p:spPr>
-          <a:xfrm>
-            <a:off x="34299144" y="17437608"/>
-            <a:ext cx="8805672" cy="5696712"/>
-          </a:xfrm>
-          <a:prstGeom prst="roundRect">
-            <a:avLst>
-              <a:gd name="adj" fmla="val 4012"/>
-            </a:avLst>
-          </a:prstGeom>
-          <a:solidFill>
-            <a:srgbClr val="F8F8F9"/>
-          </a:solidFill>
-          <a:ln w="19050">
+              <a:rPr sz="2900" b="1" i="0">
+                <a:solidFill>
+                  <a:srgbClr val="1F2328"/>
+                </a:solidFill>
+                <a:latin typeface="Arial"/>
+              </a:rPr>
+              <a:t>The coastal gap is a label gap.</a:t>
+            </a:r>
+            <a:r>
+              <a:rPr sz="2900" b="0" i="0">
+                <a:solidFill>
+                  <a:srgbClr val="1F2328"/>
+                </a:solidFill>
+                <a:latin typeface="Arial"/>
+              </a:rPr>
+              <a:t> Only 0.4% of training vessels lie within 2 km of shore, against 31% of verified ones.</a:t>
+            </a:r>
+          </a:p>
+        </p:txBody>
+      </p:sp>
+      <p:sp>
+        <p:nvSpPr>
+          <p:cNvPr id="80" name="heading: Limits"/>
+          <p:cNvSpPr txBox="1"/>
+          <p:nvPr/>
+        </p:nvSpPr>
+        <p:spPr>
+          <a:xfrm>
+            <a:off x="34299144" y="18617184"/>
+            <a:ext cx="8805672" cy="685800"/>
+          </a:xfrm>
+          <a:prstGeom prst="rect">
+            <a:avLst/>
+          </a:prstGeom>
+          <a:noFill/>
+        </p:spPr>
+        <p:txBody>
+          <a:bodyPr wrap="square" anchor="b" lIns="0" rIns="0" tIns="0" bIns="0">
+            <a:spAutoFit/>
+          </a:bodyPr>
+          <a:lstStyle/>
+          <a:p>
+            <a:pPr algn="ctr">
+              <a:spcAft>
+                <a:spcPts val="0"/>
+              </a:spcAft>
+            </a:pPr>
+            <a:r>
+              <a:rPr sz="4200" b="1" i="0">
+                <a:solidFill>
+                  <a:srgbClr val="14213D"/>
+                </a:solidFill>
+                <a:latin typeface="Arial"/>
+              </a:rPr>
+              <a:t>Limits</a:t>
+            </a:r>
+          </a:p>
+        </p:txBody>
+      </p:sp>
+      <p:cxnSp>
+        <p:nvCxnSpPr>
+          <p:cNvPr id="81" name="rule: Limits"/>
+          <p:cNvCxnSpPr/>
+          <p:nvPr/>
+        </p:nvCxnSpPr>
+        <p:spPr>
+          <a:xfrm>
+            <a:off x="34299144" y="19394424"/>
+            <a:ext cx="8805672" cy="0"/>
+          </a:xfrm>
+          <a:prstGeom prst="line">
+            <a:avLst/>
+          </a:prstGeom>
+          <a:ln w="57150">
             <a:solidFill>
-              <a:srgbClr val="14213D"/>
+              <a:srgbClr val="B8BEC8"/>
             </a:solidFill>
           </a:ln>
-          <a:effectLst/>
         </p:spPr>
         <p:style>
-          <a:lnRef idx="1">
+          <a:lnRef idx="2">
             <a:schemeClr val="accent1"/>
           </a:lnRef>
-          <a:fillRef idx="3">
+          <a:fillRef idx="0">
             <a:schemeClr val="accent1"/>
           </a:fillRef>
-          <a:effectRef idx="2">
+          <a:effectRef idx="1">
             <a:schemeClr val="accent1"/>
           </a:effectRef>
           <a:fontRef idx="minor">
-            <a:schemeClr val="lt1"/>
+            <a:schemeClr val="tx1"/>
           </a:fontRef>
         </p:style>
-        <p:txBody>
-          <a:bodyPr rtlCol="0" anchor="ctr"/>
-          <a:lstStyle/>
-          <a:p>
-            <a:pPr algn="ctr"/>
-          </a:p>
-        </p:txBody>
-      </p:sp>
-      <p:sp>
-        <p:nvSpPr>
-          <p:cNvPr id="78" name="block title: Limits"/>
-          <p:cNvSpPr/>
-          <p:nvPr/>
-        </p:nvSpPr>
-        <p:spPr>
-          <a:xfrm>
-            <a:off x="34299144" y="17437608"/>
-            <a:ext cx="8805672" cy="868680"/>
-          </a:xfrm>
-          <a:prstGeom prst="round2SameRect">
-            <a:avLst>
-              <a:gd name="adj1" fmla="val 25000"/>
-              <a:gd name="adj2" fmla="val 0"/>
-            </a:avLst>
-          </a:prstGeom>
-          <a:solidFill>
-            <a:srgbClr val="14213D"/>
-          </a:solidFill>
-          <a:ln>
-            <a:noFill/>
-          </a:ln>
-          <a:effectLst/>
-        </p:spPr>
-        <p:style>
-          <a:lnRef idx="1">
-            <a:schemeClr val="accent1"/>
-          </a:lnRef>
-          <a:fillRef idx="3">
-            <a:schemeClr val="accent1"/>
-          </a:fillRef>
-          <a:effectRef idx="2">
-            <a:schemeClr val="accent1"/>
-          </a:effectRef>
-          <a:fontRef idx="minor">
-            <a:schemeClr val="lt1"/>
-          </a:fontRef>
-        </p:style>
-        <p:txBody>
-          <a:bodyPr rtlCol="0" anchor="ctr" lIns="274320" wrap="square"/>
-          <a:lstStyle/>
-          <a:p>
-            <a:pPr algn="l"/>
-            <a:r>
-              <a:rPr sz="4000" b="1" i="0">
-                <a:solidFill>
-                  <a:srgbClr val="FFFFFF"/>
-                </a:solidFill>
-                <a:latin typeface="Arial"/>
-              </a:rPr>
-              <a:t>Limits</a:t>
-            </a:r>
-          </a:p>
-        </p:txBody>
-      </p:sp>
-      <p:sp>
-        <p:nvSpPr>
-          <p:cNvPr id="79" name="limits"/>
+      </p:cxnSp>
+      <p:sp>
+        <p:nvSpPr>
+          <p:cNvPr id="82" name="limits"/>
           <p:cNvSpPr txBox="1"/>
           <p:nvPr/>
         </p:nvSpPr>
         <p:spPr>
           <a:xfrm>
-            <a:off x="34573463" y="18534888"/>
-            <a:ext cx="8257032" cy="4416552"/>
+            <a:off x="34555176" y="19668744"/>
+            <a:ext cx="8293608" cy="3922775"/>
           </a:xfrm>
           <a:prstGeom prst="rect">
             <a:avLst/>
@@ -7557,15 +7495,15 @@
               <a:spcAft>
                 <a:spcPts val="800"/>
               </a:spcAft>
+              <a:buSzPct val="70000"/>
               <a:buClr>
                 <a:srgbClr val="14213D"/>
               </a:buClr>
-              <a:buSzPct val="70000"/>
               <a:buFont typeface="Arial"/>
               <a:buChar char="■"/>
             </a:pPr>
             <a:r>
-              <a:rPr sz="2700" b="0" i="0">
+              <a:rPr sz="2900" b="0" i="0">
                 <a:solidFill>
                   <a:srgbClr val="1F2328"/>
                 </a:solidFill>
@@ -7579,21 +7517,21 @@
               <a:spcAft>
                 <a:spcPts val="800"/>
               </a:spcAft>
+              <a:buSzPct val="70000"/>
               <a:buClr>
                 <a:srgbClr val="14213D"/>
               </a:buClr>
-              <a:buSzPct val="70000"/>
               <a:buFont typeface="Arial"/>
               <a:buChar char="■"/>
             </a:pPr>
             <a:r>
-              <a:rPr sz="2700" b="0" i="0">
-                <a:solidFill>
-                  <a:srgbClr val="1F2328"/>
-                </a:solidFill>
-                <a:latin typeface="Arial"/>
-              </a:rPr>
-              <a:t>The predeclared monotonicity gate failed: two SAR test curves drop by more than 0.02 as labels grow. We report the grid as descriptive.</a:t>
+              <a:rPr sz="2900" b="0" i="0">
+                <a:solidFill>
+                  <a:srgbClr val="1F2328"/>
+                </a:solidFill>
+                <a:latin typeface="Arial"/>
+              </a:rPr>
+              <a:t>Monotonicity gate failed: two SAR test curves drop by more than 0.02 as labels grow.</a:t>
             </a:r>
           </a:p>
           <a:p>
@@ -7601,163 +7539,109 @@
               <a:spcAft>
                 <a:spcPts val="800"/>
               </a:spcAft>
+              <a:buSzPct val="70000"/>
               <a:buClr>
                 <a:srgbClr val="14213D"/>
               </a:buClr>
-              <a:buSzPct val="70000"/>
               <a:buFont typeface="Arial"/>
               <a:buChar char="■"/>
             </a:pPr>
             <a:r>
-              <a:rPr sz="2700" b="0" i="0">
-                <a:solidFill>
-                  <a:srgbClr val="1F2328"/>
-                </a:solidFill>
-                <a:latin typeface="Arial"/>
-              </a:rPr>
-              <a:t>Checkpoints differ in objective and corpus as well as domain. We compare released checkpoints, not a causal domain effect.</a:t>
-            </a:r>
-          </a:p>
-        </p:txBody>
-      </p:sp>
-      <p:sp>
-        <p:nvSpPr>
-          <p:cNvPr id="80" name="block: Code and checkpoints"/>
-          <p:cNvSpPr/>
-          <p:nvPr/>
-        </p:nvSpPr>
-        <p:spPr>
-          <a:xfrm>
-            <a:off x="34299144" y="23710392"/>
-            <a:ext cx="8805672" cy="4517136"/>
-          </a:xfrm>
-          <a:prstGeom prst="roundRect">
-            <a:avLst>
-              <a:gd name="adj" fmla="val 5060"/>
-            </a:avLst>
-          </a:prstGeom>
-          <a:solidFill>
-            <a:srgbClr val="F8F8F9"/>
-          </a:solidFill>
-          <a:ln w="19050">
+              <a:rPr sz="2900" b="0" i="0">
+                <a:solidFill>
+                  <a:srgbClr val="1F2328"/>
+                </a:solidFill>
+                <a:latin typeface="Arial"/>
+              </a:rPr>
+              <a:t>Checkpoints differ in objective and corpus, not only domain.</a:t>
+            </a:r>
+          </a:p>
+        </p:txBody>
+      </p:sp>
+      <p:sp>
+        <p:nvSpPr>
+          <p:cNvPr id="83" name="heading: Open questions &amp; next steps"/>
+          <p:cNvSpPr txBox="1"/>
+          <p:nvPr/>
+        </p:nvSpPr>
+        <p:spPr>
+          <a:xfrm>
+            <a:off x="34299144" y="23792688"/>
+            <a:ext cx="8805672" cy="685800"/>
+          </a:xfrm>
+          <a:prstGeom prst="rect">
+            <a:avLst/>
+          </a:prstGeom>
+          <a:noFill/>
+        </p:spPr>
+        <p:txBody>
+          <a:bodyPr wrap="square" anchor="b" lIns="0" rIns="0" tIns="0" bIns="0">
+            <a:spAutoFit/>
+          </a:bodyPr>
+          <a:lstStyle/>
+          <a:p>
+            <a:pPr algn="ctr">
+              <a:spcAft>
+                <a:spcPts val="0"/>
+              </a:spcAft>
+            </a:pPr>
+            <a:r>
+              <a:rPr sz="4200" b="1" i="0">
+                <a:solidFill>
+                  <a:srgbClr val="14213D"/>
+                </a:solidFill>
+                <a:latin typeface="Arial"/>
+              </a:rPr>
+              <a:t>Open questions &amp; next steps</a:t>
+            </a:r>
+          </a:p>
+        </p:txBody>
+      </p:sp>
+      <p:cxnSp>
+        <p:nvCxnSpPr>
+          <p:cNvPr id="84" name="rule: Open questions &amp; next steps"/>
+          <p:cNvCxnSpPr/>
+          <p:nvPr/>
+        </p:nvCxnSpPr>
+        <p:spPr>
+          <a:xfrm>
+            <a:off x="34299144" y="24569928"/>
+            <a:ext cx="8805672" cy="0"/>
+          </a:xfrm>
+          <a:prstGeom prst="line">
+            <a:avLst/>
+          </a:prstGeom>
+          <a:ln w="57150">
             <a:solidFill>
-              <a:srgbClr val="14213D"/>
+              <a:srgbClr val="B8BEC8"/>
             </a:solidFill>
           </a:ln>
-          <a:effectLst/>
         </p:spPr>
         <p:style>
-          <a:lnRef idx="1">
+          <a:lnRef idx="2">
             <a:schemeClr val="accent1"/>
           </a:lnRef>
-          <a:fillRef idx="3">
+          <a:fillRef idx="0">
             <a:schemeClr val="accent1"/>
           </a:fillRef>
-          <a:effectRef idx="2">
+          <a:effectRef idx="1">
             <a:schemeClr val="accent1"/>
           </a:effectRef>
           <a:fontRef idx="minor">
-            <a:schemeClr val="lt1"/>
+            <a:schemeClr val="tx1"/>
           </a:fontRef>
         </p:style>
-        <p:txBody>
-          <a:bodyPr rtlCol="0" anchor="ctr"/>
-          <a:lstStyle/>
-          <a:p>
-            <a:pPr algn="ctr"/>
-          </a:p>
-        </p:txBody>
-      </p:sp>
-      <p:sp>
-        <p:nvSpPr>
-          <p:cNvPr id="81" name="block title: Code and checkpoints"/>
-          <p:cNvSpPr/>
-          <p:nvPr/>
-        </p:nvSpPr>
-        <p:spPr>
-          <a:xfrm>
-            <a:off x="34299144" y="23710392"/>
-            <a:ext cx="8805672" cy="868680"/>
-          </a:xfrm>
-          <a:prstGeom prst="round2SameRect">
-            <a:avLst>
-              <a:gd name="adj1" fmla="val 25000"/>
-              <a:gd name="adj2" fmla="val 0"/>
-            </a:avLst>
-          </a:prstGeom>
-          <a:solidFill>
-            <a:srgbClr val="14213D"/>
-          </a:solidFill>
-          <a:ln>
-            <a:noFill/>
-          </a:ln>
-          <a:effectLst/>
-        </p:spPr>
-        <p:style>
-          <a:lnRef idx="1">
-            <a:schemeClr val="accent1"/>
-          </a:lnRef>
-          <a:fillRef idx="3">
-            <a:schemeClr val="accent1"/>
-          </a:fillRef>
-          <a:effectRef idx="2">
-            <a:schemeClr val="accent1"/>
-          </a:effectRef>
-          <a:fontRef idx="minor">
-            <a:schemeClr val="lt1"/>
-          </a:fontRef>
-        </p:style>
-        <p:txBody>
-          <a:bodyPr rtlCol="0" anchor="ctr" lIns="274320" wrap="square"/>
-          <a:lstStyle/>
-          <a:p>
-            <a:pPr algn="l"/>
-            <a:r>
-              <a:rPr sz="4000" b="1" i="0">
-                <a:solidFill>
-                  <a:srgbClr val="FFFFFF"/>
-                </a:solidFill>
-                <a:latin typeface="Arial"/>
-              </a:rPr>
-              <a:t>Code and checkpoints</a:t>
-            </a:r>
-          </a:p>
-        </p:txBody>
-      </p:sp>
-      <p:pic>
-        <p:nvPicPr>
-          <p:cNvPr id="82" name="QR GitHub: code, evidence" descr="qr_github.png"/>
-          <p:cNvPicPr>
-            <a:picLocks noChangeAspect="1"/>
-          </p:cNvPicPr>
-          <p:nvPr/>
-        </p:nvPicPr>
-        <p:blipFill>
-          <a:blip r:embed="rId5"/>
-          <a:stretch>
-            <a:fillRect/>
-          </a:stretch>
-        </p:blipFill>
-        <p:spPr>
-          <a:xfrm>
-            <a:off x="34847783" y="24807672"/>
-            <a:ext cx="2377440" cy="2377440"/>
-          </a:xfrm>
-          <a:prstGeom prst="rect">
-            <a:avLst/>
-          </a:prstGeom>
-        </p:spPr>
-      </p:pic>
-      <p:sp>
-        <p:nvSpPr>
-          <p:cNvPr id="83" name="QR label 1"/>
+      </p:cxnSp>
+      <p:sp>
+        <p:nvSpPr>
+          <p:cNvPr id="85" name="open questions"/>
           <p:cNvSpPr txBox="1"/>
           <p:nvPr/>
         </p:nvSpPr>
         <p:spPr>
           <a:xfrm>
-            <a:off x="34299143" y="27276552"/>
-            <a:ext cx="3474720" cy="457200"/>
+            <a:off x="34555176" y="24844248"/>
+            <a:ext cx="8293608" cy="6793992"/>
           </a:xfrm>
           <a:prstGeom prst="rect">
             <a:avLst/>
@@ -7770,225 +7654,136 @@
           </a:bodyPr>
           <a:lstStyle/>
           <a:p>
-            <a:pPr algn="ctr">
+            <a:pPr algn="l" marL="347472" indent="-347472">
               <a:spcAft>
                 <a:spcPts val="800"/>
               </a:spcAft>
+              <a:buSzPct val="70000"/>
+              <a:buClr>
+                <a:srgbClr val="14213D"/>
+              </a:buClr>
+              <a:buFont typeface="Arial"/>
+              <a:buChar char="■"/>
             </a:pPr>
             <a:r>
-              <a:rPr sz="2000" b="0" i="0">
-                <a:solidFill>
-                  <a:srgbClr val="1F2328"/>
-                </a:solidFill>
-                <a:latin typeface="Arial"/>
-              </a:rPr>
-              <a:t>GitHub: code, evidence</a:t>
-            </a:r>
-          </a:p>
-        </p:txBody>
-      </p:sp>
-      <p:pic>
-        <p:nvPicPr>
-          <p:cNvPr id="84" name="QR Hugging Face: weights" descr="qr_huggingface.png"/>
-          <p:cNvPicPr>
-            <a:picLocks noChangeAspect="1"/>
-          </p:cNvPicPr>
-          <p:nvPr/>
-        </p:nvPicPr>
-        <p:blipFill>
-          <a:blip r:embed="rId6"/>
-          <a:stretch>
-            <a:fillRect/>
-          </a:stretch>
-        </p:blipFill>
-        <p:spPr>
-          <a:xfrm>
-            <a:off x="38976299" y="24807672"/>
-            <a:ext cx="2377440" cy="2377440"/>
-          </a:xfrm>
-          <a:prstGeom prst="rect">
-            <a:avLst/>
-          </a:prstGeom>
-        </p:spPr>
-      </p:pic>
-      <p:sp>
-        <p:nvSpPr>
-          <p:cNvPr id="85" name="QR label 2"/>
-          <p:cNvSpPr txBox="1"/>
-          <p:nvPr/>
-        </p:nvSpPr>
-        <p:spPr>
-          <a:xfrm>
-            <a:off x="38427659" y="27276552"/>
-            <a:ext cx="3474720" cy="457200"/>
-          </a:xfrm>
-          <a:prstGeom prst="rect">
-            <a:avLst/>
-          </a:prstGeom>
-          <a:noFill/>
-        </p:spPr>
-        <p:txBody>
-          <a:bodyPr wrap="square" anchor="t" lIns="0" rIns="0" tIns="0" bIns="0">
-            <a:spAutoFit/>
-          </a:bodyPr>
-          <a:lstStyle/>
-          <a:p>
-            <a:pPr algn="ctr">
+              <a:rPr sz="2900" b="0" i="0">
+                <a:solidFill>
+                  <a:srgbClr val="1F2328"/>
+                </a:solidFill>
+                <a:latin typeface="Arial"/>
+              </a:rPr>
+              <a:t>How do multi-sensor foundation models such as CROMA </a:t>
+            </a:r>
+            <a:r>
+              <a:rPr sz="2900" b="0" i="0">
+                <a:solidFill>
+                  <a:srgbClr val="5B6477"/>
+                </a:solidFill>
+                <a:latin typeface="Arial"/>
+              </a:rPr>
+              <a:t>[11]</a:t>
+            </a:r>
+            <a:r>
+              <a:rPr sz="2900" b="0" i="0">
+                <a:solidFill>
+                  <a:srgbClr val="1F2328"/>
+                </a:solidFill>
+                <a:latin typeface="Arial"/>
+              </a:rPr>
+              <a:t> and DOFA </a:t>
+            </a:r>
+            <a:r>
+              <a:rPr sz="2900" b="0" i="0">
+                <a:solidFill>
+                  <a:srgbClr val="5B6477"/>
+                </a:solidFill>
+                <a:latin typeface="Arial"/>
+              </a:rPr>
+              <a:t>[12]</a:t>
+            </a:r>
+            <a:r>
+              <a:rPr sz="2900" b="0" i="0">
+                <a:solidFill>
+                  <a:srgbClr val="1F2328"/>
+                </a:solidFill>
+                <a:latin typeface="Arial"/>
+              </a:rPr>
+              <a:t> fare against single-source checkpoints?</a:t>
+            </a:r>
+          </a:p>
+          <a:p>
+            <a:pPr algn="l" marL="347472" indent="-347472">
               <a:spcAft>
                 <a:spcPts val="800"/>
               </a:spcAft>
+              <a:buSzPct val="70000"/>
+              <a:buClr>
+                <a:srgbClr val="14213D"/>
+              </a:buClr>
+              <a:buFont typeface="Arial"/>
+              <a:buChar char="■"/>
             </a:pPr>
             <a:r>
-              <a:rPr sz="2000" b="0" i="0">
-                <a:solidFill>
-                  <a:srgbClr val="1F2328"/>
-                </a:solidFill>
-                <a:latin typeface="Arial"/>
-              </a:rPr>
-              <a:t>Hugging Face: weights</a:t>
-            </a:r>
-          </a:p>
-        </p:txBody>
-      </p:sp>
-      <p:sp>
-        <p:nvSpPr>
-          <p:cNvPr id="86" name="block: References"/>
-          <p:cNvSpPr/>
-          <p:nvPr/>
-        </p:nvSpPr>
-        <p:spPr>
-          <a:xfrm>
-            <a:off x="34299144" y="28803600"/>
-            <a:ext cx="8805672" cy="2432304"/>
-          </a:xfrm>
-          <a:prstGeom prst="roundRect">
-            <a:avLst>
-              <a:gd name="adj" fmla="val 9398"/>
-            </a:avLst>
-          </a:prstGeom>
-          <a:solidFill>
-            <a:srgbClr val="F8F8F9"/>
-          </a:solidFill>
-          <a:ln w="19050">
-            <a:solidFill>
-              <a:srgbClr val="14213D"/>
-            </a:solidFill>
-          </a:ln>
-          <a:effectLst/>
-        </p:spPr>
-        <p:style>
-          <a:lnRef idx="1">
-            <a:schemeClr val="accent1"/>
-          </a:lnRef>
-          <a:fillRef idx="3">
-            <a:schemeClr val="accent1"/>
-          </a:fillRef>
-          <a:effectRef idx="2">
-            <a:schemeClr val="accent1"/>
-          </a:effectRef>
-          <a:fontRef idx="minor">
-            <a:schemeClr val="lt1"/>
-          </a:fontRef>
-        </p:style>
-        <p:txBody>
-          <a:bodyPr rtlCol="0" anchor="ctr"/>
-          <a:lstStyle/>
-          <a:p>
-            <a:pPr algn="ctr"/>
-          </a:p>
-        </p:txBody>
-      </p:sp>
-      <p:sp>
-        <p:nvSpPr>
-          <p:cNvPr id="87" name="block title: References"/>
-          <p:cNvSpPr/>
-          <p:nvPr/>
-        </p:nvSpPr>
-        <p:spPr>
-          <a:xfrm>
-            <a:off x="34299144" y="28803600"/>
-            <a:ext cx="8805672" cy="868680"/>
-          </a:xfrm>
-          <a:prstGeom prst="round2SameRect">
-            <a:avLst>
-              <a:gd name="adj1" fmla="val 25000"/>
-              <a:gd name="adj2" fmla="val 0"/>
-            </a:avLst>
-          </a:prstGeom>
-          <a:solidFill>
-            <a:srgbClr val="14213D"/>
-          </a:solidFill>
-          <a:ln>
-            <a:noFill/>
-          </a:ln>
-          <a:effectLst/>
-        </p:spPr>
-        <p:style>
-          <a:lnRef idx="1">
-            <a:schemeClr val="accent1"/>
-          </a:lnRef>
-          <a:fillRef idx="3">
-            <a:schemeClr val="accent1"/>
-          </a:fillRef>
-          <a:effectRef idx="2">
-            <a:schemeClr val="accent1"/>
-          </a:effectRef>
-          <a:fontRef idx="minor">
-            <a:schemeClr val="lt1"/>
-          </a:fontRef>
-        </p:style>
-        <p:txBody>
-          <a:bodyPr rtlCol="0" anchor="ctr" lIns="274320" wrap="square"/>
-          <a:lstStyle/>
-          <a:p>
-            <a:pPr algn="l"/>
-            <a:r>
-              <a:rPr sz="4000" b="1" i="0">
-                <a:solidFill>
-                  <a:srgbClr val="FFFFFF"/>
-                </a:solidFill>
-                <a:latin typeface="Arial"/>
-              </a:rPr>
-              <a:t>References</a:t>
-            </a:r>
-          </a:p>
-        </p:txBody>
-      </p:sp>
-      <p:sp>
-        <p:nvSpPr>
-          <p:cNvPr id="88" name="references"/>
-          <p:cNvSpPr txBox="1"/>
-          <p:nvPr/>
-        </p:nvSpPr>
-        <p:spPr>
-          <a:xfrm>
-            <a:off x="34573463" y="29900880"/>
-            <a:ext cx="8257032" cy="1152144"/>
-          </a:xfrm>
-          <a:prstGeom prst="rect">
-            <a:avLst/>
-          </a:prstGeom>
-          <a:noFill/>
-        </p:spPr>
-        <p:txBody>
-          <a:bodyPr wrap="square" anchor="t" lIns="0" rIns="0" tIns="0" bIns="0">
-            <a:spAutoFit/>
-          </a:bodyPr>
-          <a:lstStyle/>
-          <a:p>
-            <a:pPr algn="l">
+              <a:rPr sz="2900" b="0" i="0">
+                <a:solidFill>
+                  <a:srgbClr val="1F2328"/>
+                </a:solidFill>
+                <a:latin typeface="Arial"/>
+              </a:rPr>
+              <a:t>Does SAR pretraining help where optical cannot: near shore and for small dark vessels?</a:t>
+            </a:r>
+          </a:p>
+          <a:p>
+            <a:pPr algn="l" marL="347472" indent="-347472">
               <a:spcAft>
                 <a:spcPts val="800"/>
               </a:spcAft>
+              <a:buSzPct val="70000"/>
+              <a:buClr>
+                <a:srgbClr val="14213D"/>
+              </a:buClr>
+              <a:buFont typeface="Arial"/>
+              <a:buChar char="■"/>
             </a:pPr>
             <a:r>
-              <a:rPr sz="1700" b="0" i="0">
-                <a:solidFill>
-                  <a:srgbClr val="1F2328"/>
-                </a:solidFill>
-                <a:latin typeface="Arial"/>
-              </a:rPr>
-              <a:t>Paolo et al., xView3-SAR, NeurIPS 2022. Zhou et al., Objects as Points, 2019. Steiner et al., How to Train Your ViT?, TMLR 2022. Woo et al., ConvNeXt V2, CVPR 2023. Straka &amp; Gruber, SatDINO, 2025. Liu et al., SARMAE, CVPR 2026. Clasen et al., reBEN, IGARSS 2025.</a:t>
+              <a:rPr sz="2900" b="0" i="0">
+                <a:solidFill>
+                  <a:srgbClr val="1F2328"/>
+                </a:solidFill>
+                <a:latin typeface="Arial"/>
+              </a:rPr>
+              <a:t>Why does SARMAE peak at its first evaluation with 28 or fewer scenes?</a:t>
+            </a:r>
+          </a:p>
+          <a:p>
+            <a:pPr algn="l" marL="347472" indent="-347472">
+              <a:spcAft>
+                <a:spcPts val="800"/>
+              </a:spcAft>
+              <a:buSzPct val="70000"/>
+              <a:buClr>
+                <a:srgbClr val="14213D"/>
+              </a:buClr>
+              <a:buFont typeface="Arial"/>
+              <a:buChar char="■"/>
+            </a:pPr>
+            <a:r>
+              <a:rPr sz="2900" b="1" i="0">
+                <a:solidFill>
+                  <a:srgbClr val="1F2328"/>
+                </a:solidFill>
+                <a:latin typeface="Arial"/>
+              </a:rPr>
+              <a:t>Next:</a:t>
+            </a:r>
+            <a:r>
+              <a:rPr sz="2900" b="0" i="0">
+                <a:solidFill>
+                  <a:srgbClr val="1F2328"/>
+                </a:solidFill>
+                <a:latin typeface="Arial"/>
+              </a:rPr>
+              <a:t> near-shore training labels, a shoreline input channel, several seeds, and matched pretraining objectives across sensors.</a:t>
             </a:r>
           </a:p>
         </p:txBody>

--- a/docs/poster/poster.pptx
+++ b/docs/poster/poster.pptx
@@ -4018,7 +4018,7 @@
         </p:nvSpPr>
         <p:spPr>
           <a:xfrm>
-            <a:off x="786384" y="23938992"/>
+            <a:off x="786384" y="23838408"/>
             <a:ext cx="8805672" cy="685800"/>
           </a:xfrm>
           <a:prstGeom prst="rect">
@@ -4057,7 +4057,7 @@
         </p:nvCxnSpPr>
         <p:spPr>
           <a:xfrm>
-            <a:off x="786384" y="24716232"/>
+            <a:off x="786384" y="24615648"/>
             <a:ext cx="8805672" cy="0"/>
           </a:xfrm>
           <a:prstGeom prst="line">
@@ -4092,8 +4092,8 @@
         </p:nvSpPr>
         <p:spPr>
           <a:xfrm>
-            <a:off x="1042416" y="24990552"/>
-            <a:ext cx="8293608" cy="6647688"/>
+            <a:off x="1042416" y="24889968"/>
+            <a:ext cx="8293608" cy="6748271"/>
           </a:xfrm>
           <a:prstGeom prst="rect">
             <a:avLst/>
@@ -4353,56 +4353,6 @@
                 <a:latin typeface="Arial"/>
               </a:rPr>
               <a:t>T.-Y. Lin et al. Focal loss for dense object detection. ICCV 2017.</a:t>
-            </a:r>
-          </a:p>
-          <a:p>
-            <a:pPr algn="l">
-              <a:spcAft>
-                <a:spcPts val="300"/>
-              </a:spcAft>
-            </a:pPr>
-            <a:r>
-              <a:rPr sz="1700" b="0" i="0">
-                <a:solidFill>
-                  <a:srgbClr val="5B6477"/>
-                </a:solidFill>
-                <a:latin typeface="Arial"/>
-              </a:rPr>
-              <a:t>[11]  </a:t>
-            </a:r>
-            <a:r>
-              <a:rPr sz="1700" b="0" i="0">
-                <a:solidFill>
-                  <a:srgbClr val="1F2328"/>
-                </a:solidFill>
-                <a:latin typeface="Arial"/>
-              </a:rPr>
-              <a:t>A. Fuller, K. Millard, and J. R. Green. CROMA: Contrastive radar-optical masked autoencoders. NeurIPS 2023.</a:t>
-            </a:r>
-          </a:p>
-          <a:p>
-            <a:pPr algn="l">
-              <a:spcAft>
-                <a:spcPts val="300"/>
-              </a:spcAft>
-            </a:pPr>
-            <a:r>
-              <a:rPr sz="1700" b="0" i="0">
-                <a:solidFill>
-                  <a:srgbClr val="5B6477"/>
-                </a:solidFill>
-                <a:latin typeface="Arial"/>
-              </a:rPr>
-              <a:t>[12]  </a:t>
-            </a:r>
-            <a:r>
-              <a:rPr sz="1700" b="0" i="0">
-                <a:solidFill>
-                  <a:srgbClr val="1F2328"/>
-                </a:solidFill>
-                <a:latin typeface="Arial"/>
-              </a:rPr>
-              <a:t>Z. Xiong et al. Neural plasticity-inspired multimodal foundation model for Earth observation (DOFA). arXiv:2403.15356, 2024.</a:t>
             </a:r>
           </a:p>
         </p:txBody>
@@ -4827,7 +4777,7 @@
         <p:spPr>
           <a:xfrm>
             <a:off x="10497311" y="12042648"/>
-            <a:ext cx="8293608" cy="2011680"/>
+            <a:ext cx="8293608" cy="1097280"/>
           </a:xfrm>
           <a:prstGeom prst="rect">
             <a:avLst/>
@@ -4852,7 +4802,7 @@
                 </a:solidFill>
                 <a:latin typeface="Arial"/>
               </a:rPr>
-              <a:t>Only the initialization changes inside a track (86M vs. 89M parameters). We compare domains </a:t>
+              <a:t>Only the initialization changes inside a track; we compare domains </a:t>
             </a:r>
             <a:r>
               <a:rPr sz="2900" b="1" i="0">
@@ -4870,7 +4820,7 @@
                 </a:solidFill>
                 <a:latin typeface="Arial"/>
               </a:rPr>
-              <a:t> an architecture, then check whether the pattern repeats across the two.</a:t>
+              <a:t> an architecture.</a:t>
             </a:r>
           </a:p>
         </p:txBody>
@@ -4883,7 +4833,7 @@
         </p:nvSpPr>
         <p:spPr>
           <a:xfrm>
-            <a:off x="10241280" y="14694408"/>
+            <a:off x="10241280" y="13752576"/>
             <a:ext cx="8805672" cy="685800"/>
           </a:xfrm>
           <a:prstGeom prst="rect">
@@ -4922,7 +4872,7 @@
         </p:nvCxnSpPr>
         <p:spPr>
           <a:xfrm>
-            <a:off x="10241280" y="15471648"/>
+            <a:off x="10241280" y="14529815"/>
             <a:ext cx="8805672" cy="0"/>
           </a:xfrm>
           <a:prstGeom prst="line">
@@ -4957,7 +4907,7 @@
         </p:nvSpPr>
         <p:spPr>
           <a:xfrm>
-            <a:off x="10497311" y="16431768"/>
+            <a:off x="10497311" y="15489935"/>
             <a:ext cx="1737360" cy="1143000"/>
           </a:xfrm>
           <a:prstGeom prst="roundRect">
@@ -5036,7 +4986,7 @@
         </p:nvSpPr>
         <p:spPr>
           <a:xfrm>
-            <a:off x="12600432" y="16066008"/>
+            <a:off x="12600432" y="15124175"/>
             <a:ext cx="3566160" cy="1965960"/>
           </a:xfrm>
           <a:prstGeom prst="roundRect">
@@ -5081,7 +5031,7 @@
         </p:nvSpPr>
         <p:spPr>
           <a:xfrm>
-            <a:off x="12600432" y="15700248"/>
+            <a:off x="12600432" y="14758415"/>
             <a:ext cx="3566160" cy="365760"/>
           </a:xfrm>
           <a:prstGeom prst="rect">
@@ -5120,7 +5070,7 @@
         </p:nvSpPr>
         <p:spPr>
           <a:xfrm>
-            <a:off x="12737592" y="16157448"/>
+            <a:off x="12737592" y="15215615"/>
             <a:ext cx="3291840" cy="777240"/>
           </a:xfrm>
           <a:prstGeom prst="roundRect">
@@ -5175,7 +5125,7 @@
         </p:nvSpPr>
         <p:spPr>
           <a:xfrm>
-            <a:off x="12737592" y="17163288"/>
+            <a:off x="12737592" y="16221455"/>
             <a:ext cx="3291840" cy="777240"/>
           </a:xfrm>
           <a:prstGeom prst="roundRect">
@@ -5230,7 +5180,7 @@
         </p:nvSpPr>
         <p:spPr>
           <a:xfrm>
-            <a:off x="16623792" y="16431768"/>
+            <a:off x="16623792" y="15489935"/>
             <a:ext cx="2167127" cy="1143000"/>
           </a:xfrm>
           <a:prstGeom prst="roundRect">
@@ -5297,7 +5247,7 @@
         </p:nvCxnSpPr>
         <p:spPr>
           <a:xfrm flipV="1">
-            <a:off x="12234672" y="16546068"/>
+            <a:off x="12234672" y="15604235"/>
             <a:ext cx="502920" cy="480060"/>
           </a:xfrm>
           <a:prstGeom prst="bentConnector3">
@@ -5333,7 +5283,7 @@
         </p:nvCxnSpPr>
         <p:spPr>
           <a:xfrm>
-            <a:off x="12234672" y="17026128"/>
+            <a:off x="12234672" y="16084295"/>
             <a:ext cx="502920" cy="525780"/>
           </a:xfrm>
           <a:prstGeom prst="bentConnector3">
@@ -5369,7 +5319,7 @@
         </p:nvCxnSpPr>
         <p:spPr>
           <a:xfrm>
-            <a:off x="16166592" y="17026128"/>
+            <a:off x="16166592" y="16084295"/>
             <a:ext cx="457200" cy="0"/>
           </a:xfrm>
           <a:prstGeom prst="line">
@@ -5405,7 +5355,7 @@
         </p:nvSpPr>
         <p:spPr>
           <a:xfrm>
-            <a:off x="10497311" y="18352008"/>
+            <a:off x="10497311" y="17410175"/>
             <a:ext cx="2490216" cy="1143000"/>
           </a:xfrm>
           <a:prstGeom prst="roundRect">
@@ -5460,7 +5410,7 @@
         </p:nvSpPr>
         <p:spPr>
           <a:xfrm>
-            <a:off x="13399008" y="18352008"/>
+            <a:off x="13399008" y="17410175"/>
             <a:ext cx="2490216" cy="1143000"/>
           </a:xfrm>
           <a:prstGeom prst="roundRect">
@@ -5515,7 +5465,7 @@
         </p:nvSpPr>
         <p:spPr>
           <a:xfrm>
-            <a:off x="16300703" y="18352008"/>
+            <a:off x="16300703" y="17410175"/>
             <a:ext cx="2490216" cy="1143000"/>
           </a:xfrm>
           <a:prstGeom prst="roundRect">
@@ -5570,7 +5520,7 @@
         </p:nvCxnSpPr>
         <p:spPr>
           <a:xfrm>
-            <a:off x="17707356" y="17574768"/>
+            <a:off x="17707356" y="16632935"/>
             <a:ext cx="0" cy="777240"/>
           </a:xfrm>
           <a:prstGeom prst="line">
@@ -5606,7 +5556,7 @@
         </p:nvCxnSpPr>
         <p:spPr>
           <a:xfrm flipH="1">
-            <a:off x="15889223" y="18923508"/>
+            <a:off x="15889223" y="17981675"/>
             <a:ext cx="411480" cy="0"/>
           </a:xfrm>
           <a:prstGeom prst="line">
@@ -5642,7 +5592,7 @@
         </p:nvCxnSpPr>
         <p:spPr>
           <a:xfrm flipH="1">
-            <a:off x="12987527" y="18923508"/>
+            <a:off x="12987527" y="17981675"/>
             <a:ext cx="411480" cy="0"/>
           </a:xfrm>
           <a:prstGeom prst="line">
@@ -5678,8 +5628,8 @@
         </p:nvSpPr>
         <p:spPr>
           <a:xfrm>
-            <a:off x="10497311" y="19815048"/>
-            <a:ext cx="8293608" cy="3410711"/>
+            <a:off x="10497311" y="18873215"/>
+            <a:ext cx="8293608" cy="5175504"/>
           </a:xfrm>
           <a:prstGeom prst="rect">
             <a:avLst/>
@@ -5771,17 +5721,57 @@
               <a:t>Same optimizer, schedule, crops, data order and seed (0) for every cell. Strict FP32: 567.6 H100 GPU-hours.</a:t>
             </a:r>
           </a:p>
-        </p:txBody>
-      </p:sp>
-      <p:sp>
-        <p:nvSpPr>
-          <p:cNvPr id="45" name="heading: Once-only held-out protocol"/>
+          <a:p>
+            <a:pPr algn="l" marL="347472" indent="-347472">
+              <a:spcAft>
+                <a:spcPts val="800"/>
+              </a:spcAft>
+              <a:buSzPct val="70000"/>
+              <a:buClr>
+                <a:srgbClr val="14213D"/>
+              </a:buClr>
+              <a:buFont typeface="Arial"/>
+              <a:buChar char="■"/>
+            </a:pPr>
+            <a:r>
+              <a:rPr sz="2900" b="0" i="0">
+                <a:solidFill>
+                  <a:srgbClr val="1F2328"/>
+                </a:solidFill>
+                <a:latin typeface="Arial"/>
+              </a:rPr>
+              <a:t>8 dev scenes pick each checkpoint and threshold; test and verified scenes are scored </a:t>
+            </a:r>
+            <a:r>
+              <a:rPr sz="2900" b="1" i="0">
+                <a:solidFill>
+                  <a:srgbClr val="1F2328"/>
+                </a:solidFill>
+                <a:latin typeface="Arial"/>
+              </a:rPr>
+              <a:t>once</a:t>
+            </a:r>
+            <a:r>
+              <a:rPr sz="2900" b="0" i="0">
+                <a:solidFill>
+                  <a:srgbClr val="1F2328"/>
+                </a:solidFill>
+                <a:latin typeface="Arial"/>
+              </a:rPr>
+              <a:t>, with no retuning.</a:t>
+            </a:r>
+          </a:p>
+        </p:txBody>
+      </p:sp>
+      <p:sp>
+        <p:nvSpPr>
+          <p:cNvPr id="45" name="heading: Why SARMAE dips at 28 scenes"/>
           <p:cNvSpPr txBox="1"/>
           <p:nvPr/>
         </p:nvSpPr>
         <p:spPr>
           <a:xfrm>
-            <a:off x="10241280" y="23436072"/>
+            <a:off x="10241280" y="24167592"/>
             <a:ext cx="8805672" cy="685800"/>
           </a:xfrm>
           <a:prstGeom prst="rect">
@@ -5807,679 +5797,21 @@
                 </a:solidFill>
                 <a:latin typeface="Arial"/>
               </a:rPr>
-              <a:t>Once-only held-out protocol</a:t>
+              <a:t>Why SARMAE dips at 28 scenes</a:t>
             </a:r>
           </a:p>
         </p:txBody>
       </p:sp>
       <p:cxnSp>
         <p:nvCxnSpPr>
-          <p:cNvPr id="46" name="rule: Once-only held-out protocol"/>
+          <p:cNvPr id="46" name="rule: Why SARMAE dips at 28 scenes"/>
           <p:cNvCxnSpPr/>
           <p:nvPr/>
         </p:nvCxnSpPr>
         <p:spPr>
           <a:xfrm>
-            <a:off x="10241280" y="24213312"/>
+            <a:off x="10241280" y="24944832"/>
             <a:ext cx="8805672" cy="0"/>
-          </a:xfrm>
-          <a:prstGeom prst="line">
-            <a:avLst/>
-          </a:prstGeom>
-          <a:ln w="57150">
-            <a:solidFill>
-              <a:srgbClr val="B8BEC8"/>
-            </a:solidFill>
-          </a:ln>
-        </p:spPr>
-        <p:style>
-          <a:lnRef idx="2">
-            <a:schemeClr val="accent1"/>
-          </a:lnRef>
-          <a:fillRef idx="0">
-            <a:schemeClr val="accent1"/>
-          </a:fillRef>
-          <a:effectRef idx="1">
-            <a:schemeClr val="accent1"/>
-          </a:effectRef>
-          <a:fontRef idx="minor">
-            <a:schemeClr val="tx1"/>
-          </a:fontRef>
-        </p:style>
-      </p:cxnSp>
-      <p:sp>
-        <p:nvSpPr>
-          <p:cNvPr id="47" name="step 1 number"/>
-          <p:cNvSpPr/>
-          <p:nvPr/>
-        </p:nvSpPr>
-        <p:spPr>
-          <a:xfrm>
-            <a:off x="10634472" y="24716232"/>
-            <a:ext cx="548640" cy="548640"/>
-          </a:xfrm>
-          <a:prstGeom prst="ellipse">
-            <a:avLst/>
-          </a:prstGeom>
-          <a:solidFill>
-            <a:srgbClr val="14213D"/>
-          </a:solidFill>
-          <a:ln w="25400">
-            <a:solidFill>
-              <a:srgbClr val="14213D"/>
-            </a:solidFill>
-          </a:ln>
-          <a:effectLst/>
-        </p:spPr>
-        <p:style>
-          <a:lnRef idx="1">
-            <a:schemeClr val="accent1"/>
-          </a:lnRef>
-          <a:fillRef idx="3">
-            <a:schemeClr val="accent1"/>
-          </a:fillRef>
-          <a:effectRef idx="2">
-            <a:schemeClr val="accent1"/>
-          </a:effectRef>
-          <a:fontRef idx="minor">
-            <a:schemeClr val="lt1"/>
-          </a:fontRef>
-        </p:style>
-        <p:txBody>
-          <a:bodyPr rtlCol="0" anchor="ctr" wrap="square" lIns="109728" rIns="109728"/>
-          <a:lstStyle/>
-          <a:p>
-            <a:pPr algn="ctr"/>
-            <a:r>
-              <a:rPr sz="2200" b="1" i="0">
-                <a:solidFill>
-                  <a:srgbClr val="FFFFFF"/>
-                </a:solidFill>
-                <a:latin typeface="Arial"/>
-              </a:rPr>
-              <a:t>1</a:t>
-            </a:r>
-          </a:p>
-        </p:txBody>
-      </p:sp>
-      <p:sp>
-        <p:nvSpPr>
-          <p:cNvPr id="48" name="step 1"/>
-          <p:cNvSpPr/>
-          <p:nvPr/>
-        </p:nvSpPr>
-        <p:spPr>
-          <a:xfrm>
-            <a:off x="11457432" y="24487632"/>
-            <a:ext cx="7196328" cy="1005840"/>
-          </a:xfrm>
-          <a:prstGeom prst="roundRect">
-            <a:avLst/>
-          </a:prstGeom>
-          <a:solidFill>
-            <a:srgbClr val="F2F2F2"/>
-          </a:solidFill>
-          <a:ln w="25400">
-            <a:solidFill>
-              <a:srgbClr val="999999"/>
-            </a:solidFill>
-          </a:ln>
-          <a:effectLst/>
-        </p:spPr>
-        <p:style>
-          <a:lnRef idx="1">
-            <a:schemeClr val="accent1"/>
-          </a:lnRef>
-          <a:fillRef idx="3">
-            <a:schemeClr val="accent1"/>
-          </a:fillRef>
-          <a:effectRef idx="2">
-            <a:schemeClr val="accent1"/>
-          </a:effectRef>
-          <a:fontRef idx="minor">
-            <a:schemeClr val="lt1"/>
-          </a:fontRef>
-        </p:style>
-        <p:txBody>
-          <a:bodyPr rtlCol="0" anchor="ctr" wrap="square" lIns="109728" rIns="109728"/>
-          <a:lstStyle/>
-          <a:p>
-            <a:pPr algn="l"/>
-            <a:r>
-              <a:rPr sz="2200" b="1" i="0">
-                <a:solidFill>
-                  <a:srgbClr val="1F2328"/>
-                </a:solidFill>
-                <a:latin typeface="Arial"/>
-              </a:rPr>
-              <a:t>Train 32 cells.</a:t>
-            </a:r>
-            <a:r>
-              <a:rPr sz="2200" b="0" i="0">
-                <a:solidFill>
-                  <a:srgbClr val="1F2328"/>
-                </a:solidFill>
-                <a:latin typeface="Arial"/>
-              </a:rPr>
-              <a:t> A sweep on 8 dev scenes picks each checkpoint and threshold.</a:t>
-            </a:r>
-          </a:p>
-        </p:txBody>
-      </p:sp>
-      <p:cxnSp>
-        <p:nvCxnSpPr>
-          <p:cNvPr id="49" name="step arrow 1"/>
-          <p:cNvCxnSpPr/>
-          <p:nvPr/>
-        </p:nvCxnSpPr>
-        <p:spPr>
-          <a:xfrm>
-            <a:off x="15055596" y="25493472"/>
-            <a:ext cx="0" cy="502920"/>
-          </a:xfrm>
-          <a:prstGeom prst="line">
-            <a:avLst/>
-          </a:prstGeom>
-          <a:ln w="28575">
-            <a:solidFill>
-              <a:srgbClr val="1F2328"/>
-            </a:solidFill>
-            <a:tailEnd type="triangle" w="med" len="med"/>
-          </a:ln>
-        </p:spPr>
-        <p:style>
-          <a:lnRef idx="2">
-            <a:schemeClr val="accent1"/>
-          </a:lnRef>
-          <a:fillRef idx="0">
-            <a:schemeClr val="accent1"/>
-          </a:fillRef>
-          <a:effectRef idx="1">
-            <a:schemeClr val="accent1"/>
-          </a:effectRef>
-          <a:fontRef idx="minor">
-            <a:schemeClr val="tx1"/>
-          </a:fontRef>
-        </p:style>
-      </p:cxnSp>
-      <p:sp>
-        <p:nvSpPr>
-          <p:cNvPr id="50" name="step 2 number"/>
-          <p:cNvSpPr/>
-          <p:nvPr/>
-        </p:nvSpPr>
-        <p:spPr>
-          <a:xfrm>
-            <a:off x="10634472" y="26224992"/>
-            <a:ext cx="548640" cy="548640"/>
-          </a:xfrm>
-          <a:prstGeom prst="ellipse">
-            <a:avLst/>
-          </a:prstGeom>
-          <a:solidFill>
-            <a:srgbClr val="14213D"/>
-          </a:solidFill>
-          <a:ln w="25400">
-            <a:solidFill>
-              <a:srgbClr val="14213D"/>
-            </a:solidFill>
-          </a:ln>
-          <a:effectLst/>
-        </p:spPr>
-        <p:style>
-          <a:lnRef idx="1">
-            <a:schemeClr val="accent1"/>
-          </a:lnRef>
-          <a:fillRef idx="3">
-            <a:schemeClr val="accent1"/>
-          </a:fillRef>
-          <a:effectRef idx="2">
-            <a:schemeClr val="accent1"/>
-          </a:effectRef>
-          <a:fontRef idx="minor">
-            <a:schemeClr val="lt1"/>
-          </a:fontRef>
-        </p:style>
-        <p:txBody>
-          <a:bodyPr rtlCol="0" anchor="ctr" wrap="square" lIns="109728" rIns="109728"/>
-          <a:lstStyle/>
-          <a:p>
-            <a:pPr algn="ctr"/>
-            <a:r>
-              <a:rPr sz="2200" b="1" i="0">
-                <a:solidFill>
-                  <a:srgbClr val="FFFFFF"/>
-                </a:solidFill>
-                <a:latin typeface="Arial"/>
-              </a:rPr>
-              <a:t>2</a:t>
-            </a:r>
-          </a:p>
-        </p:txBody>
-      </p:sp>
-      <p:sp>
-        <p:nvSpPr>
-          <p:cNvPr id="51" name="step 2"/>
-          <p:cNvSpPr/>
-          <p:nvPr/>
-        </p:nvSpPr>
-        <p:spPr>
-          <a:xfrm>
-            <a:off x="11457432" y="25996392"/>
-            <a:ext cx="7196328" cy="1005840"/>
-          </a:xfrm>
-          <a:prstGeom prst="roundRect">
-            <a:avLst/>
-          </a:prstGeom>
-          <a:solidFill>
-            <a:srgbClr val="EBF4FA"/>
-          </a:solidFill>
-          <a:ln w="25400">
-            <a:solidFill>
-              <a:srgbClr val="0072B2"/>
-            </a:solidFill>
-          </a:ln>
-          <a:effectLst/>
-        </p:spPr>
-        <p:style>
-          <a:lnRef idx="1">
-            <a:schemeClr val="accent1"/>
-          </a:lnRef>
-          <a:fillRef idx="3">
-            <a:schemeClr val="accent1"/>
-          </a:fillRef>
-          <a:effectRef idx="2">
-            <a:schemeClr val="accent1"/>
-          </a:effectRef>
-          <a:fontRef idx="minor">
-            <a:schemeClr val="lt1"/>
-          </a:fontRef>
-        </p:style>
-        <p:txBody>
-          <a:bodyPr rtlCol="0" anchor="ctr" wrap="square" lIns="109728" rIns="109728"/>
-          <a:lstStyle/>
-          <a:p>
-            <a:pPr algn="l"/>
-            <a:r>
-              <a:rPr sz="2200" b="1" i="0">
-                <a:solidFill>
-                  <a:srgbClr val="1F2328"/>
-                </a:solidFill>
-                <a:latin typeface="Arial"/>
-              </a:rPr>
-              <a:t>Freeze the cohort.</a:t>
-            </a:r>
-            <a:r>
-              <a:rPr sz="2200" b="0" i="0">
-                <a:solidFill>
-                  <a:srgbClr val="1F2328"/>
-                </a:solidFill>
-                <a:latin typeface="Arial"/>
-              </a:rPr>
-              <a:t> Hash-bind every marker and checkpoint.</a:t>
-            </a:r>
-          </a:p>
-        </p:txBody>
-      </p:sp>
-      <p:cxnSp>
-        <p:nvCxnSpPr>
-          <p:cNvPr id="52" name="step arrow 2"/>
-          <p:cNvCxnSpPr/>
-          <p:nvPr/>
-        </p:nvCxnSpPr>
-        <p:spPr>
-          <a:xfrm>
-            <a:off x="15055596" y="27002232"/>
-            <a:ext cx="0" cy="502920"/>
-          </a:xfrm>
-          <a:prstGeom prst="line">
-            <a:avLst/>
-          </a:prstGeom>
-          <a:ln w="28575">
-            <a:solidFill>
-              <a:srgbClr val="1F2328"/>
-            </a:solidFill>
-            <a:tailEnd type="triangle" w="med" len="med"/>
-          </a:ln>
-        </p:spPr>
-        <p:style>
-          <a:lnRef idx="2">
-            <a:schemeClr val="accent1"/>
-          </a:lnRef>
-          <a:fillRef idx="0">
-            <a:schemeClr val="accent1"/>
-          </a:fillRef>
-          <a:effectRef idx="1">
-            <a:schemeClr val="accent1"/>
-          </a:effectRef>
-          <a:fontRef idx="minor">
-            <a:schemeClr val="tx1"/>
-          </a:fontRef>
-        </p:style>
-      </p:cxnSp>
-      <p:sp>
-        <p:nvSpPr>
-          <p:cNvPr id="53" name="step 3 number"/>
-          <p:cNvSpPr/>
-          <p:nvPr/>
-        </p:nvSpPr>
-        <p:spPr>
-          <a:xfrm>
-            <a:off x="10634472" y="27733752"/>
-            <a:ext cx="548640" cy="548640"/>
-          </a:xfrm>
-          <a:prstGeom prst="ellipse">
-            <a:avLst/>
-          </a:prstGeom>
-          <a:solidFill>
-            <a:srgbClr val="14213D"/>
-          </a:solidFill>
-          <a:ln w="25400">
-            <a:solidFill>
-              <a:srgbClr val="14213D"/>
-            </a:solidFill>
-          </a:ln>
-          <a:effectLst/>
-        </p:spPr>
-        <p:style>
-          <a:lnRef idx="1">
-            <a:schemeClr val="accent1"/>
-          </a:lnRef>
-          <a:fillRef idx="3">
-            <a:schemeClr val="accent1"/>
-          </a:fillRef>
-          <a:effectRef idx="2">
-            <a:schemeClr val="accent1"/>
-          </a:effectRef>
-          <a:fontRef idx="minor">
-            <a:schemeClr val="lt1"/>
-          </a:fontRef>
-        </p:style>
-        <p:txBody>
-          <a:bodyPr rtlCol="0" anchor="ctr" wrap="square" lIns="109728" rIns="109728"/>
-          <a:lstStyle/>
-          <a:p>
-            <a:pPr algn="ctr"/>
-            <a:r>
-              <a:rPr sz="2200" b="1" i="0">
-                <a:solidFill>
-                  <a:srgbClr val="FFFFFF"/>
-                </a:solidFill>
-                <a:latin typeface="Arial"/>
-              </a:rPr>
-              <a:t>3</a:t>
-            </a:r>
-          </a:p>
-        </p:txBody>
-      </p:sp>
-      <p:sp>
-        <p:nvSpPr>
-          <p:cNvPr id="54" name="step 3"/>
-          <p:cNvSpPr/>
-          <p:nvPr/>
-        </p:nvSpPr>
-        <p:spPr>
-          <a:xfrm>
-            <a:off x="11457432" y="27505152"/>
-            <a:ext cx="7196328" cy="1005840"/>
-          </a:xfrm>
-          <a:prstGeom prst="roundRect">
-            <a:avLst/>
-          </a:prstGeom>
-          <a:solidFill>
-            <a:srgbClr val="FCF1DB"/>
-          </a:solidFill>
-          <a:ln w="25400">
-            <a:solidFill>
-              <a:srgbClr val="C48700"/>
-            </a:solidFill>
-          </a:ln>
-          <a:effectLst/>
-        </p:spPr>
-        <p:style>
-          <a:lnRef idx="1">
-            <a:schemeClr val="accent1"/>
-          </a:lnRef>
-          <a:fillRef idx="3">
-            <a:schemeClr val="accent1"/>
-          </a:fillRef>
-          <a:effectRef idx="2">
-            <a:schemeClr val="accent1"/>
-          </a:effectRef>
-          <a:fontRef idx="minor">
-            <a:schemeClr val="lt1"/>
-          </a:fontRef>
-        </p:style>
-        <p:txBody>
-          <a:bodyPr rtlCol="0" anchor="ctr" wrap="square" lIns="109728" rIns="109728"/>
-          <a:lstStyle/>
-          <a:p>
-            <a:pPr algn="l"/>
-            <a:r>
-              <a:rPr sz="2200" b="1" i="0">
-                <a:solidFill>
-                  <a:srgbClr val="1F2328"/>
-                </a:solidFill>
-                <a:latin typeface="Arial"/>
-              </a:rPr>
-              <a:t>Score 16 test scenes once.</a:t>
-            </a:r>
-            <a:r>
-              <a:rPr sz="2200" b="0" i="0">
-                <a:solidFill>
-                  <a:srgbClr val="1F2328"/>
-                </a:solidFill>
-                <a:latin typeface="Arial"/>
-              </a:rPr>
-              <a:t> Same thresholds, no retuning.</a:t>
-            </a:r>
-          </a:p>
-        </p:txBody>
-      </p:sp>
-      <p:cxnSp>
-        <p:nvCxnSpPr>
-          <p:cNvPr id="55" name="step arrow 3"/>
-          <p:cNvCxnSpPr/>
-          <p:nvPr/>
-        </p:nvCxnSpPr>
-        <p:spPr>
-          <a:xfrm>
-            <a:off x="15055596" y="28510992"/>
-            <a:ext cx="0" cy="502920"/>
-          </a:xfrm>
-          <a:prstGeom prst="line">
-            <a:avLst/>
-          </a:prstGeom>
-          <a:ln w="28575">
-            <a:solidFill>
-              <a:srgbClr val="1F2328"/>
-            </a:solidFill>
-            <a:tailEnd type="triangle" w="med" len="med"/>
-          </a:ln>
-        </p:spPr>
-        <p:style>
-          <a:lnRef idx="2">
-            <a:schemeClr val="accent1"/>
-          </a:lnRef>
-          <a:fillRef idx="0">
-            <a:schemeClr val="accent1"/>
-          </a:fillRef>
-          <a:effectRef idx="1">
-            <a:schemeClr val="accent1"/>
-          </a:effectRef>
-          <a:fontRef idx="minor">
-            <a:schemeClr val="tx1"/>
-          </a:fontRef>
-        </p:style>
-      </p:cxnSp>
-      <p:sp>
-        <p:nvSpPr>
-          <p:cNvPr id="56" name="step 4 number"/>
-          <p:cNvSpPr/>
-          <p:nvPr/>
-        </p:nvSpPr>
-        <p:spPr>
-          <a:xfrm>
-            <a:off x="10634472" y="29242512"/>
-            <a:ext cx="548640" cy="548640"/>
-          </a:xfrm>
-          <a:prstGeom prst="ellipse">
-            <a:avLst/>
-          </a:prstGeom>
-          <a:solidFill>
-            <a:srgbClr val="14213D"/>
-          </a:solidFill>
-          <a:ln w="25400">
-            <a:solidFill>
-              <a:srgbClr val="14213D"/>
-            </a:solidFill>
-          </a:ln>
-          <a:effectLst/>
-        </p:spPr>
-        <p:style>
-          <a:lnRef idx="1">
-            <a:schemeClr val="accent1"/>
-          </a:lnRef>
-          <a:fillRef idx="3">
-            <a:schemeClr val="accent1"/>
-          </a:fillRef>
-          <a:effectRef idx="2">
-            <a:schemeClr val="accent1"/>
-          </a:effectRef>
-          <a:fontRef idx="minor">
-            <a:schemeClr val="lt1"/>
-          </a:fontRef>
-        </p:style>
-        <p:txBody>
-          <a:bodyPr rtlCol="0" anchor="ctr" wrap="square" lIns="109728" rIns="109728"/>
-          <a:lstStyle/>
-          <a:p>
-            <a:pPr algn="ctr"/>
-            <a:r>
-              <a:rPr sz="2200" b="1" i="0">
-                <a:solidFill>
-                  <a:srgbClr val="FFFFFF"/>
-                </a:solidFill>
-                <a:latin typeface="Arial"/>
-              </a:rPr>
-              <a:t>4</a:t>
-            </a:r>
-          </a:p>
-        </p:txBody>
-      </p:sp>
-      <p:sp>
-        <p:nvSpPr>
-          <p:cNvPr id="57" name="step 4"/>
-          <p:cNvSpPr/>
-          <p:nvPr/>
-        </p:nvSpPr>
-        <p:spPr>
-          <a:xfrm>
-            <a:off x="11457432" y="29013912"/>
-            <a:ext cx="7196328" cy="1005840"/>
-          </a:xfrm>
-          <a:prstGeom prst="roundRect">
-            <a:avLst/>
-          </a:prstGeom>
-          <a:solidFill>
-            <a:srgbClr val="E0F4EE"/>
-          </a:solidFill>
-          <a:ln w="25400">
-            <a:solidFill>
-              <a:srgbClr val="009E73"/>
-            </a:solidFill>
-          </a:ln>
-          <a:effectLst/>
-        </p:spPr>
-        <p:style>
-          <a:lnRef idx="1">
-            <a:schemeClr val="accent1"/>
-          </a:lnRef>
-          <a:fillRef idx="3">
-            <a:schemeClr val="accent1"/>
-          </a:fillRef>
-          <a:effectRef idx="2">
-            <a:schemeClr val="accent1"/>
-          </a:effectRef>
-          <a:fontRef idx="minor">
-            <a:schemeClr val="lt1"/>
-          </a:fontRef>
-        </p:style>
-        <p:txBody>
-          <a:bodyPr rtlCol="0" anchor="ctr" wrap="square" lIns="109728" rIns="109728"/>
-          <a:lstStyle/>
-          <a:p>
-            <a:pPr algn="l"/>
-            <a:r>
-              <a:rPr sz="2200" b="1" i="0">
-                <a:solidFill>
-                  <a:srgbClr val="1F2328"/>
-                </a:solidFill>
-                <a:latin typeface="Arial"/>
-              </a:rPr>
-              <a:t>Open 50 verified scenes once.</a:t>
-            </a:r>
-            <a:r>
-              <a:rPr sz="2200" b="0" i="0">
-                <a:solidFill>
-                  <a:srgbClr val="1F2328"/>
-                </a:solidFill>
-                <a:latin typeface="Arial"/>
-              </a:rPr>
-              <a:t> Same thresholds, all 32 cells.</a:t>
-            </a:r>
-          </a:p>
-        </p:txBody>
-      </p:sp>
-      <p:sp>
-        <p:nvSpPr>
-          <p:cNvPr id="58" name="heading: Pretraining helps most when labels are scarce"/>
-          <p:cNvSpPr txBox="1"/>
-          <p:nvPr/>
-        </p:nvSpPr>
-        <p:spPr>
-          <a:xfrm>
-            <a:off x="19687032" y="6702552"/>
-            <a:ext cx="13962888" cy="685800"/>
-          </a:xfrm>
-          <a:prstGeom prst="rect">
-            <a:avLst/>
-          </a:prstGeom>
-          <a:noFill/>
-        </p:spPr>
-        <p:txBody>
-          <a:bodyPr wrap="square" anchor="b" lIns="0" rIns="0" tIns="0" bIns="0">
-            <a:spAutoFit/>
-          </a:bodyPr>
-          <a:lstStyle/>
-          <a:p>
-            <a:pPr algn="ctr">
-              <a:spcAft>
-                <a:spcPts val="0"/>
-              </a:spcAft>
-            </a:pPr>
-            <a:r>
-              <a:rPr sz="4200" b="1" i="0">
-                <a:solidFill>
-                  <a:srgbClr val="14213D"/>
-                </a:solidFill>
-                <a:latin typeface="Arial"/>
-              </a:rPr>
-              <a:t>Pretraining helps most when labels are scarce</a:t>
-            </a:r>
-          </a:p>
-        </p:txBody>
-      </p:sp>
-      <p:cxnSp>
-        <p:nvCxnSpPr>
-          <p:cNvPr id="59" name="rule: Pretraining helps most when labels are scarce"/>
-          <p:cNvCxnSpPr/>
-          <p:nvPr/>
-        </p:nvCxnSpPr>
-        <p:spPr>
-          <a:xfrm>
-            <a:off x="19687032" y="7479792"/>
-            <a:ext cx="13962888" cy="0"/>
           </a:xfrm>
           <a:prstGeom prst="line">
             <a:avLst/>
@@ -6507,7 +5839,7 @@
       </p:cxnSp>
       <p:pic>
         <p:nvPicPr>
-          <p:cNvPr id="60" name="figure: label efficiency" descr="poster_label_efficiency.png"/>
+          <p:cNvPr id="47" name="figure: SARMAE dynamics" descr="poster_sarmae_dynamics.png"/>
           <p:cNvPicPr>
             <a:picLocks noChangeAspect="1"/>
           </p:cNvPicPr>
@@ -6521,8 +5853,8 @@
         </p:blipFill>
         <p:spPr>
           <a:xfrm>
-            <a:off x="20034504" y="7754112"/>
-            <a:ext cx="13267944" cy="9211221"/>
+            <a:off x="10588751" y="25219152"/>
+            <a:ext cx="8110728" cy="4497713"/>
           </a:xfrm>
           <a:prstGeom prst="rect">
             <a:avLst/>
@@ -6531,14 +5863,14 @@
       </p:pic>
       <p:sp>
         <p:nvSpPr>
-          <p:cNvPr id="61" name="figure 1 caption"/>
+          <p:cNvPr id="48" name="SARMAE caption"/>
           <p:cNvSpPr txBox="1"/>
           <p:nvPr/>
         </p:nvSpPr>
         <p:spPr>
           <a:xfrm>
-            <a:off x="19943064" y="17102493"/>
-            <a:ext cx="13450824" cy="914400"/>
+            <a:off x="10497311" y="29826593"/>
+            <a:ext cx="8293608" cy="1811647"/>
           </a:xfrm>
           <a:prstGeom prst="rect">
             <a:avLst/>
@@ -6563,20 +5895,20 @@
                 </a:solidFill>
                 <a:latin typeface="Arial"/>
               </a:rPr>
-              <a:t>F1 with 200 m matching. Each of the 32 cells is scored once with the threshold it picked on 8 dev scenes. Top: 16 held-out test scenes. Bottom: 50 near-shore, human-verified scenes. Seed 0.</a:t>
-            </a:r>
-          </a:p>
-        </p:txBody>
-      </p:sp>
-      <p:sp>
-        <p:nvSpPr>
-          <p:cNvPr id="62" name="heading: SAR vs. optical depends on backbone and budget"/>
+              <a:t>At 28 scenes SARMAE peaks as warm-up ends, then overfits (training loss 0.482 → 0.034; dev precision 0.858 → 0.768). Early stopping keeps the epoch-4 checkpoint.</a:t>
+            </a:r>
+          </a:p>
+        </p:txBody>
+      </p:sp>
+      <p:sp>
+        <p:nvSpPr>
+          <p:cNvPr id="49" name="heading: Pretraining helps most when labels are scarce"/>
           <p:cNvSpPr txBox="1"/>
           <p:nvPr/>
         </p:nvSpPr>
         <p:spPr>
           <a:xfrm>
-            <a:off x="19687032" y="18717768"/>
+            <a:off x="19687032" y="6702552"/>
             <a:ext cx="13962888" cy="685800"/>
           </a:xfrm>
           <a:prstGeom prst="rect">
@@ -6602,20 +5934,20 @@
                 </a:solidFill>
                 <a:latin typeface="Arial"/>
               </a:rPr>
-              <a:t>SAR vs. optical depends on backbone and budget</a:t>
+              <a:t>Pretraining helps most when labels are scarce</a:t>
             </a:r>
           </a:p>
         </p:txBody>
       </p:sp>
       <p:cxnSp>
         <p:nvCxnSpPr>
-          <p:cNvPr id="63" name="rule: SAR vs. optical depends on backbone and budget"/>
+          <p:cNvPr id="50" name="rule: Pretraining helps most when labels are scarce"/>
           <p:cNvCxnSpPr/>
           <p:nvPr/>
         </p:nvCxnSpPr>
         <p:spPr>
           <a:xfrm>
-            <a:off x="19687032" y="19495008"/>
+            <a:off x="19687032" y="7479792"/>
             <a:ext cx="13962888" cy="0"/>
           </a:xfrm>
           <a:prstGeom prst="line">
@@ -6644,7 +5976,7 @@
       </p:cxnSp>
       <p:pic>
         <p:nvPicPr>
-          <p:cNvPr id="64" name="figure: SAR minus optical" descr="poster_sar_minus_optical.png"/>
+          <p:cNvPr id="51" name="figure: label efficiency" descr="poster_label_efficiency.png"/>
           <p:cNvPicPr>
             <a:picLocks noChangeAspect="1"/>
           </p:cNvPicPr>
@@ -6658,8 +5990,8 @@
         </p:blipFill>
         <p:spPr>
           <a:xfrm>
-            <a:off x="20034504" y="19769328"/>
-            <a:ext cx="13267944" cy="5539106"/>
+            <a:off x="20034504" y="7754112"/>
+            <a:ext cx="13267944" cy="9211221"/>
           </a:xfrm>
           <a:prstGeom prst="rect">
             <a:avLst/>
@@ -6668,13 +6000,13 @@
       </p:pic>
       <p:sp>
         <p:nvSpPr>
-          <p:cNvPr id="65" name="figure 2 caption"/>
+          <p:cNvPr id="52" name="figure 1 caption"/>
           <p:cNvSpPr txBox="1"/>
           <p:nvPr/>
         </p:nvSpPr>
         <p:spPr>
           <a:xfrm>
-            <a:off x="19943064" y="25445594"/>
+            <a:off x="19943064" y="17102493"/>
             <a:ext cx="13450824" cy="914400"/>
           </a:xfrm>
           <a:prstGeom prst="rect">
@@ -6700,20 +6032,20 @@
                 </a:solidFill>
                 <a:latin typeface="Arial"/>
               </a:rPr>
-              <a:t>Bars: 95% intervals from 10,000 paired scene resamples. They cover scene sampling only: retraining 28 unchanged cells moved test F1 by up to 0.043.</a:t>
-            </a:r>
-          </a:p>
-        </p:txBody>
-      </p:sp>
-      <p:sp>
-        <p:nvSpPr>
-          <p:cNvPr id="66" name="heading: The verified scenes expose a coastal label gap"/>
+              <a:t>F1 with 200 m matching. Each of the 32 cells is scored once with the threshold it picked on 8 dev scenes. Top: 16 held-out test scenes. Bottom: 50 near-shore, human-verified scenes. Seed 0.</a:t>
+            </a:r>
+          </a:p>
+        </p:txBody>
+      </p:sp>
+      <p:sp>
+        <p:nvSpPr>
+          <p:cNvPr id="53" name="heading: SAR vs. optical depends on backbone and budget"/>
           <p:cNvSpPr txBox="1"/>
           <p:nvPr/>
         </p:nvSpPr>
         <p:spPr>
           <a:xfrm>
-            <a:off x="19687032" y="27038808"/>
+            <a:off x="19687032" y="18717768"/>
             <a:ext cx="13962888" cy="685800"/>
           </a:xfrm>
           <a:prstGeom prst="rect">
@@ -6739,20 +6071,20 @@
                 </a:solidFill>
                 <a:latin typeface="Arial"/>
               </a:rPr>
-              <a:t>The verified scenes expose a coastal label gap</a:t>
+              <a:t>SAR vs. optical depends on backbone and budget</a:t>
             </a:r>
           </a:p>
         </p:txBody>
       </p:sp>
       <p:cxnSp>
         <p:nvCxnSpPr>
-          <p:cNvPr id="67" name="rule: The verified scenes expose a coastal label gap"/>
+          <p:cNvPr id="54" name="rule: SAR vs. optical depends on backbone and budget"/>
           <p:cNvCxnSpPr/>
           <p:nvPr/>
         </p:nvCxnSpPr>
         <p:spPr>
           <a:xfrm>
-            <a:off x="19687032" y="27816048"/>
+            <a:off x="19687032" y="19495008"/>
             <a:ext cx="13962888" cy="0"/>
           </a:xfrm>
           <a:prstGeom prst="line">
@@ -6779,16 +6111,40 @@
           </a:fontRef>
         </p:style>
       </p:cxnSp>
-      <p:sp>
-        <p:nvSpPr>
-          <p:cNvPr id="68" name="stat 1 value"/>
+      <p:pic>
+        <p:nvPicPr>
+          <p:cNvPr id="55" name="figure: SAR minus optical" descr="poster_sar_minus_optical.png"/>
+          <p:cNvPicPr>
+            <a:picLocks noChangeAspect="1"/>
+          </p:cNvPicPr>
+          <p:nvPr/>
+        </p:nvPicPr>
+        <p:blipFill>
+          <a:blip r:embed="rId5"/>
+          <a:stretch>
+            <a:fillRect/>
+          </a:stretch>
+        </p:blipFill>
+        <p:spPr>
+          <a:xfrm>
+            <a:off x="20034504" y="19769328"/>
+            <a:ext cx="13267944" cy="5539106"/>
+          </a:xfrm>
+          <a:prstGeom prst="rect">
+            <a:avLst/>
+          </a:prstGeom>
+        </p:spPr>
+      </p:pic>
+      <p:sp>
+        <p:nvSpPr>
+          <p:cNvPr id="56" name="figure 2 caption"/>
           <p:cNvSpPr txBox="1"/>
           <p:nvPr/>
         </p:nvSpPr>
         <p:spPr>
           <a:xfrm>
-            <a:off x="19943064" y="27998928"/>
-            <a:ext cx="4483608" cy="822960"/>
+            <a:off x="19943064" y="25445594"/>
+            <a:ext cx="13450824" cy="914400"/>
           </a:xfrm>
           <a:prstGeom prst="rect">
             <a:avLst/>
@@ -6797,6 +6153,45 @@
         </p:spPr>
         <p:txBody>
           <a:bodyPr wrap="square" anchor="t" lIns="0" rIns="0" tIns="0" bIns="0">
+            <a:spAutoFit/>
+          </a:bodyPr>
+          <a:lstStyle/>
+          <a:p>
+            <a:pPr algn="l">
+              <a:spcAft>
+                <a:spcPts val="800"/>
+              </a:spcAft>
+            </a:pPr>
+            <a:r>
+              <a:rPr sz="2000" b="0" i="0">
+                <a:solidFill>
+                  <a:srgbClr val="1F2328"/>
+                </a:solidFill>
+                <a:latin typeface="Arial"/>
+              </a:rPr>
+              <a:t>Bars: 95% intervals from 10,000 paired scene resamples. They cover scene sampling only: retraining 28 unchanged cells moved test F1 by up to 0.043.</a:t>
+            </a:r>
+          </a:p>
+        </p:txBody>
+      </p:sp>
+      <p:sp>
+        <p:nvSpPr>
+          <p:cNvPr id="57" name="heading: The verified scenes expose a coastal label gap"/>
+          <p:cNvSpPr txBox="1"/>
+          <p:nvPr/>
+        </p:nvSpPr>
+        <p:spPr>
+          <a:xfrm>
+            <a:off x="19687032" y="27038808"/>
+            <a:ext cx="13962888" cy="685800"/>
+          </a:xfrm>
+          <a:prstGeom prst="rect">
+            <a:avLst/>
+          </a:prstGeom>
+          <a:noFill/>
+        </p:spPr>
+        <p:txBody>
+          <a:bodyPr wrap="square" anchor="b" lIns="0" rIns="0" tIns="0" bIns="0">
             <a:spAutoFit/>
           </a:bodyPr>
           <a:lstStyle/>
@@ -6807,348 +6202,27 @@
               </a:spcAft>
             </a:pPr>
             <a:r>
-              <a:rPr sz="5200" b="1" i="0">
+              <a:rPr sz="4200" b="1" i="0">
                 <a:solidFill>
                   <a:srgbClr val="14213D"/>
                 </a:solidFill>
                 <a:latin typeface="Arial"/>
               </a:rPr>
-              <a:t>0.4% → 31%</a:t>
-            </a:r>
-          </a:p>
-        </p:txBody>
-      </p:sp>
-      <p:sp>
-        <p:nvSpPr>
-          <p:cNvPr id="69" name="stat 1 label"/>
-          <p:cNvSpPr txBox="1"/>
-          <p:nvPr/>
-        </p:nvSpPr>
-        <p:spPr>
-          <a:xfrm>
-            <a:off x="19943064" y="28867608"/>
-            <a:ext cx="4483608" cy="777240"/>
-          </a:xfrm>
-          <a:prstGeom prst="rect">
-            <a:avLst/>
-          </a:prstGeom>
-          <a:noFill/>
-        </p:spPr>
-        <p:txBody>
-          <a:bodyPr wrap="square" anchor="t" lIns="0" rIns="0" tIns="0" bIns="0">
-            <a:spAutoFit/>
-          </a:bodyPr>
-          <a:lstStyle/>
-          <a:p>
-            <a:pPr algn="ctr">
-              <a:spcAft>
-                <a:spcPts val="0"/>
-              </a:spcAft>
-            </a:pPr>
-            <a:r>
-              <a:rPr sz="2000" b="0" i="0">
-                <a:solidFill>
-                  <a:srgbClr val="1F2328"/>
-                </a:solidFill>
-                <a:latin typeface="Arial"/>
-              </a:rPr>
-              <a:t>vessels within 2 km of shore:</a:t>
-            </a:r>
-          </a:p>
-          <a:p>
-            <a:pPr algn="ctr">
-              <a:spcAft>
-                <a:spcPts val="0"/>
-              </a:spcAft>
-            </a:pPr>
-            <a:r>
-              <a:rPr sz="2000" b="0" i="0">
-                <a:solidFill>
-                  <a:srgbClr val="1F2328"/>
-                </a:solidFill>
-                <a:latin typeface="Arial"/>
-              </a:rPr>
-              <a:t>training labels → verified scenes</a:t>
-            </a:r>
-          </a:p>
-        </p:txBody>
-      </p:sp>
-      <p:sp>
-        <p:nvSpPr>
-          <p:cNvPr id="70" name="stat 2 value"/>
-          <p:cNvSpPr txBox="1"/>
-          <p:nvPr/>
-        </p:nvSpPr>
-        <p:spPr>
-          <a:xfrm>
-            <a:off x="24426672" y="27998928"/>
-            <a:ext cx="4483608" cy="822960"/>
-          </a:xfrm>
-          <a:prstGeom prst="rect">
-            <a:avLst/>
-          </a:prstGeom>
-          <a:noFill/>
-        </p:spPr>
-        <p:txBody>
-          <a:bodyPr wrap="square" anchor="t" lIns="0" rIns="0" tIns="0" bIns="0">
-            <a:spAutoFit/>
-          </a:bodyPr>
-          <a:lstStyle/>
-          <a:p>
-            <a:pPr algn="ctr">
-              <a:spcAft>
-                <a:spcPts val="0"/>
-              </a:spcAft>
-            </a:pPr>
-            <a:r>
-              <a:rPr sz="5200" b="1" i="0">
-                <a:solidFill>
-                  <a:srgbClr val="14213D"/>
-                </a:solidFill>
-                <a:latin typeface="Arial"/>
-              </a:rPr>
-              <a:t>34 / 4,302</a:t>
-            </a:r>
-          </a:p>
-        </p:txBody>
-      </p:sp>
-      <p:sp>
-        <p:nvSpPr>
-          <p:cNvPr id="71" name="stat 2 label"/>
-          <p:cNvSpPr txBox="1"/>
-          <p:nvPr/>
-        </p:nvSpPr>
-        <p:spPr>
-          <a:xfrm>
-            <a:off x="24426672" y="28867608"/>
-            <a:ext cx="4483608" cy="777240"/>
-          </a:xfrm>
-          <a:prstGeom prst="rect">
-            <a:avLst/>
-          </a:prstGeom>
-          <a:noFill/>
-        </p:spPr>
-        <p:txBody>
-          <a:bodyPr wrap="square" anchor="t" lIns="0" rIns="0" tIns="0" bIns="0">
-            <a:spAutoFit/>
-          </a:bodyPr>
-          <a:lstStyle/>
-          <a:p>
-            <a:pPr algn="ctr">
-              <a:spcAft>
-                <a:spcPts val="0"/>
-              </a:spcAft>
-            </a:pPr>
-            <a:r>
-              <a:rPr sz="2000" b="0" i="0">
-                <a:solidFill>
-                  <a:srgbClr val="1F2328"/>
-                </a:solidFill>
-                <a:latin typeface="Arial"/>
-              </a:rPr>
-              <a:t>best cell's predictions</a:t>
-            </a:r>
-          </a:p>
-          <a:p>
-            <a:pPr algn="ctr">
-              <a:spcAft>
-                <a:spcPts val="0"/>
-              </a:spcAft>
-            </a:pPr>
-            <a:r>
-              <a:rPr sz="2000" b="0" i="0">
-                <a:solidFill>
-                  <a:srgbClr val="1F2328"/>
-                </a:solidFill>
-                <a:latin typeface="Arial"/>
-              </a:rPr>
-              <a:t>within 2 km of shore</a:t>
-            </a:r>
-          </a:p>
-        </p:txBody>
-      </p:sp>
-      <p:sp>
-        <p:nvSpPr>
-          <p:cNvPr id="72" name="stat 3 value"/>
-          <p:cNvSpPr txBox="1"/>
-          <p:nvPr/>
-        </p:nvSpPr>
-        <p:spPr>
-          <a:xfrm>
-            <a:off x="28910280" y="27998928"/>
-            <a:ext cx="4483608" cy="822960"/>
-          </a:xfrm>
-          <a:prstGeom prst="rect">
-            <a:avLst/>
-          </a:prstGeom>
-          <a:noFill/>
-        </p:spPr>
-        <p:txBody>
-          <a:bodyPr wrap="square" anchor="t" lIns="0" rIns="0" tIns="0" bIns="0">
-            <a:spAutoFit/>
-          </a:bodyPr>
-          <a:lstStyle/>
-          <a:p>
-            <a:pPr algn="ctr">
-              <a:spcAft>
-                <a:spcPts val="0"/>
-              </a:spcAft>
-            </a:pPr>
-            <a:r>
-              <a:rPr sz="5200" b="1" i="0">
-                <a:solidFill>
-                  <a:srgbClr val="14213D"/>
-                </a:solidFill>
-                <a:latin typeface="Arial"/>
-              </a:rPr>
-              <a:t>0.724</a:t>
-            </a:r>
-          </a:p>
-        </p:txBody>
-      </p:sp>
-      <p:sp>
-        <p:nvSpPr>
-          <p:cNvPr id="73" name="stat 3 label"/>
-          <p:cNvSpPr txBox="1"/>
-          <p:nvPr/>
-        </p:nvSpPr>
-        <p:spPr>
-          <a:xfrm>
-            <a:off x="28910280" y="28867608"/>
-            <a:ext cx="4483608" cy="777240"/>
-          </a:xfrm>
-          <a:prstGeom prst="rect">
-            <a:avLst/>
-          </a:prstGeom>
-          <a:noFill/>
-        </p:spPr>
-        <p:txBody>
-          <a:bodyPr wrap="square" anchor="t" lIns="0" rIns="0" tIns="0" bIns="0">
-            <a:spAutoFit/>
-          </a:bodyPr>
-          <a:lstStyle/>
-          <a:p>
-            <a:pPr algn="ctr">
-              <a:spcAft>
-                <a:spcPts val="0"/>
-              </a:spcAft>
-            </a:pPr>
-            <a:r>
-              <a:rPr sz="2000" b="0" i="0">
-                <a:solidFill>
-                  <a:srgbClr val="1F2328"/>
-                </a:solidFill>
-                <a:latin typeface="Arial"/>
-              </a:rPr>
-              <a:t>best cell's offshore verified F1</a:t>
-            </a:r>
-          </a:p>
-          <a:p>
-            <a:pPr algn="ctr">
-              <a:spcAft>
-                <a:spcPts val="0"/>
-              </a:spcAft>
-            </a:pPr>
-            <a:r>
-              <a:rPr sz="2000" b="0" i="0">
-                <a:solidFill>
-                  <a:srgbClr val="1F2328"/>
-                </a:solidFill>
-                <a:latin typeface="Arial"/>
-              </a:rPr>
-              <a:t>(0.574 overall)</a:t>
-            </a:r>
-          </a:p>
-        </p:txBody>
-      </p:sp>
-      <p:sp>
-        <p:nvSpPr>
-          <p:cNvPr id="74" name="stat note"/>
-          <p:cNvSpPr txBox="1"/>
-          <p:nvPr/>
-        </p:nvSpPr>
-        <p:spPr>
-          <a:xfrm>
-            <a:off x="19943064" y="29782008"/>
-            <a:ext cx="13450824" cy="822960"/>
-          </a:xfrm>
-          <a:prstGeom prst="rect">
-            <a:avLst/>
-          </a:prstGeom>
-          <a:noFill/>
-        </p:spPr>
-        <p:txBody>
-          <a:bodyPr wrap="square" anchor="t" lIns="0" rIns="0" tIns="0" bIns="0">
-            <a:spAutoFit/>
-          </a:bodyPr>
-          <a:lstStyle/>
-          <a:p>
-            <a:pPr algn="l">
-              <a:spcAft>
-                <a:spcPts val="800"/>
-              </a:spcAft>
-            </a:pPr>
-            <a:r>
-              <a:rPr sz="2000" b="0" i="0">
-                <a:solidFill>
-                  <a:srgbClr val="1F2328"/>
-                </a:solidFill>
-                <a:latin typeface="Arial"/>
-              </a:rPr>
-              <a:t>Every cell reaches at most 0.021 near-shore recall and 0.228 dark-vessel recall, while precision stays at 0.639–0.909: the detectors learned to stay silent near shore.</a:t>
-            </a:r>
-          </a:p>
-        </p:txBody>
-      </p:sp>
-      <p:sp>
-        <p:nvSpPr>
-          <p:cNvPr id="75" name="heading: Findings"/>
-          <p:cNvSpPr txBox="1"/>
-          <p:nvPr/>
-        </p:nvSpPr>
-        <p:spPr>
-          <a:xfrm>
-            <a:off x="34299144" y="6702552"/>
-            <a:ext cx="8805672" cy="685800"/>
-          </a:xfrm>
-          <a:prstGeom prst="rect">
-            <a:avLst/>
-          </a:prstGeom>
-          <a:noFill/>
-        </p:spPr>
-        <p:txBody>
-          <a:bodyPr wrap="square" anchor="b" lIns="0" rIns="0" tIns="0" bIns="0">
-            <a:spAutoFit/>
-          </a:bodyPr>
-          <a:lstStyle/>
-          <a:p>
-            <a:pPr algn="ctr">
-              <a:spcAft>
-                <a:spcPts val="0"/>
-              </a:spcAft>
-            </a:pPr>
-            <a:r>
-              <a:rPr sz="4200" b="1" i="0">
-                <a:solidFill>
-                  <a:srgbClr val="14213D"/>
-                </a:solidFill>
-                <a:latin typeface="Arial"/>
-              </a:rPr>
-              <a:t>Findings</a:t>
+              <a:t>The verified scenes expose a coastal label gap</a:t>
             </a:r>
           </a:p>
         </p:txBody>
       </p:sp>
       <p:cxnSp>
         <p:nvCxnSpPr>
-          <p:cNvPr id="76" name="rule: Findings"/>
+          <p:cNvPr id="58" name="rule: The verified scenes expose a coastal label gap"/>
           <p:cNvCxnSpPr/>
           <p:nvPr/>
         </p:nvCxnSpPr>
         <p:spPr>
           <a:xfrm>
-            <a:off x="34299144" y="7479792"/>
-            <a:ext cx="8805672" cy="0"/>
+            <a:off x="19687032" y="27816048"/>
+            <a:ext cx="13962888" cy="0"/>
           </a:xfrm>
           <a:prstGeom prst="line">
             <a:avLst/>
@@ -7176,14 +6250,14 @@
       </p:cxnSp>
       <p:sp>
         <p:nvSpPr>
-          <p:cNvPr id="77" name="hero number"/>
+          <p:cNvPr id="59" name="stat 1 value"/>
           <p:cNvSpPr txBox="1"/>
           <p:nvPr/>
         </p:nvSpPr>
         <p:spPr>
           <a:xfrm>
-            <a:off x="34555176" y="7662672"/>
-            <a:ext cx="8293608" cy="1005840"/>
+            <a:off x="19943064" y="27998928"/>
+            <a:ext cx="4483608" cy="822960"/>
           </a:xfrm>
           <a:prstGeom prst="rect">
             <a:avLst/>
@@ -7202,6 +6276,401 @@
               </a:spcAft>
             </a:pPr>
             <a:r>
+              <a:rPr sz="5200" b="1" i="0">
+                <a:solidFill>
+                  <a:srgbClr val="14213D"/>
+                </a:solidFill>
+                <a:latin typeface="Arial"/>
+              </a:rPr>
+              <a:t>0.4% → 31%</a:t>
+            </a:r>
+          </a:p>
+        </p:txBody>
+      </p:sp>
+      <p:sp>
+        <p:nvSpPr>
+          <p:cNvPr id="60" name="stat 1 label"/>
+          <p:cNvSpPr txBox="1"/>
+          <p:nvPr/>
+        </p:nvSpPr>
+        <p:spPr>
+          <a:xfrm>
+            <a:off x="19943064" y="28867608"/>
+            <a:ext cx="4483608" cy="777240"/>
+          </a:xfrm>
+          <a:prstGeom prst="rect">
+            <a:avLst/>
+          </a:prstGeom>
+          <a:noFill/>
+        </p:spPr>
+        <p:txBody>
+          <a:bodyPr wrap="square" anchor="t" lIns="0" rIns="0" tIns="0" bIns="0">
+            <a:spAutoFit/>
+          </a:bodyPr>
+          <a:lstStyle/>
+          <a:p>
+            <a:pPr algn="ctr">
+              <a:spcAft>
+                <a:spcPts val="0"/>
+              </a:spcAft>
+            </a:pPr>
+            <a:r>
+              <a:rPr sz="2000" b="0" i="0">
+                <a:solidFill>
+                  <a:srgbClr val="1F2328"/>
+                </a:solidFill>
+                <a:latin typeface="Arial"/>
+              </a:rPr>
+              <a:t>vessels within 2 km of shore:</a:t>
+            </a:r>
+          </a:p>
+          <a:p>
+            <a:pPr algn="ctr">
+              <a:spcAft>
+                <a:spcPts val="0"/>
+              </a:spcAft>
+            </a:pPr>
+            <a:r>
+              <a:rPr sz="2000" b="0" i="0">
+                <a:solidFill>
+                  <a:srgbClr val="1F2328"/>
+                </a:solidFill>
+                <a:latin typeface="Arial"/>
+              </a:rPr>
+              <a:t>training labels → verified scenes</a:t>
+            </a:r>
+          </a:p>
+        </p:txBody>
+      </p:sp>
+      <p:sp>
+        <p:nvSpPr>
+          <p:cNvPr id="61" name="stat 2 value"/>
+          <p:cNvSpPr txBox="1"/>
+          <p:nvPr/>
+        </p:nvSpPr>
+        <p:spPr>
+          <a:xfrm>
+            <a:off x="24426672" y="27998928"/>
+            <a:ext cx="4483608" cy="822960"/>
+          </a:xfrm>
+          <a:prstGeom prst="rect">
+            <a:avLst/>
+          </a:prstGeom>
+          <a:noFill/>
+        </p:spPr>
+        <p:txBody>
+          <a:bodyPr wrap="square" anchor="t" lIns="0" rIns="0" tIns="0" bIns="0">
+            <a:spAutoFit/>
+          </a:bodyPr>
+          <a:lstStyle/>
+          <a:p>
+            <a:pPr algn="ctr">
+              <a:spcAft>
+                <a:spcPts val="0"/>
+              </a:spcAft>
+            </a:pPr>
+            <a:r>
+              <a:rPr sz="5200" b="1" i="0">
+                <a:solidFill>
+                  <a:srgbClr val="14213D"/>
+                </a:solidFill>
+                <a:latin typeface="Arial"/>
+              </a:rPr>
+              <a:t>34 / 4,302</a:t>
+            </a:r>
+          </a:p>
+        </p:txBody>
+      </p:sp>
+      <p:sp>
+        <p:nvSpPr>
+          <p:cNvPr id="62" name="stat 2 label"/>
+          <p:cNvSpPr txBox="1"/>
+          <p:nvPr/>
+        </p:nvSpPr>
+        <p:spPr>
+          <a:xfrm>
+            <a:off x="24426672" y="28867608"/>
+            <a:ext cx="4483608" cy="777240"/>
+          </a:xfrm>
+          <a:prstGeom prst="rect">
+            <a:avLst/>
+          </a:prstGeom>
+          <a:noFill/>
+        </p:spPr>
+        <p:txBody>
+          <a:bodyPr wrap="square" anchor="t" lIns="0" rIns="0" tIns="0" bIns="0">
+            <a:spAutoFit/>
+          </a:bodyPr>
+          <a:lstStyle/>
+          <a:p>
+            <a:pPr algn="ctr">
+              <a:spcAft>
+                <a:spcPts val="0"/>
+              </a:spcAft>
+            </a:pPr>
+            <a:r>
+              <a:rPr sz="2000" b="0" i="0">
+                <a:solidFill>
+                  <a:srgbClr val="1F2328"/>
+                </a:solidFill>
+                <a:latin typeface="Arial"/>
+              </a:rPr>
+              <a:t>best cell's predictions</a:t>
+            </a:r>
+          </a:p>
+          <a:p>
+            <a:pPr algn="ctr">
+              <a:spcAft>
+                <a:spcPts val="0"/>
+              </a:spcAft>
+            </a:pPr>
+            <a:r>
+              <a:rPr sz="2000" b="0" i="0">
+                <a:solidFill>
+                  <a:srgbClr val="1F2328"/>
+                </a:solidFill>
+                <a:latin typeface="Arial"/>
+              </a:rPr>
+              <a:t>within 2 km of shore</a:t>
+            </a:r>
+          </a:p>
+        </p:txBody>
+      </p:sp>
+      <p:sp>
+        <p:nvSpPr>
+          <p:cNvPr id="63" name="stat 3 value"/>
+          <p:cNvSpPr txBox="1"/>
+          <p:nvPr/>
+        </p:nvSpPr>
+        <p:spPr>
+          <a:xfrm>
+            <a:off x="28910280" y="27998928"/>
+            <a:ext cx="4483608" cy="822960"/>
+          </a:xfrm>
+          <a:prstGeom prst="rect">
+            <a:avLst/>
+          </a:prstGeom>
+          <a:noFill/>
+        </p:spPr>
+        <p:txBody>
+          <a:bodyPr wrap="square" anchor="t" lIns="0" rIns="0" tIns="0" bIns="0">
+            <a:spAutoFit/>
+          </a:bodyPr>
+          <a:lstStyle/>
+          <a:p>
+            <a:pPr algn="ctr">
+              <a:spcAft>
+                <a:spcPts val="0"/>
+              </a:spcAft>
+            </a:pPr>
+            <a:r>
+              <a:rPr sz="5200" b="1" i="0">
+                <a:solidFill>
+                  <a:srgbClr val="14213D"/>
+                </a:solidFill>
+                <a:latin typeface="Arial"/>
+              </a:rPr>
+              <a:t>0.724</a:t>
+            </a:r>
+          </a:p>
+        </p:txBody>
+      </p:sp>
+      <p:sp>
+        <p:nvSpPr>
+          <p:cNvPr id="64" name="stat 3 label"/>
+          <p:cNvSpPr txBox="1"/>
+          <p:nvPr/>
+        </p:nvSpPr>
+        <p:spPr>
+          <a:xfrm>
+            <a:off x="28910280" y="28867608"/>
+            <a:ext cx="4483608" cy="777240"/>
+          </a:xfrm>
+          <a:prstGeom prst="rect">
+            <a:avLst/>
+          </a:prstGeom>
+          <a:noFill/>
+        </p:spPr>
+        <p:txBody>
+          <a:bodyPr wrap="square" anchor="t" lIns="0" rIns="0" tIns="0" bIns="0">
+            <a:spAutoFit/>
+          </a:bodyPr>
+          <a:lstStyle/>
+          <a:p>
+            <a:pPr algn="ctr">
+              <a:spcAft>
+                <a:spcPts val="0"/>
+              </a:spcAft>
+            </a:pPr>
+            <a:r>
+              <a:rPr sz="2000" b="0" i="0">
+                <a:solidFill>
+                  <a:srgbClr val="1F2328"/>
+                </a:solidFill>
+                <a:latin typeface="Arial"/>
+              </a:rPr>
+              <a:t>best cell's offshore verified F1</a:t>
+            </a:r>
+          </a:p>
+          <a:p>
+            <a:pPr algn="ctr">
+              <a:spcAft>
+                <a:spcPts val="0"/>
+              </a:spcAft>
+            </a:pPr>
+            <a:r>
+              <a:rPr sz="2000" b="0" i="0">
+                <a:solidFill>
+                  <a:srgbClr val="1F2328"/>
+                </a:solidFill>
+                <a:latin typeface="Arial"/>
+              </a:rPr>
+              <a:t>(0.574 overall)</a:t>
+            </a:r>
+          </a:p>
+        </p:txBody>
+      </p:sp>
+      <p:sp>
+        <p:nvSpPr>
+          <p:cNvPr id="65" name="stat note"/>
+          <p:cNvSpPr txBox="1"/>
+          <p:nvPr/>
+        </p:nvSpPr>
+        <p:spPr>
+          <a:xfrm>
+            <a:off x="19943064" y="29782008"/>
+            <a:ext cx="13450824" cy="822960"/>
+          </a:xfrm>
+          <a:prstGeom prst="rect">
+            <a:avLst/>
+          </a:prstGeom>
+          <a:noFill/>
+        </p:spPr>
+        <p:txBody>
+          <a:bodyPr wrap="square" anchor="t" lIns="0" rIns="0" tIns="0" bIns="0">
+            <a:spAutoFit/>
+          </a:bodyPr>
+          <a:lstStyle/>
+          <a:p>
+            <a:pPr algn="l">
+              <a:spcAft>
+                <a:spcPts val="800"/>
+              </a:spcAft>
+            </a:pPr>
+            <a:r>
+              <a:rPr sz="2000" b="0" i="0">
+                <a:solidFill>
+                  <a:srgbClr val="1F2328"/>
+                </a:solidFill>
+                <a:latin typeface="Arial"/>
+              </a:rPr>
+              <a:t>Every cell reaches at most 0.021 near-shore recall and 0.228 dark-vessel recall, while precision stays at 0.639–0.909: the detectors learned to stay silent near shore.</a:t>
+            </a:r>
+          </a:p>
+        </p:txBody>
+      </p:sp>
+      <p:sp>
+        <p:nvSpPr>
+          <p:cNvPr id="66" name="heading: Findings"/>
+          <p:cNvSpPr txBox="1"/>
+          <p:nvPr/>
+        </p:nvSpPr>
+        <p:spPr>
+          <a:xfrm>
+            <a:off x="34299144" y="6702552"/>
+            <a:ext cx="8805672" cy="685800"/>
+          </a:xfrm>
+          <a:prstGeom prst="rect">
+            <a:avLst/>
+          </a:prstGeom>
+          <a:noFill/>
+        </p:spPr>
+        <p:txBody>
+          <a:bodyPr wrap="square" anchor="b" lIns="0" rIns="0" tIns="0" bIns="0">
+            <a:spAutoFit/>
+          </a:bodyPr>
+          <a:lstStyle/>
+          <a:p>
+            <a:pPr algn="ctr">
+              <a:spcAft>
+                <a:spcPts val="0"/>
+              </a:spcAft>
+            </a:pPr>
+            <a:r>
+              <a:rPr sz="4200" b="1" i="0">
+                <a:solidFill>
+                  <a:srgbClr val="14213D"/>
+                </a:solidFill>
+                <a:latin typeface="Arial"/>
+              </a:rPr>
+              <a:t>Findings</a:t>
+            </a:r>
+          </a:p>
+        </p:txBody>
+      </p:sp>
+      <p:cxnSp>
+        <p:nvCxnSpPr>
+          <p:cNvPr id="67" name="rule: Findings"/>
+          <p:cNvCxnSpPr/>
+          <p:nvPr/>
+        </p:nvCxnSpPr>
+        <p:spPr>
+          <a:xfrm>
+            <a:off x="34299144" y="7479792"/>
+            <a:ext cx="8805672" cy="0"/>
+          </a:xfrm>
+          <a:prstGeom prst="line">
+            <a:avLst/>
+          </a:prstGeom>
+          <a:ln w="57150">
+            <a:solidFill>
+              <a:srgbClr val="B8BEC8"/>
+            </a:solidFill>
+          </a:ln>
+        </p:spPr>
+        <p:style>
+          <a:lnRef idx="2">
+            <a:schemeClr val="accent1"/>
+          </a:lnRef>
+          <a:fillRef idx="0">
+            <a:schemeClr val="accent1"/>
+          </a:fillRef>
+          <a:effectRef idx="1">
+            <a:schemeClr val="accent1"/>
+          </a:effectRef>
+          <a:fontRef idx="minor">
+            <a:schemeClr val="tx1"/>
+          </a:fontRef>
+        </p:style>
+      </p:cxnSp>
+      <p:sp>
+        <p:nvSpPr>
+          <p:cNvPr id="68" name="hero number"/>
+          <p:cNvSpPr txBox="1"/>
+          <p:nvPr/>
+        </p:nvSpPr>
+        <p:spPr>
+          <a:xfrm>
+            <a:off x="34555176" y="7662672"/>
+            <a:ext cx="8293608" cy="1005840"/>
+          </a:xfrm>
+          <a:prstGeom prst="rect">
+            <a:avLst/>
+          </a:prstGeom>
+          <a:noFill/>
+        </p:spPr>
+        <p:txBody>
+          <a:bodyPr wrap="square" anchor="t" lIns="0" rIns="0" tIns="0" bIns="0">
+            <a:spAutoFit/>
+          </a:bodyPr>
+          <a:lstStyle/>
+          <a:p>
+            <a:pPr algn="ctr">
+              <a:spcAft>
+                <a:spcPts val="0"/>
+              </a:spcAft>
+            </a:pPr>
+            <a:r>
               <a:rPr sz="6000" b="1" i="0">
                 <a:solidFill>
                   <a:srgbClr val="009E73"/>
@@ -7215,7 +6684,7 @@
       </p:sp>
       <p:sp>
         <p:nvSpPr>
-          <p:cNvPr id="78" name="hero caption"/>
+          <p:cNvPr id="69" name="hero caption"/>
           <p:cNvSpPr txBox="1"/>
           <p:nvPr/>
         </p:nvSpPr>
@@ -7254,7 +6723,7 @@
       </p:sp>
       <p:sp>
         <p:nvSpPr>
-          <p:cNvPr id="79" name="findings"/>
+          <p:cNvPr id="70" name="findings"/>
           <p:cNvSpPr txBox="1"/>
           <p:nvPr/>
         </p:nvSpPr>
@@ -7397,7 +6866,7 @@
       </p:sp>
       <p:sp>
         <p:nvSpPr>
-          <p:cNvPr id="80" name="heading: Limits"/>
+          <p:cNvPr id="71" name="heading: Limits"/>
           <p:cNvSpPr txBox="1"/>
           <p:nvPr/>
         </p:nvSpPr>
@@ -7436,7 +6905,7 @@
       </p:sp>
       <p:cxnSp>
         <p:nvCxnSpPr>
-          <p:cNvPr id="81" name="rule: Limits"/>
+          <p:cNvPr id="72" name="rule: Limits"/>
           <p:cNvCxnSpPr/>
           <p:nvPr/>
         </p:nvCxnSpPr>
@@ -7471,7 +6940,7 @@
       </p:cxnSp>
       <p:sp>
         <p:nvSpPr>
-          <p:cNvPr id="82" name="limits"/>
+          <p:cNvPr id="73" name="limits"/>
           <p:cNvSpPr txBox="1"/>
           <p:nvPr/>
         </p:nvSpPr>
@@ -7560,7 +7029,7 @@
       </p:sp>
       <p:sp>
         <p:nvSpPr>
-          <p:cNvPr id="83" name="heading: Open questions &amp; next steps"/>
+          <p:cNvPr id="74" name="heading: Open questions &amp; next steps"/>
           <p:cNvSpPr txBox="1"/>
           <p:nvPr/>
         </p:nvSpPr>
@@ -7599,7 +7068,7 @@
       </p:sp>
       <p:cxnSp>
         <p:nvCxnSpPr>
-          <p:cNvPr id="84" name="rule: Open questions &amp; next steps"/>
+          <p:cNvPr id="75" name="rule: Open questions &amp; next steps"/>
           <p:cNvCxnSpPr/>
           <p:nvPr/>
         </p:nvCxnSpPr>
@@ -7634,7 +7103,7 @@
       </p:cxnSp>
       <p:sp>
         <p:nvSpPr>
-          <p:cNvPr id="85" name="open questions"/>
+          <p:cNvPr id="76" name="open questions"/>
           <p:cNvSpPr txBox="1"/>
           <p:nvPr/>
         </p:nvSpPr>
@@ -7672,43 +7141,7 @@
                 </a:solidFill>
                 <a:latin typeface="Arial"/>
               </a:rPr>
-              <a:t>How do multi-sensor foundation models such as CROMA </a:t>
-            </a:r>
-            <a:r>
-              <a:rPr sz="2900" b="0" i="0">
-                <a:solidFill>
-                  <a:srgbClr val="5B6477"/>
-                </a:solidFill>
-                <a:latin typeface="Arial"/>
-              </a:rPr>
-              <a:t>[11]</a:t>
-            </a:r>
-            <a:r>
-              <a:rPr sz="2900" b="0" i="0">
-                <a:solidFill>
-                  <a:srgbClr val="1F2328"/>
-                </a:solidFill>
-                <a:latin typeface="Arial"/>
-              </a:rPr>
-              <a:t> and DOFA </a:t>
-            </a:r>
-            <a:r>
-              <a:rPr sz="2900" b="0" i="0">
-                <a:solidFill>
-                  <a:srgbClr val="5B6477"/>
-                </a:solidFill>
-                <a:latin typeface="Arial"/>
-              </a:rPr>
-              <a:t>[12]</a:t>
-            </a:r>
-            <a:r>
-              <a:rPr sz="2900" b="0" i="0">
-                <a:solidFill>
-                  <a:srgbClr val="1F2328"/>
-                </a:solidFill>
-                <a:latin typeface="Arial"/>
-              </a:rPr>
-              <a:t> fare against single-source checkpoints?</a:t>
+              <a:t>How do geospatial foundation models pretrained jointly on SAR and optical imagery fare against these single-source checkpoints?</a:t>
             </a:r>
           </a:p>
           <a:p>
@@ -7752,7 +7185,7 @@
                 </a:solidFill>
                 <a:latin typeface="Arial"/>
               </a:rPr>
-              <a:t>Why does SARMAE peak at its first evaluation with 28 or fewer scenes?</a:t>
+              <a:t>Would per-arm learning rates or longer early-stopping patience remove the small-budget dips?</a:t>
             </a:r>
           </a:p>
           <a:p>

--- a/docs/poster/poster.pptx
+++ b/docs/poster/poster.pptx
@@ -3343,7 +3343,7 @@
                 </a:solidFill>
                 <a:latin typeface="Arial"/>
               </a:rPr>
-              <a:t>Short answer: not consistently. </a:t>
+              <a:t>Answer: no. </a:t>
             </a:r>
             <a:r>
               <a:rPr sz="3400" b="0" i="0">
@@ -3352,7 +3352,7 @@
                 </a:solidFill>
                 <a:latin typeface="Arial"/>
               </a:rPr>
-              <a:t>With 12 labeled scenes every pretrained encoder beats random initialization, but SAR pretraining beats optical only for the CNN, and only while labels are scarce.</a:t>
+              <a:t>SAR pretraining beats optical in 6 of 16 comparisons and ImageNet in 3 of 16 (ImageNet wins 7); its clearest edge is the CNN with 12–28 labeled scenes.</a:t>
             </a:r>
           </a:p>
         </p:txBody>
@@ -3793,7 +3793,7 @@
       </p:cxnSp>
       <p:pic>
         <p:nvPicPr>
-          <p:cNvPr id="17" name="scene context" descr="scene_context.png"/>
+          <p:cNvPr id="17" name="figure: detection examples" descr="poster_detection_examples.png"/>
           <p:cNvPicPr>
             <a:picLocks noChangeAspect="1"/>
           </p:cNvPicPr>
@@ -3807,8 +3807,8 @@
         </p:blipFill>
         <p:spPr>
           <a:xfrm>
-            <a:off x="1788840" y="14401800"/>
-            <a:ext cx="6800758" cy="3283125"/>
+            <a:off x="1705904" y="14401800"/>
+            <a:ext cx="6966630" cy="4417359"/>
           </a:xfrm>
           <a:prstGeom prst="rect">
             <a:avLst/>
@@ -3817,14 +3817,14 @@
       </p:pic>
       <p:sp>
         <p:nvSpPr>
-          <p:cNvPr id="18" name="scene caption"/>
+          <p:cNvPr id="18" name="detection caption"/>
           <p:cNvSpPr txBox="1"/>
           <p:nvPr/>
         </p:nvSpPr>
         <p:spPr>
           <a:xfrm>
-            <a:off x="1042416" y="17776365"/>
-            <a:ext cx="8293608" cy="548640"/>
+            <a:off x="1042416" y="18910599"/>
+            <a:ext cx="8293608" cy="731520"/>
           </a:xfrm>
           <a:prstGeom prst="rect">
             <a:avLst/>
@@ -3849,7 +3849,7 @@
                 </a:solidFill>
                 <a:latin typeface="Arial"/>
               </a:rPr>
-              <a:t>One Sentinel-1 scene (about 300 × 220 km) and one 800-pixel chip (8 × 8 km).</a:t>
+              <a:t>Best cell (ImageNet CNN, 111 scenes) on two 8 × 8 km verified crops: offshore it finds almost every vessel; in this harbor, none.</a:t>
             </a:r>
           </a:p>
         </p:txBody>
@@ -3862,8 +3862,8 @@
         </p:nvSpPr>
         <p:spPr>
           <a:xfrm>
-            <a:off x="1042416" y="18553605"/>
-            <a:ext cx="8293608" cy="5220795"/>
+            <a:off x="1042416" y="19779279"/>
+            <a:ext cx="8293608" cy="5823921"/>
           </a:xfrm>
           <a:prstGeom prst="rect">
             <a:avLst/>
@@ -3912,7 +3912,25 @@
                 </a:solidFill>
                 <a:latin typeface="Arial"/>
               </a:rPr>
-              <a:t>.</a:t>
+              <a:t>. Nested budgets: </a:t>
+            </a:r>
+            <a:r>
+              <a:rPr sz="2900" b="1" i="0">
+                <a:solidFill>
+                  <a:srgbClr val="1F2328"/>
+                </a:solidFill>
+                <a:latin typeface="Arial"/>
+              </a:rPr>
+              <a:t>12 ⊂ 28 ⊂ 56 ⊂ 111</a:t>
+            </a:r>
+            <a:r>
+              <a:rPr sz="2900" b="0" i="0">
+                <a:solidFill>
+                  <a:srgbClr val="1F2328"/>
+                </a:solidFill>
+                <a:latin typeface="Arial"/>
+              </a:rPr>
+              <a:t> training scenes.</a:t>
             </a:r>
           </a:p>
           <a:p>
@@ -3928,31 +3946,40 @@
               <a:buChar char="■"/>
             </a:pPr>
             <a:r>
+              <a:rPr sz="2900" b="1" i="0">
+                <a:solidFill>
+                  <a:srgbClr val="1F2328"/>
+                </a:solidFill>
+                <a:latin typeface="Arial"/>
+              </a:rPr>
+              <a:t>Train, dev and test labels are machine-made:</a:t>
+            </a:r>
+            <a:r>
               <a:rPr sz="2900" b="0" i="0">
                 <a:solidFill>
                   <a:srgbClr val="1F2328"/>
                 </a:solidFill>
                 <a:latin typeface="Arial"/>
               </a:rPr>
-              <a:t>Nested budgets: </a:t>
-            </a:r>
-            <a:r>
-              <a:rPr sz="2900" b="1" i="0">
-                <a:solidFill>
-                  <a:srgbClr val="1F2328"/>
-                </a:solidFill>
-                <a:latin typeface="Arial"/>
-              </a:rPr>
-              <a:t>12 ⊂ 28 ⊂ 56 ⊂ 111</a:t>
+              <a:t> AIS matching plus automated detection </a:t>
             </a:r>
             <a:r>
               <a:rPr sz="2900" b="0" i="0">
                 <a:solidFill>
-                  <a:srgbClr val="1F2328"/>
-                </a:solidFill>
-                <a:latin typeface="Arial"/>
-              </a:rPr>
-              <a:t> training scenes (10, 25, 50, 100%).</a:t>
+                  <a:srgbClr val="5B6477"/>
+                </a:solidFill>
+                <a:latin typeface="Arial"/>
+              </a:rPr>
+              <a:t>[1]</a:t>
+            </a:r>
+            <a:r>
+              <a:rPr sz="2900" b="0" i="0">
+                <a:solidFill>
+                  <a:srgbClr val="1F2328"/>
+                </a:solidFill>
+                <a:latin typeface="Arial"/>
+              </a:rPr>
+              <a:t>. They miss vessels and are not complete ground truth.</a:t>
             </a:r>
           </a:p>
           <a:p>
@@ -3986,28 +4013,6 @@
               <a:t>, opened once after test scoring: 8,642 vessels, 3,644 dark, 2,686 within 2 km of shore.</a:t>
             </a:r>
           </a:p>
-          <a:p>
-            <a:pPr algn="l" marL="347472" indent="-347472">
-              <a:spcAft>
-                <a:spcPts val="800"/>
-              </a:spcAft>
-              <a:buSzPct val="70000"/>
-              <a:buClr>
-                <a:srgbClr val="14213D"/>
-              </a:buClr>
-              <a:buFont typeface="Arial"/>
-              <a:buChar char="■"/>
-            </a:pPr>
-            <a:r>
-              <a:rPr sz="2900" b="0" i="0">
-                <a:solidFill>
-                  <a:srgbClr val="1F2328"/>
-                </a:solidFill>
-                <a:latin typeface="Arial"/>
-              </a:rPr>
-              <a:t>Input [VH, VV, VH−VV] in dB, 10 m pixels.</a:t>
-            </a:r>
-          </a:p>
         </p:txBody>
       </p:sp>
       <p:sp>
@@ -4018,7 +4023,7 @@
         </p:nvSpPr>
         <p:spPr>
           <a:xfrm>
-            <a:off x="786384" y="23838408"/>
+            <a:off x="786384" y="25694640"/>
             <a:ext cx="8805672" cy="685800"/>
           </a:xfrm>
           <a:prstGeom prst="rect">
@@ -4057,7 +4062,7 @@
         </p:nvCxnSpPr>
         <p:spPr>
           <a:xfrm>
-            <a:off x="786384" y="24615648"/>
+            <a:off x="786384" y="26471880"/>
             <a:ext cx="8805672" cy="0"/>
           </a:xfrm>
           <a:prstGeom prst="line">
@@ -4092,8 +4097,8 @@
         </p:nvSpPr>
         <p:spPr>
           <a:xfrm>
-            <a:off x="1042416" y="24889968"/>
-            <a:ext cx="8293608" cy="6748271"/>
+            <a:off x="1042416" y="26746200"/>
+            <a:ext cx="8293608" cy="4892039"/>
           </a:xfrm>
           <a:prstGeom prst="rect">
             <a:avLst/>
@@ -5765,13 +5770,13 @@
       </p:sp>
       <p:sp>
         <p:nvSpPr>
-          <p:cNvPr id="45" name="heading: Why SARMAE dips at 28 scenes"/>
+          <p:cNvPr id="45" name="heading: Recall falls toward the coast"/>
           <p:cNvSpPr txBox="1"/>
           <p:nvPr/>
         </p:nvSpPr>
         <p:spPr>
           <a:xfrm>
-            <a:off x="10241280" y="24167592"/>
+            <a:off x="10241280" y="24140160"/>
             <a:ext cx="8805672" cy="685800"/>
           </a:xfrm>
           <a:prstGeom prst="rect">
@@ -5797,20 +5802,20 @@
                 </a:solidFill>
                 <a:latin typeface="Arial"/>
               </a:rPr>
-              <a:t>Why SARMAE dips at 28 scenes</a:t>
+              <a:t>Recall falls toward the coast</a:t>
             </a:r>
           </a:p>
         </p:txBody>
       </p:sp>
       <p:cxnSp>
         <p:nvCxnSpPr>
-          <p:cNvPr id="46" name="rule: Why SARMAE dips at 28 scenes"/>
+          <p:cNvPr id="46" name="rule: Recall falls toward the coast"/>
           <p:cNvCxnSpPr/>
           <p:nvPr/>
         </p:nvCxnSpPr>
         <p:spPr>
           <a:xfrm>
-            <a:off x="10241280" y="24944832"/>
+            <a:off x="10241280" y="24917400"/>
             <a:ext cx="8805672" cy="0"/>
           </a:xfrm>
           <a:prstGeom prst="line">
@@ -5839,7 +5844,7 @@
       </p:cxnSp>
       <p:pic>
         <p:nvPicPr>
-          <p:cNvPr id="47" name="figure: SARMAE dynamics" descr="poster_sarmae_dynamics.png"/>
+          <p:cNvPr id="47" name="figure: recall by distance to shore" descr="poster_recall_by_distance.png"/>
           <p:cNvPicPr>
             <a:picLocks noChangeAspect="1"/>
           </p:cNvPicPr>
@@ -5853,8 +5858,8 @@
         </p:blipFill>
         <p:spPr>
           <a:xfrm>
-            <a:off x="10588751" y="25219152"/>
-            <a:ext cx="8110728" cy="4497713"/>
+            <a:off x="10588751" y="25191720"/>
+            <a:ext cx="8110728" cy="5394159"/>
           </a:xfrm>
           <a:prstGeom prst="rect">
             <a:avLst/>
@@ -5863,14 +5868,14 @@
       </p:pic>
       <p:sp>
         <p:nvSpPr>
-          <p:cNvPr id="48" name="SARMAE caption"/>
+          <p:cNvPr id="48" name="recall caption"/>
           <p:cNvSpPr txBox="1"/>
           <p:nvPr/>
         </p:nvSpPr>
         <p:spPr>
           <a:xfrm>
-            <a:off x="10497311" y="29826593"/>
-            <a:ext cx="8293608" cy="1811647"/>
+            <a:off x="10497311" y="30695607"/>
+            <a:ext cx="8293608" cy="942633"/>
           </a:xfrm>
           <a:prstGeom prst="rect">
             <a:avLst/>
@@ -5895,7 +5900,7 @@
                 </a:solidFill>
                 <a:latin typeface="Arial"/>
               </a:rPr>
-              <a:t>At 28 scenes SARMAE peaks as warm-up ends, then overfits (training loss 0.482 → 0.034; dev precision 0.858 → 0.768). Early stopping keeps the epoch-4 checkpoint.</a:t>
+              <a:t>50 verified scenes; the band spans all 32 cells. Best-cell recall: 0.676 beyond 10 km, 0.005 within 1 km.</a:t>
             </a:r>
           </a:p>
         </p:txBody>
@@ -6144,7 +6149,7 @@
         <p:spPr>
           <a:xfrm>
             <a:off x="19943064" y="25445594"/>
-            <a:ext cx="13450824" cy="914400"/>
+            <a:ext cx="13450824" cy="1463040"/>
           </a:xfrm>
           <a:prstGeom prst="rect">
             <a:avLst/>
@@ -6163,26 +6168,35 @@
               </a:spcAft>
             </a:pPr>
             <a:r>
+              <a:rPr sz="2000" b="1" i="0">
+                <a:solidFill>
+                  <a:srgbClr val="1F2328"/>
+                </a:solidFill>
+                <a:latin typeface="Arial"/>
+              </a:rPr>
+              <a:t>How to read: </a:t>
+            </a:r>
+            <a:r>
               <a:rPr sz="2000" b="0" i="0">
                 <a:solidFill>
                   <a:srgbClr val="1F2328"/>
                 </a:solidFill>
                 <a:latin typeface="Arial"/>
               </a:rPr>
-              <a:t>Bars: 95% intervals from 10,000 paired scene resamples. They cover scene sampling only: retraining 28 unchanged cells moved test F1 by up to 0.043.</a:t>
-            </a:r>
-          </a:p>
-        </p:txBody>
-      </p:sp>
-      <p:sp>
-        <p:nvSpPr>
-          <p:cNvPr id="57" name="heading: The verified scenes expose a coastal label gap"/>
+              <a:t>each point is SAR F1 minus optical F1 at one label budget. Above 0, SAR wins; below 0, optical wins. Solid: test scenes; dotted: verified scenes. A bar that does not cross 0 is a win; the 16 points here are the comparisons counted in the answer above. Bars are 95% intervals from 10,000 paired scene resamples and cover scene sampling only: retraining 28 unchanged cells moved test F1 by up to 0.043.</a:t>
+            </a:r>
+          </a:p>
+        </p:txBody>
+      </p:sp>
+      <p:sp>
+        <p:nvSpPr>
+          <p:cNvPr id="57" name="heading: Near shore, every detector fails"/>
           <p:cNvSpPr txBox="1"/>
           <p:nvPr/>
         </p:nvSpPr>
         <p:spPr>
           <a:xfrm>
-            <a:off x="19687032" y="27038808"/>
+            <a:off x="19687032" y="27669744"/>
             <a:ext cx="13962888" cy="685800"/>
           </a:xfrm>
           <a:prstGeom prst="rect">
@@ -6208,20 +6222,20 @@
                 </a:solidFill>
                 <a:latin typeface="Arial"/>
               </a:rPr>
-              <a:t>The verified scenes expose a coastal label gap</a:t>
+              <a:t>Near shore, every detector fails</a:t>
             </a:r>
           </a:p>
         </p:txBody>
       </p:sp>
       <p:cxnSp>
         <p:nvCxnSpPr>
-          <p:cNvPr id="58" name="rule: The verified scenes expose a coastal label gap"/>
+          <p:cNvPr id="58" name="rule: Near shore, every detector fails"/>
           <p:cNvCxnSpPr/>
           <p:nvPr/>
         </p:nvCxnSpPr>
         <p:spPr>
           <a:xfrm>
-            <a:off x="19687032" y="27816048"/>
+            <a:off x="19687032" y="28446984"/>
             <a:ext cx="13962888" cy="0"/>
           </a:xfrm>
           <a:prstGeom prst="line">
@@ -6256,7 +6270,7 @@
         </p:nvSpPr>
         <p:spPr>
           <a:xfrm>
-            <a:off x="19943064" y="27998928"/>
+            <a:off x="19943064" y="28629864"/>
             <a:ext cx="4483608" cy="822960"/>
           </a:xfrm>
           <a:prstGeom prst="rect">
@@ -6282,7 +6296,7 @@
                 </a:solidFill>
                 <a:latin typeface="Arial"/>
               </a:rPr>
-              <a:t>0.4% → 31%</a:t>
+              <a:t>0.026 vs 0.724</a:t>
             </a:r>
           </a:p>
         </p:txBody>
@@ -6295,7 +6309,7 @@
         </p:nvSpPr>
         <p:spPr>
           <a:xfrm>
-            <a:off x="19943064" y="28867608"/>
+            <a:off x="19943064" y="29498544"/>
             <a:ext cx="4483608" cy="777240"/>
           </a:xfrm>
           <a:prstGeom prst="rect">
@@ -6321,7 +6335,7 @@
                 </a:solidFill>
                 <a:latin typeface="Arial"/>
               </a:rPr>
-              <a:t>vessels within 2 km of shore:</a:t>
+              <a:t>best cell's verified F1:</a:t>
             </a:r>
           </a:p>
           <a:p>
@@ -6337,7 +6351,7 @@
                 </a:solidFill>
                 <a:latin typeface="Arial"/>
               </a:rPr>
-              <a:t>training labels → verified scenes</a:t>
+              <a:t>within 2 km vs offshore</a:t>
             </a:r>
           </a:p>
         </p:txBody>
@@ -6350,7 +6364,7 @@
         </p:nvSpPr>
         <p:spPr>
           <a:xfrm>
-            <a:off x="24426672" y="27998928"/>
+            <a:off x="24426672" y="28629864"/>
             <a:ext cx="4483608" cy="822960"/>
           </a:xfrm>
           <a:prstGeom prst="rect">
@@ -6376,7 +6390,7 @@
                 </a:solidFill>
                 <a:latin typeface="Arial"/>
               </a:rPr>
-              <a:t>34 / 4,302</a:t>
+              <a:t>≤ 0.021</a:t>
             </a:r>
           </a:p>
         </p:txBody>
@@ -6389,7 +6403,7 @@
         </p:nvSpPr>
         <p:spPr>
           <a:xfrm>
-            <a:off x="24426672" y="28867608"/>
+            <a:off x="24426672" y="29498544"/>
             <a:ext cx="4483608" cy="777240"/>
           </a:xfrm>
           <a:prstGeom prst="rect">
@@ -6415,7 +6429,7 @@
                 </a:solidFill>
                 <a:latin typeface="Arial"/>
               </a:rPr>
-              <a:t>best cell's predictions</a:t>
+              <a:t>near-shore recall,</a:t>
             </a:r>
           </a:p>
           <a:p>
@@ -6431,7 +6445,7 @@
                 </a:solidFill>
                 <a:latin typeface="Arial"/>
               </a:rPr>
-              <a:t>within 2 km of shore</a:t>
+              <a:t>every cell</a:t>
             </a:r>
           </a:p>
         </p:txBody>
@@ -6444,7 +6458,7 @@
         </p:nvSpPr>
         <p:spPr>
           <a:xfrm>
-            <a:off x="28910280" y="27998928"/>
+            <a:off x="28910280" y="28629864"/>
             <a:ext cx="4483608" cy="822960"/>
           </a:xfrm>
           <a:prstGeom prst="rect">
@@ -6470,7 +6484,7 @@
                 </a:solidFill>
                 <a:latin typeface="Arial"/>
               </a:rPr>
-              <a:t>0.724</a:t>
+              <a:t>0.4% vs 31%</a:t>
             </a:r>
           </a:p>
         </p:txBody>
@@ -6483,7 +6497,7 @@
         </p:nvSpPr>
         <p:spPr>
           <a:xfrm>
-            <a:off x="28910280" y="28867608"/>
+            <a:off x="28910280" y="29498544"/>
             <a:ext cx="4483608" cy="777240"/>
           </a:xfrm>
           <a:prstGeom prst="rect">
@@ -6509,7 +6523,7 @@
                 </a:solidFill>
                 <a:latin typeface="Arial"/>
               </a:rPr>
-              <a:t>best cell's offshore verified F1</a:t>
+              <a:t>vessels within 2 km of shore:</a:t>
             </a:r>
           </a:p>
           <a:p>
@@ -6525,7 +6539,7 @@
                 </a:solidFill>
                 <a:latin typeface="Arial"/>
               </a:rPr>
-              <a:t>(0.574 overall)</a:t>
+              <a:t>training vs verified labels</a:t>
             </a:r>
           </a:p>
         </p:txBody>
@@ -6538,7 +6552,7 @@
         </p:nvSpPr>
         <p:spPr>
           <a:xfrm>
-            <a:off x="19943064" y="29782008"/>
+            <a:off x="19943064" y="30412944"/>
             <a:ext cx="13450824" cy="822960"/>
           </a:xfrm>
           <a:prstGeom prst="rect">
@@ -6564,7 +6578,7 @@
                 </a:solidFill>
                 <a:latin typeface="Arial"/>
               </a:rPr>
-              <a:t>Every cell reaches at most 0.021 near-shore recall and 0.228 dark-vessel recall, while precision stays at 0.639–0.909: the detectors learned to stay silent near shore.</a:t>
+              <a:t>The machine-made training labels place almost no vessels near shore, and the detectors almost never fire there: the best cell puts 34 of its 4,302 predictions within 2 km. Precision stays at 0.639–0.909 in every cell.</a:t>
             </a:r>
           </a:p>
         </p:txBody>
@@ -6730,7 +6744,7 @@
         <p:spPr>
           <a:xfrm>
             <a:off x="34555176" y="9994392"/>
-            <a:ext cx="8293608" cy="8567928"/>
+            <a:ext cx="8293608" cy="9025128"/>
           </a:xfrm>
           <a:prstGeom prst="rect">
             <a:avLst/>
@@ -6790,7 +6804,7 @@
                 </a:solidFill>
                 <a:latin typeface="Arial"/>
               </a:rPr>
-              <a:t>SAR beats optical only for the CNN, and only with few labels:</a:t>
+              <a:t>SAR's edge over optical depends on backbone and budget.</a:t>
             </a:r>
             <a:r>
               <a:rPr sz="2900" b="0" i="0">
@@ -6799,7 +6813,7 @@
                 </a:solidFill>
                 <a:latin typeface="Arial"/>
               </a:rPr>
-              <a:t> +0.080 [+0.036, +0.121] test F1 at 12 scenes, but −0.073 [−0.101, −0.046] verified F1 at 111. ViT: no stable order.</a:t>
+              <a:t> CNN: +0.080 [+0.036, +0.121] test F1 at 12 scenes, but −0.073 [−0.101, −0.046] verified F1 at 111. ViT: the order flips between 28 and 56 scenes.</a:t>
             </a:r>
           </a:p>
           <a:p>
@@ -6850,7 +6864,7 @@
                 </a:solidFill>
                 <a:latin typeface="Arial"/>
               </a:rPr>
-              <a:t>The coastal gap is a label gap.</a:t>
+              <a:t>No detector works near shore:</a:t>
             </a:r>
             <a:r>
               <a:rPr sz="2900" b="0" i="0">
@@ -6859,7 +6873,7 @@
                 </a:solidFill>
                 <a:latin typeface="Arial"/>
               </a:rPr>
-              <a:t> Only 0.4% of training vessels lie within 2 km of shore, against 31% of verified ones.</a:t>
+              <a:t> recall ≤ 0.021 within 2 km in every cell. Training labels put 0.4% of vessels there; the verified set, 31%.</a:t>
             </a:r>
           </a:p>
         </p:txBody>
@@ -6872,7 +6886,7 @@
         </p:nvSpPr>
         <p:spPr>
           <a:xfrm>
-            <a:off x="34299144" y="18617184"/>
+            <a:off x="34299144" y="19056096"/>
             <a:ext cx="8805672" cy="685800"/>
           </a:xfrm>
           <a:prstGeom prst="rect">
@@ -6911,7 +6925,7 @@
         </p:nvCxnSpPr>
         <p:spPr>
           <a:xfrm>
-            <a:off x="34299144" y="19394424"/>
+            <a:off x="34299144" y="19833336"/>
             <a:ext cx="8805672" cy="0"/>
           </a:xfrm>
           <a:prstGeom prst="line">
@@ -6946,8 +6960,8 @@
         </p:nvSpPr>
         <p:spPr>
           <a:xfrm>
-            <a:off x="34555176" y="19668744"/>
-            <a:ext cx="8293608" cy="3922775"/>
+            <a:off x="34555176" y="20107656"/>
+            <a:ext cx="8293608" cy="6044183"/>
           </a:xfrm>
           <a:prstGeom prst="rect">
             <a:avLst/>
@@ -7000,7 +7014,7 @@
                 </a:solidFill>
                 <a:latin typeface="Arial"/>
               </a:rPr>
-              <a:t>Monotonicity gate failed: two SAR test curves drop by more than 0.02 as labels grow.</a:t>
+              <a:t>Dev and test labels are machine-made, so test F1 measures agreement with them, not with every vessel.</a:t>
             </a:r>
           </a:p>
           <a:p>
@@ -7022,106 +7036,9 @@
                 </a:solidFill>
                 <a:latin typeface="Arial"/>
               </a:rPr>
-              <a:t>Checkpoints differ in objective and corpus, not only domain.</a:t>
-            </a:r>
-          </a:p>
-        </p:txBody>
-      </p:sp>
-      <p:sp>
-        <p:nvSpPr>
-          <p:cNvPr id="74" name="heading: Open questions &amp; next steps"/>
-          <p:cNvSpPr txBox="1"/>
-          <p:nvPr/>
-        </p:nvSpPr>
-        <p:spPr>
-          <a:xfrm>
-            <a:off x="34299144" y="23792688"/>
-            <a:ext cx="8805672" cy="685800"/>
-          </a:xfrm>
-          <a:prstGeom prst="rect">
-            <a:avLst/>
-          </a:prstGeom>
-          <a:noFill/>
-        </p:spPr>
-        <p:txBody>
-          <a:bodyPr wrap="square" anchor="b" lIns="0" rIns="0" tIns="0" bIns="0">
-            <a:spAutoFit/>
-          </a:bodyPr>
-          <a:lstStyle/>
-          <a:p>
-            <a:pPr algn="ctr">
-              <a:spcAft>
-                <a:spcPts val="0"/>
-              </a:spcAft>
-            </a:pPr>
-            <a:r>
-              <a:rPr sz="4200" b="1" i="0">
-                <a:solidFill>
-                  <a:srgbClr val="14213D"/>
-                </a:solidFill>
-                <a:latin typeface="Arial"/>
-              </a:rPr>
-              <a:t>Open questions &amp; next steps</a:t>
-            </a:r>
-          </a:p>
-        </p:txBody>
-      </p:sp>
-      <p:cxnSp>
-        <p:nvCxnSpPr>
-          <p:cNvPr id="75" name="rule: Open questions &amp; next steps"/>
-          <p:cNvCxnSpPr/>
-          <p:nvPr/>
-        </p:nvCxnSpPr>
-        <p:spPr>
-          <a:xfrm>
-            <a:off x="34299144" y="24569928"/>
-            <a:ext cx="8805672" cy="0"/>
-          </a:xfrm>
-          <a:prstGeom prst="line">
-            <a:avLst/>
-          </a:prstGeom>
-          <a:ln w="57150">
-            <a:solidFill>
-              <a:srgbClr val="B8BEC8"/>
-            </a:solidFill>
-          </a:ln>
-        </p:spPr>
-        <p:style>
-          <a:lnRef idx="2">
-            <a:schemeClr val="accent1"/>
-          </a:lnRef>
-          <a:fillRef idx="0">
-            <a:schemeClr val="accent1"/>
-          </a:fillRef>
-          <a:effectRef idx="1">
-            <a:schemeClr val="accent1"/>
-          </a:effectRef>
-          <a:fontRef idx="minor">
-            <a:schemeClr val="tx1"/>
-          </a:fontRef>
-        </p:style>
-      </p:cxnSp>
-      <p:sp>
-        <p:nvSpPr>
-          <p:cNvPr id="76" name="open questions"/>
-          <p:cNvSpPr txBox="1"/>
-          <p:nvPr/>
-        </p:nvSpPr>
-        <p:spPr>
-          <a:xfrm>
-            <a:off x="34555176" y="24844248"/>
-            <a:ext cx="8293608" cy="6793992"/>
-          </a:xfrm>
-          <a:prstGeom prst="rect">
-            <a:avLst/>
-          </a:prstGeom>
-          <a:noFill/>
-        </p:spPr>
-        <p:txBody>
-          <a:bodyPr wrap="square" anchor="t" lIns="0" rIns="0" tIns="0" bIns="0">
-            <a:spAutoFit/>
-          </a:bodyPr>
-          <a:lstStyle/>
+              <a:t>Two SAR test curves drop by more than 0.02 as labels grow. ViT-SAR at 28 scenes overfit after warm-up; early stopping kept epoch 4.</a:t>
+            </a:r>
+          </a:p>
           <a:p>
             <a:pPr algn="l" marL="347472" indent="-347472">
               <a:spcAft>
@@ -7141,9 +7058,106 @@
                 </a:solidFill>
                 <a:latin typeface="Arial"/>
               </a:rPr>
-              <a:t>How do geospatial foundation models pretrained jointly on SAR and optical imagery fare against these single-source checkpoints?</a:t>
-            </a:r>
-          </a:p>
+              <a:t>Checkpoints differ in objective and corpus, not only domain.</a:t>
+            </a:r>
+          </a:p>
+        </p:txBody>
+      </p:sp>
+      <p:sp>
+        <p:nvSpPr>
+          <p:cNvPr id="74" name="heading: Open questions &amp; next steps"/>
+          <p:cNvSpPr txBox="1"/>
+          <p:nvPr/>
+        </p:nvSpPr>
+        <p:spPr>
+          <a:xfrm>
+            <a:off x="34299144" y="26289000"/>
+            <a:ext cx="8805672" cy="685800"/>
+          </a:xfrm>
+          <a:prstGeom prst="rect">
+            <a:avLst/>
+          </a:prstGeom>
+          <a:noFill/>
+        </p:spPr>
+        <p:txBody>
+          <a:bodyPr wrap="square" anchor="b" lIns="0" rIns="0" tIns="0" bIns="0">
+            <a:spAutoFit/>
+          </a:bodyPr>
+          <a:lstStyle/>
+          <a:p>
+            <a:pPr algn="ctr">
+              <a:spcAft>
+                <a:spcPts val="0"/>
+              </a:spcAft>
+            </a:pPr>
+            <a:r>
+              <a:rPr sz="4200" b="1" i="0">
+                <a:solidFill>
+                  <a:srgbClr val="14213D"/>
+                </a:solidFill>
+                <a:latin typeface="Arial"/>
+              </a:rPr>
+              <a:t>Open questions &amp; next steps</a:t>
+            </a:r>
+          </a:p>
+        </p:txBody>
+      </p:sp>
+      <p:cxnSp>
+        <p:nvCxnSpPr>
+          <p:cNvPr id="75" name="rule: Open questions &amp; next steps"/>
+          <p:cNvCxnSpPr/>
+          <p:nvPr/>
+        </p:nvCxnSpPr>
+        <p:spPr>
+          <a:xfrm>
+            <a:off x="34299144" y="27066240"/>
+            <a:ext cx="8805672" cy="0"/>
+          </a:xfrm>
+          <a:prstGeom prst="line">
+            <a:avLst/>
+          </a:prstGeom>
+          <a:ln w="57150">
+            <a:solidFill>
+              <a:srgbClr val="B8BEC8"/>
+            </a:solidFill>
+          </a:ln>
+        </p:spPr>
+        <p:style>
+          <a:lnRef idx="2">
+            <a:schemeClr val="accent1"/>
+          </a:lnRef>
+          <a:fillRef idx="0">
+            <a:schemeClr val="accent1"/>
+          </a:fillRef>
+          <a:effectRef idx="1">
+            <a:schemeClr val="accent1"/>
+          </a:effectRef>
+          <a:fontRef idx="minor">
+            <a:schemeClr val="tx1"/>
+          </a:fontRef>
+        </p:style>
+      </p:cxnSp>
+      <p:sp>
+        <p:nvSpPr>
+          <p:cNvPr id="76" name="open questions"/>
+          <p:cNvSpPr txBox="1"/>
+          <p:nvPr/>
+        </p:nvSpPr>
+        <p:spPr>
+          <a:xfrm>
+            <a:off x="34555176" y="27340560"/>
+            <a:ext cx="8293608" cy="4297679"/>
+          </a:xfrm>
+          <a:prstGeom prst="rect">
+            <a:avLst/>
+          </a:prstGeom>
+          <a:noFill/>
+        </p:spPr>
+        <p:txBody>
+          <a:bodyPr wrap="square" anchor="t" lIns="0" rIns="0" tIns="0" bIns="0">
+            <a:spAutoFit/>
+          </a:bodyPr>
+          <a:lstStyle/>
           <a:p>
             <a:pPr algn="l" marL="347472" indent="-347472">
               <a:spcAft>
@@ -7163,7 +7177,7 @@
                 </a:solidFill>
                 <a:latin typeface="Arial"/>
               </a:rPr>
-              <a:t>Does SAR pretraining help where optical cannot: near shore and for small dark vessels?</a:t>
+              <a:t>How do geospatial foundation models pretrained jointly on SAR and optical imagery fare against these single-source checkpoints?</a:t>
             </a:r>
           </a:p>
           <a:p>
@@ -7185,7 +7199,7 @@
                 </a:solidFill>
                 <a:latin typeface="Arial"/>
               </a:rPr>
-              <a:t>Would per-arm learning rates or longer early-stopping patience remove the small-budget dips?</a:t>
+              <a:t>Does SAR pretraining help where optical cannot: near shore and for small dark vessels?</a:t>
             </a:r>
           </a:p>
           <a:p>

--- a/docs/poster/poster.pptx
+++ b/docs/poster/poster.pptx
@@ -3793,7 +3793,7 @@
       </p:cxnSp>
       <p:pic>
         <p:nvPicPr>
-          <p:cNvPr id="17" name="figure: detection examples" descr="poster_detection_examples.png"/>
+          <p:cNvPr id="17" name="figure: scene and chip" descr="poster_scene_context.png"/>
           <p:cNvPicPr>
             <a:picLocks noChangeAspect="1"/>
           </p:cNvPicPr>
@@ -3807,8 +3807,8 @@
         </p:blipFill>
         <p:spPr>
           <a:xfrm>
-            <a:off x="1705904" y="14401800"/>
-            <a:ext cx="6966630" cy="4417359"/>
+            <a:off x="1042416" y="14401800"/>
+            <a:ext cx="8293608" cy="3610227"/>
           </a:xfrm>
           <a:prstGeom prst="rect">
             <a:avLst/>
@@ -3817,53 +3817,14 @@
       </p:pic>
       <p:sp>
         <p:nvSpPr>
-          <p:cNvPr id="18" name="detection caption"/>
+          <p:cNvPr id="18" name="data bullets"/>
           <p:cNvSpPr txBox="1"/>
           <p:nvPr/>
         </p:nvSpPr>
         <p:spPr>
           <a:xfrm>
-            <a:off x="1042416" y="18910599"/>
-            <a:ext cx="8293608" cy="731520"/>
-          </a:xfrm>
-          <a:prstGeom prst="rect">
-            <a:avLst/>
-          </a:prstGeom>
-          <a:noFill/>
-        </p:spPr>
-        <p:txBody>
-          <a:bodyPr wrap="square" anchor="t" lIns="0" rIns="0" tIns="0" bIns="0">
-            <a:spAutoFit/>
-          </a:bodyPr>
-          <a:lstStyle/>
-          <a:p>
-            <a:pPr algn="ctr">
-              <a:spcAft>
-                <a:spcPts val="800"/>
-              </a:spcAft>
-            </a:pPr>
-            <a:r>
-              <a:rPr sz="2000" b="0" i="0">
-                <a:solidFill>
-                  <a:srgbClr val="1F2328"/>
-                </a:solidFill>
-                <a:latin typeface="Arial"/>
-              </a:rPr>
-              <a:t>Best cell (ImageNet CNN, 111 scenes) on two 8 × 8 km verified crops: offshore it finds almost every vessel; in this harbor, none.</a:t>
-            </a:r>
-          </a:p>
-        </p:txBody>
-      </p:sp>
-      <p:sp>
-        <p:nvSpPr>
-          <p:cNvPr id="19" name="data bullets"/>
-          <p:cNvSpPr txBox="1"/>
-          <p:nvPr/>
-        </p:nvSpPr>
-        <p:spPr>
-          <a:xfrm>
-            <a:off x="1042416" y="19779279"/>
-            <a:ext cx="8293608" cy="5823921"/>
+            <a:off x="1042416" y="18286347"/>
+            <a:ext cx="8293608" cy="5762373"/>
           </a:xfrm>
           <a:prstGeom prst="rect">
             <a:avLst/>
@@ -4017,13 +3978,13 @@
       </p:sp>
       <p:sp>
         <p:nvSpPr>
-          <p:cNvPr id="20" name="heading: References"/>
+          <p:cNvPr id="19" name="heading: What the best detector finds"/>
           <p:cNvSpPr txBox="1"/>
           <p:nvPr/>
         </p:nvSpPr>
         <p:spPr>
           <a:xfrm>
-            <a:off x="786384" y="25694640"/>
+            <a:off x="786384" y="24195024"/>
             <a:ext cx="8805672" cy="685800"/>
           </a:xfrm>
           <a:prstGeom prst="rect">
@@ -4049,20 +4010,20 @@
                 </a:solidFill>
                 <a:latin typeface="Arial"/>
               </a:rPr>
-              <a:t>References</a:t>
+              <a:t>What the best detector finds</a:t>
             </a:r>
           </a:p>
         </p:txBody>
       </p:sp>
       <p:cxnSp>
         <p:nvCxnSpPr>
-          <p:cNvPr id="21" name="rule: References"/>
+          <p:cNvPr id="20" name="rule: What the best detector finds"/>
           <p:cNvCxnSpPr/>
           <p:nvPr/>
         </p:nvCxnSpPr>
         <p:spPr>
           <a:xfrm>
-            <a:off x="786384" y="26471880"/>
+            <a:off x="786384" y="24972264"/>
             <a:ext cx="8805672" cy="0"/>
           </a:xfrm>
           <a:prstGeom prst="line">
@@ -4089,16 +4050,40 @@
           </a:fontRef>
         </p:style>
       </p:cxnSp>
-      <p:sp>
-        <p:nvSpPr>
-          <p:cNvPr id="22" name="references"/>
+      <p:pic>
+        <p:nvPicPr>
+          <p:cNvPr id="21" name="figure: detection examples" descr="poster_detection_examples.png"/>
+          <p:cNvPicPr>
+            <a:picLocks noChangeAspect="1"/>
+          </p:cNvPicPr>
+          <p:nvPr/>
+        </p:nvPicPr>
+        <p:blipFill>
+          <a:blip r:embed="rId3"/>
+          <a:stretch>
+            <a:fillRect/>
+          </a:stretch>
+        </p:blipFill>
+        <p:spPr>
+          <a:xfrm>
+            <a:off x="1042416" y="25246584"/>
+            <a:ext cx="8293608" cy="5258762"/>
+          </a:xfrm>
+          <a:prstGeom prst="rect">
+            <a:avLst/>
+          </a:prstGeom>
+        </p:spPr>
+      </p:pic>
+      <p:sp>
+        <p:nvSpPr>
+          <p:cNvPr id="22" name="detection caption"/>
           <p:cNvSpPr txBox="1"/>
           <p:nvPr/>
         </p:nvSpPr>
         <p:spPr>
           <a:xfrm>
-            <a:off x="1042416" y="26746200"/>
-            <a:ext cx="8293608" cy="4892039"/>
+            <a:off x="1042416" y="30596786"/>
+            <a:ext cx="8293608" cy="731520"/>
           </a:xfrm>
           <a:prstGeom prst="rect">
             <a:avLst/>
@@ -4111,253 +4096,19 @@
           </a:bodyPr>
           <a:lstStyle/>
           <a:p>
-            <a:pPr algn="l">
+            <a:pPr algn="ctr">
               <a:spcAft>
-                <a:spcPts val="300"/>
+                <a:spcPts val="800"/>
               </a:spcAft>
             </a:pPr>
             <a:r>
-              <a:rPr sz="1700" b="0" i="0">
-                <a:solidFill>
-                  <a:srgbClr val="5B6477"/>
-                </a:solidFill>
-                <a:latin typeface="Arial"/>
-              </a:rPr>
-              <a:t>[1]  </a:t>
-            </a:r>
-            <a:r>
-              <a:rPr sz="1700" b="0" i="0">
+              <a:rPr sz="2000" b="0" i="0">
                 <a:solidFill>
                   <a:srgbClr val="1F2328"/>
                 </a:solidFill>
                 <a:latin typeface="Arial"/>
               </a:rPr>
-              <a:t>F. S. Paolo et al. xView3-SAR: Detecting dark fishing activity using SAR imagery. NeurIPS 2022.</a:t>
-            </a:r>
-          </a:p>
-          <a:p>
-            <a:pPr algn="l">
-              <a:spcAft>
-                <a:spcPts val="300"/>
-              </a:spcAft>
-            </a:pPr>
-            <a:r>
-              <a:rPr sz="1700" b="0" i="0">
-                <a:solidFill>
-                  <a:srgbClr val="5B6477"/>
-                </a:solidFill>
-                <a:latin typeface="Arial"/>
-              </a:rPr>
-              <a:t>[2]  </a:t>
-            </a:r>
-            <a:r>
-              <a:rPr sz="1700" b="0" i="0">
-                <a:solidFill>
-                  <a:srgbClr val="1F2328"/>
-                </a:solidFill>
-                <a:latin typeface="Arial"/>
-              </a:rPr>
-              <a:t>R. Torres et al. GMES Sentinel-1 mission. Remote Sens. Environ. 2012.</a:t>
-            </a:r>
-          </a:p>
-          <a:p>
-            <a:pPr algn="l">
-              <a:spcAft>
-                <a:spcPts val="300"/>
-              </a:spcAft>
-            </a:pPr>
-            <a:r>
-              <a:rPr sz="1700" b="0" i="0">
-                <a:solidFill>
-                  <a:srgbClr val="5B6477"/>
-                </a:solidFill>
-                <a:latin typeface="Arial"/>
-              </a:rPr>
-              <a:t>[3]  </a:t>
-            </a:r>
-            <a:r>
-              <a:rPr sz="1700" b="0" i="0">
-                <a:solidFill>
-                  <a:srgbClr val="1F2328"/>
-                </a:solidFill>
-                <a:latin typeface="Arial"/>
-              </a:rPr>
-              <a:t>A. Dosovitskiy et al. An image is worth 16×16 words. ICLR 2021.</a:t>
-            </a:r>
-          </a:p>
-          <a:p>
-            <a:pPr algn="l">
-              <a:spcAft>
-                <a:spcPts val="300"/>
-              </a:spcAft>
-            </a:pPr>
-            <a:r>
-              <a:rPr sz="1700" b="0" i="0">
-                <a:solidFill>
-                  <a:srgbClr val="5B6477"/>
-                </a:solidFill>
-                <a:latin typeface="Arial"/>
-              </a:rPr>
-              <a:t>[4]  </a:t>
-            </a:r>
-            <a:r>
-              <a:rPr sz="1700" b="0" i="0">
-                <a:solidFill>
-                  <a:srgbClr val="1F2328"/>
-                </a:solidFill>
-                <a:latin typeface="Arial"/>
-              </a:rPr>
-              <a:t>S. Woo et al. ConvNeXt V2: Co-designing and scaling ConvNets with masked autoencoders. CVPR 2023.</a:t>
-            </a:r>
-          </a:p>
-          <a:p>
-            <a:pPr algn="l">
-              <a:spcAft>
-                <a:spcPts val="300"/>
-              </a:spcAft>
-            </a:pPr>
-            <a:r>
-              <a:rPr sz="1700" b="0" i="0">
-                <a:solidFill>
-                  <a:srgbClr val="5B6477"/>
-                </a:solidFill>
-                <a:latin typeface="Arial"/>
-              </a:rPr>
-              <a:t>[5]  </a:t>
-            </a:r>
-            <a:r>
-              <a:rPr sz="1700" b="0" i="0">
-                <a:solidFill>
-                  <a:srgbClr val="1F2328"/>
-                </a:solidFill>
-                <a:latin typeface="Arial"/>
-              </a:rPr>
-              <a:t>A. Steiner et al. How to train your ViT? TMLR 2022.</a:t>
-            </a:r>
-          </a:p>
-          <a:p>
-            <a:pPr algn="l">
-              <a:spcAft>
-                <a:spcPts val="300"/>
-              </a:spcAft>
-            </a:pPr>
-            <a:r>
-              <a:rPr sz="1700" b="0" i="0">
-                <a:solidFill>
-                  <a:srgbClr val="5B6477"/>
-                </a:solidFill>
-                <a:latin typeface="Arial"/>
-              </a:rPr>
-              <a:t>[6]  </a:t>
-            </a:r>
-            <a:r>
-              <a:rPr sz="1700" b="0" i="0">
-                <a:solidFill>
-                  <a:srgbClr val="1F2328"/>
-                </a:solidFill>
-                <a:latin typeface="Arial"/>
-              </a:rPr>
-              <a:t>J. Straka and I. Gruber. SatDINO: Self-supervised pretraining for remote sensing. arXiv:2508.21402, 2025.</a:t>
-            </a:r>
-          </a:p>
-          <a:p>
-            <a:pPr algn="l">
-              <a:spcAft>
-                <a:spcPts val="300"/>
-              </a:spcAft>
-            </a:pPr>
-            <a:r>
-              <a:rPr sz="1700" b="0" i="0">
-                <a:solidFill>
-                  <a:srgbClr val="5B6477"/>
-                </a:solidFill>
-                <a:latin typeface="Arial"/>
-              </a:rPr>
-              <a:t>[7]  </a:t>
-            </a:r>
-            <a:r>
-              <a:rPr sz="1700" b="0" i="0">
-                <a:solidFill>
-                  <a:srgbClr val="1F2328"/>
-                </a:solidFill>
-                <a:latin typeface="Arial"/>
-              </a:rPr>
-              <a:t>D. Liu et al. SARMAE: Masked autoencoder for SAR representation learning. CVPR 2026.</a:t>
-            </a:r>
-          </a:p>
-          <a:p>
-            <a:pPr algn="l">
-              <a:spcAft>
-                <a:spcPts val="300"/>
-              </a:spcAft>
-            </a:pPr>
-            <a:r>
-              <a:rPr sz="1700" b="0" i="0">
-                <a:solidFill>
-                  <a:srgbClr val="5B6477"/>
-                </a:solidFill>
-                <a:latin typeface="Arial"/>
-              </a:rPr>
-              <a:t>[8]  </a:t>
-            </a:r>
-            <a:r>
-              <a:rPr sz="1700" b="0" i="0">
-                <a:solidFill>
-                  <a:srgbClr val="1F2328"/>
-                </a:solidFill>
-                <a:latin typeface="Arial"/>
-              </a:rPr>
-              <a:t>K. N. Clasen et al. reBEN: Refined BigEarthNet dataset. IGARSS 2025.</a:t>
-            </a:r>
-          </a:p>
-          <a:p>
-            <a:pPr algn="l">
-              <a:spcAft>
-                <a:spcPts val="300"/>
-              </a:spcAft>
-            </a:pPr>
-            <a:r>
-              <a:rPr sz="1700" b="0" i="0">
-                <a:solidFill>
-                  <a:srgbClr val="5B6477"/>
-                </a:solidFill>
-                <a:latin typeface="Arial"/>
-              </a:rPr>
-              <a:t>[9]  </a:t>
-            </a:r>
-            <a:r>
-              <a:rPr sz="1700" b="0" i="0">
-                <a:solidFill>
-                  <a:srgbClr val="1F2328"/>
-                </a:solidFill>
-                <a:latin typeface="Arial"/>
-              </a:rPr>
-              <a:t>X. Zhou, D. Wang, and P. Krähenbühl. Objects as points. arXiv:1904.07850, 2019.</a:t>
-            </a:r>
-          </a:p>
-          <a:p>
-            <a:pPr algn="l">
-              <a:spcAft>
-                <a:spcPts val="300"/>
-              </a:spcAft>
-            </a:pPr>
-            <a:r>
-              <a:rPr sz="1700" b="0" i="0">
-                <a:solidFill>
-                  <a:srgbClr val="5B6477"/>
-                </a:solidFill>
-                <a:latin typeface="Arial"/>
-              </a:rPr>
-              <a:t>[10]  </a:t>
-            </a:r>
-            <a:r>
-              <a:rPr sz="1700" b="0" i="0">
-                <a:solidFill>
-                  <a:srgbClr val="1F2328"/>
-                </a:solidFill>
-                <a:latin typeface="Arial"/>
-              </a:rPr>
-              <a:t>T.-Y. Lin et al. Focal loss for dense object detection. ICCV 2017.</a:t>
+              <a:t>Best cell (ImageNet CNN, 111 scenes) on two 8 × 8 km verified crops (VH, dB): offshore it finds almost every vessel; in this harbor, none.</a:t>
             </a:r>
           </a:p>
         </p:txBody>
@@ -5634,7 +5385,7 @@
         <p:spPr>
           <a:xfrm>
             <a:off x="10497311" y="18873215"/>
-            <a:ext cx="8293608" cy="5175504"/>
+            <a:ext cx="8293608" cy="3712464"/>
           </a:xfrm>
           <a:prstGeom prst="rect">
             <a:avLst/>
@@ -5701,7 +5452,7 @@
                 </a:solidFill>
                 <a:latin typeface="Arial"/>
               </a:rPr>
-              <a:t>; F1 with 200 m geographic matching.</a:t>
+              <a:t>; strict FP32, 567.6 H100 GPU-hours.</a:t>
             </a:r>
           </a:p>
           <a:p>
@@ -5723,7 +5474,7 @@
                 </a:solidFill>
                 <a:latin typeface="Arial"/>
               </a:rPr>
-              <a:t>Same optimizer, schedule, crops, data order and seed (0) for every cell. Strict FP32: 567.6 H100 GPU-hours.</a:t>
+              <a:t>Same optimizer, schedule, data order and seed (0) in every cell.</a:t>
             </a:r>
           </a:p>
           <a:p>
@@ -5763,7 +5514,7 @@
                 </a:solidFill>
                 <a:latin typeface="Arial"/>
               </a:rPr>
-              <a:t>, with no retuning.</a:t>
+              <a:t>.</a:t>
             </a:r>
           </a:p>
         </p:txBody>
@@ -5776,7 +5527,7 @@
         </p:nvSpPr>
         <p:spPr>
           <a:xfrm>
-            <a:off x="10241280" y="24140160"/>
+            <a:off x="10241280" y="22667976"/>
             <a:ext cx="8805672" cy="685800"/>
           </a:xfrm>
           <a:prstGeom prst="rect">
@@ -5815,7 +5566,7 @@
         </p:nvCxnSpPr>
         <p:spPr>
           <a:xfrm>
-            <a:off x="10241280" y="24917400"/>
+            <a:off x="10241280" y="23445216"/>
             <a:ext cx="8805672" cy="0"/>
           </a:xfrm>
           <a:prstGeom prst="line">
@@ -5851,15 +5602,15 @@
           <p:nvPr/>
         </p:nvPicPr>
         <p:blipFill>
-          <a:blip r:embed="rId3"/>
+          <a:blip r:embed="rId4"/>
           <a:stretch>
             <a:fillRect/>
           </a:stretch>
         </p:blipFill>
         <p:spPr>
           <a:xfrm>
-            <a:off x="10588751" y="25191720"/>
-            <a:ext cx="8110728" cy="5394159"/>
+            <a:off x="10588751" y="23719536"/>
+            <a:ext cx="8110728" cy="6920795"/>
           </a:xfrm>
           <a:prstGeom prst="rect">
             <a:avLst/>
@@ -5874,8 +5625,8 @@
         </p:nvSpPr>
         <p:spPr>
           <a:xfrm>
-            <a:off x="10497311" y="30695607"/>
-            <a:ext cx="8293608" cy="942633"/>
+            <a:off x="10497311" y="30750058"/>
+            <a:ext cx="8293608" cy="888181"/>
           </a:xfrm>
           <a:prstGeom prst="rect">
             <a:avLst/>
@@ -5988,7 +5739,7 @@
           <p:nvPr/>
         </p:nvPicPr>
         <p:blipFill>
-          <a:blip r:embed="rId4"/>
+          <a:blip r:embed="rId5"/>
           <a:stretch>
             <a:fillRect/>
           </a:stretch>
@@ -6125,7 +5876,7 @@
           <p:nvPr/>
         </p:nvPicPr>
         <p:blipFill>
-          <a:blip r:embed="rId5"/>
+          <a:blip r:embed="rId6"/>
           <a:stretch>
             <a:fillRect/>
           </a:stretch>

--- a/docs/poster/poster.pptx
+++ b/docs/poster/poster.pptx
@@ -4083,7 +4083,7 @@
         <p:spPr>
           <a:xfrm>
             <a:off x="1042416" y="30596786"/>
-            <a:ext cx="8293608" cy="731520"/>
+            <a:ext cx="8293608" cy="1097280"/>
           </a:xfrm>
           <a:prstGeom prst="rect">
             <a:avLst/>
@@ -4108,7 +4108,7 @@
                 </a:solidFill>
                 <a:latin typeface="Arial"/>
               </a:rPr>
-              <a:t>Best cell (ImageNet CNN, 111 scenes) on two 8 × 8 km verified crops (VH, dB): offshore it finds almost every vessel; in this harbor, none.</a:t>
+              <a:t>Best cell (ImageNet CNN, 111 scenes) on two 8 × 8 km verified crops (VH, dB): offshore it finds almost every vessel; in this harbor, none. Its verified F1 is 0.724 offshore and 0.026 within 2 km of shore.</a:t>
             </a:r>
           </a:p>
         </p:txBody>
@@ -5941,13 +5941,13 @@
       </p:sp>
       <p:sp>
         <p:nvSpPr>
-          <p:cNvPr id="57" name="heading: Near shore, every detector fails"/>
+          <p:cNvPr id="57" name="heading: References"/>
           <p:cNvSpPr txBox="1"/>
           <p:nvPr/>
         </p:nvSpPr>
         <p:spPr>
           <a:xfrm>
-            <a:off x="19687032" y="27669744"/>
+            <a:off x="19687032" y="27038808"/>
             <a:ext cx="13962888" cy="685800"/>
           </a:xfrm>
           <a:prstGeom prst="rect">
@@ -5973,20 +5973,20 @@
                 </a:solidFill>
                 <a:latin typeface="Arial"/>
               </a:rPr>
-              <a:t>Near shore, every detector fails</a:t>
+              <a:t>References</a:t>
             </a:r>
           </a:p>
         </p:txBody>
       </p:sp>
       <p:cxnSp>
         <p:nvCxnSpPr>
-          <p:cNvPr id="58" name="rule: Near shore, every detector fails"/>
+          <p:cNvPr id="58" name="rule: References"/>
           <p:cNvCxnSpPr/>
           <p:nvPr/>
         </p:nvCxnSpPr>
         <p:spPr>
           <a:xfrm>
-            <a:off x="19687032" y="28446984"/>
+            <a:off x="19687032" y="27816048"/>
             <a:ext cx="13962888" cy="0"/>
           </a:xfrm>
           <a:prstGeom prst="line">
@@ -6015,14 +6015,14 @@
       </p:cxnSp>
       <p:sp>
         <p:nvSpPr>
-          <p:cNvPr id="59" name="stat 1 value"/>
+          <p:cNvPr id="59" name="references 1"/>
           <p:cNvSpPr txBox="1"/>
           <p:nvPr/>
         </p:nvSpPr>
         <p:spPr>
           <a:xfrm>
-            <a:off x="19943064" y="28629864"/>
-            <a:ext cx="4483608" cy="822960"/>
+            <a:off x="19943064" y="28090368"/>
+            <a:ext cx="6588251" cy="3547871"/>
           </a:xfrm>
           <a:prstGeom prst="rect">
             <a:avLst/>
@@ -6031,6 +6031,302 @@
         </p:spPr>
         <p:txBody>
           <a:bodyPr wrap="square" anchor="t" lIns="0" rIns="0" tIns="0" bIns="0">
+            <a:spAutoFit/>
+          </a:bodyPr>
+          <a:lstStyle/>
+          <a:p>
+            <a:pPr algn="l">
+              <a:spcAft>
+                <a:spcPts val="400"/>
+              </a:spcAft>
+            </a:pPr>
+            <a:r>
+              <a:rPr sz="1700" b="0" i="0">
+                <a:solidFill>
+                  <a:srgbClr val="5B6477"/>
+                </a:solidFill>
+                <a:latin typeface="Arial"/>
+              </a:rPr>
+              <a:t>[1]  </a:t>
+            </a:r>
+            <a:r>
+              <a:rPr sz="1700" b="0" i="0">
+                <a:solidFill>
+                  <a:srgbClr val="1F2328"/>
+                </a:solidFill>
+                <a:latin typeface="Arial"/>
+              </a:rPr>
+              <a:t>F. S. Paolo et al. xView3-SAR: Detecting dark fishing activity using SAR imagery. NeurIPS 2022.</a:t>
+            </a:r>
+          </a:p>
+          <a:p>
+            <a:pPr algn="l">
+              <a:spcAft>
+                <a:spcPts val="400"/>
+              </a:spcAft>
+            </a:pPr>
+            <a:r>
+              <a:rPr sz="1700" b="0" i="0">
+                <a:solidFill>
+                  <a:srgbClr val="5B6477"/>
+                </a:solidFill>
+                <a:latin typeface="Arial"/>
+              </a:rPr>
+              <a:t>[2]  </a:t>
+            </a:r>
+            <a:r>
+              <a:rPr sz="1700" b="0" i="0">
+                <a:solidFill>
+                  <a:srgbClr val="1F2328"/>
+                </a:solidFill>
+                <a:latin typeface="Arial"/>
+              </a:rPr>
+              <a:t>R. Torres et al. GMES Sentinel-1 mission. Remote Sens. Environ. 2012.</a:t>
+            </a:r>
+          </a:p>
+          <a:p>
+            <a:pPr algn="l">
+              <a:spcAft>
+                <a:spcPts val="400"/>
+              </a:spcAft>
+            </a:pPr>
+            <a:r>
+              <a:rPr sz="1700" b="0" i="0">
+                <a:solidFill>
+                  <a:srgbClr val="5B6477"/>
+                </a:solidFill>
+                <a:latin typeface="Arial"/>
+              </a:rPr>
+              <a:t>[3]  </a:t>
+            </a:r>
+            <a:r>
+              <a:rPr sz="1700" b="0" i="0">
+                <a:solidFill>
+                  <a:srgbClr val="1F2328"/>
+                </a:solidFill>
+                <a:latin typeface="Arial"/>
+              </a:rPr>
+              <a:t>A. Dosovitskiy et al. An image is worth 16×16 words. ICLR 2021.</a:t>
+            </a:r>
+          </a:p>
+          <a:p>
+            <a:pPr algn="l">
+              <a:spcAft>
+                <a:spcPts val="400"/>
+              </a:spcAft>
+            </a:pPr>
+            <a:r>
+              <a:rPr sz="1700" b="0" i="0">
+                <a:solidFill>
+                  <a:srgbClr val="5B6477"/>
+                </a:solidFill>
+                <a:latin typeface="Arial"/>
+              </a:rPr>
+              <a:t>[4]  </a:t>
+            </a:r>
+            <a:r>
+              <a:rPr sz="1700" b="0" i="0">
+                <a:solidFill>
+                  <a:srgbClr val="1F2328"/>
+                </a:solidFill>
+                <a:latin typeface="Arial"/>
+              </a:rPr>
+              <a:t>S. Woo et al. ConvNeXt V2: Co-designing and scaling ConvNets with masked autoencoders. CVPR 2023.</a:t>
+            </a:r>
+          </a:p>
+          <a:p>
+            <a:pPr algn="l">
+              <a:spcAft>
+                <a:spcPts val="400"/>
+              </a:spcAft>
+            </a:pPr>
+            <a:r>
+              <a:rPr sz="1700" b="0" i="0">
+                <a:solidFill>
+                  <a:srgbClr val="5B6477"/>
+                </a:solidFill>
+                <a:latin typeface="Arial"/>
+              </a:rPr>
+              <a:t>[5]  </a:t>
+            </a:r>
+            <a:r>
+              <a:rPr sz="1700" b="0" i="0">
+                <a:solidFill>
+                  <a:srgbClr val="1F2328"/>
+                </a:solidFill>
+                <a:latin typeface="Arial"/>
+              </a:rPr>
+              <a:t>A. Steiner et al. How to train your ViT? TMLR 2022.</a:t>
+            </a:r>
+          </a:p>
+        </p:txBody>
+      </p:sp>
+      <p:sp>
+        <p:nvSpPr>
+          <p:cNvPr id="60" name="references 2"/>
+          <p:cNvSpPr txBox="1"/>
+          <p:nvPr/>
+        </p:nvSpPr>
+        <p:spPr>
+          <a:xfrm>
+            <a:off x="26805636" y="28090368"/>
+            <a:ext cx="6588251" cy="3547871"/>
+          </a:xfrm>
+          <a:prstGeom prst="rect">
+            <a:avLst/>
+          </a:prstGeom>
+          <a:noFill/>
+        </p:spPr>
+        <p:txBody>
+          <a:bodyPr wrap="square" anchor="t" lIns="0" rIns="0" tIns="0" bIns="0">
+            <a:spAutoFit/>
+          </a:bodyPr>
+          <a:lstStyle/>
+          <a:p>
+            <a:pPr algn="l">
+              <a:spcAft>
+                <a:spcPts val="400"/>
+              </a:spcAft>
+            </a:pPr>
+            <a:r>
+              <a:rPr sz="1700" b="0" i="0">
+                <a:solidFill>
+                  <a:srgbClr val="5B6477"/>
+                </a:solidFill>
+                <a:latin typeface="Arial"/>
+              </a:rPr>
+              <a:t>[6]  </a:t>
+            </a:r>
+            <a:r>
+              <a:rPr sz="1700" b="0" i="0">
+                <a:solidFill>
+                  <a:srgbClr val="1F2328"/>
+                </a:solidFill>
+                <a:latin typeface="Arial"/>
+              </a:rPr>
+              <a:t>J. Straka and I. Gruber. SatDINO: A deep dive into self-supervised pretraining for remote sensing. arXiv:2508.21402, 2025.</a:t>
+            </a:r>
+          </a:p>
+          <a:p>
+            <a:pPr algn="l">
+              <a:spcAft>
+                <a:spcPts val="400"/>
+              </a:spcAft>
+            </a:pPr>
+            <a:r>
+              <a:rPr sz="1700" b="0" i="0">
+                <a:solidFill>
+                  <a:srgbClr val="5B6477"/>
+                </a:solidFill>
+                <a:latin typeface="Arial"/>
+              </a:rPr>
+              <a:t>[7]  </a:t>
+            </a:r>
+            <a:r>
+              <a:rPr sz="1700" b="0" i="0">
+                <a:solidFill>
+                  <a:srgbClr val="1F2328"/>
+                </a:solidFill>
+                <a:latin typeface="Arial"/>
+              </a:rPr>
+              <a:t>D. Liu et al. SARMAE: Masked autoencoder for SAR representation learning. CVPR 2026.</a:t>
+            </a:r>
+          </a:p>
+          <a:p>
+            <a:pPr algn="l">
+              <a:spcAft>
+                <a:spcPts val="400"/>
+              </a:spcAft>
+            </a:pPr>
+            <a:r>
+              <a:rPr sz="1700" b="0" i="0">
+                <a:solidFill>
+                  <a:srgbClr val="5B6477"/>
+                </a:solidFill>
+                <a:latin typeface="Arial"/>
+              </a:rPr>
+              <a:t>[8]  </a:t>
+            </a:r>
+            <a:r>
+              <a:rPr sz="1700" b="0" i="0">
+                <a:solidFill>
+                  <a:srgbClr val="1F2328"/>
+                </a:solidFill>
+                <a:latin typeface="Arial"/>
+              </a:rPr>
+              <a:t>K. N. Clasen et al. reBEN: Refined BigEarthNet dataset. IGARSS 2025.</a:t>
+            </a:r>
+          </a:p>
+          <a:p>
+            <a:pPr algn="l">
+              <a:spcAft>
+                <a:spcPts val="400"/>
+              </a:spcAft>
+            </a:pPr>
+            <a:r>
+              <a:rPr sz="1700" b="0" i="0">
+                <a:solidFill>
+                  <a:srgbClr val="5B6477"/>
+                </a:solidFill>
+                <a:latin typeface="Arial"/>
+              </a:rPr>
+              <a:t>[9]  </a:t>
+            </a:r>
+            <a:r>
+              <a:rPr sz="1700" b="0" i="0">
+                <a:solidFill>
+                  <a:srgbClr val="1F2328"/>
+                </a:solidFill>
+                <a:latin typeface="Arial"/>
+              </a:rPr>
+              <a:t>X. Zhou, D. Wang, and P. Krähenbühl. Objects as points. arXiv:1904.07850, 2019.</a:t>
+            </a:r>
+          </a:p>
+          <a:p>
+            <a:pPr algn="l">
+              <a:spcAft>
+                <a:spcPts val="400"/>
+              </a:spcAft>
+            </a:pPr>
+            <a:r>
+              <a:rPr sz="1700" b="0" i="0">
+                <a:solidFill>
+                  <a:srgbClr val="5B6477"/>
+                </a:solidFill>
+                <a:latin typeface="Arial"/>
+              </a:rPr>
+              <a:t>[10]  </a:t>
+            </a:r>
+            <a:r>
+              <a:rPr sz="1700" b="0" i="0">
+                <a:solidFill>
+                  <a:srgbClr val="1F2328"/>
+                </a:solidFill>
+                <a:latin typeface="Arial"/>
+              </a:rPr>
+              <a:t>T.-Y. Lin et al. Focal loss for dense object detection. ICCV 2017.</a:t>
+            </a:r>
+          </a:p>
+        </p:txBody>
+      </p:sp>
+      <p:sp>
+        <p:nvSpPr>
+          <p:cNvPr id="61" name="heading: Findings"/>
+          <p:cNvSpPr txBox="1"/>
+          <p:nvPr/>
+        </p:nvSpPr>
+        <p:spPr>
+          <a:xfrm>
+            <a:off x="34299144" y="6702552"/>
+            <a:ext cx="8805672" cy="685800"/>
+          </a:xfrm>
+          <a:prstGeom prst="rect">
+            <a:avLst/>
+          </a:prstGeom>
+          <a:noFill/>
+        </p:spPr>
+        <p:txBody>
+          <a:bodyPr wrap="square" anchor="b" lIns="0" rIns="0" tIns="0" bIns="0">
             <a:spAutoFit/>
           </a:bodyPr>
           <a:lstStyle/>
@@ -6041,327 +6337,6 @@
               </a:spcAft>
             </a:pPr>
             <a:r>
-              <a:rPr sz="5200" b="1" i="0">
-                <a:solidFill>
-                  <a:srgbClr val="14213D"/>
-                </a:solidFill>
-                <a:latin typeface="Arial"/>
-              </a:rPr>
-              <a:t>0.026 vs 0.724</a:t>
-            </a:r>
-          </a:p>
-        </p:txBody>
-      </p:sp>
-      <p:sp>
-        <p:nvSpPr>
-          <p:cNvPr id="60" name="stat 1 label"/>
-          <p:cNvSpPr txBox="1"/>
-          <p:nvPr/>
-        </p:nvSpPr>
-        <p:spPr>
-          <a:xfrm>
-            <a:off x="19943064" y="29498544"/>
-            <a:ext cx="4483608" cy="777240"/>
-          </a:xfrm>
-          <a:prstGeom prst="rect">
-            <a:avLst/>
-          </a:prstGeom>
-          <a:noFill/>
-        </p:spPr>
-        <p:txBody>
-          <a:bodyPr wrap="square" anchor="t" lIns="0" rIns="0" tIns="0" bIns="0">
-            <a:spAutoFit/>
-          </a:bodyPr>
-          <a:lstStyle/>
-          <a:p>
-            <a:pPr algn="ctr">
-              <a:spcAft>
-                <a:spcPts val="0"/>
-              </a:spcAft>
-            </a:pPr>
-            <a:r>
-              <a:rPr sz="2000" b="0" i="0">
-                <a:solidFill>
-                  <a:srgbClr val="1F2328"/>
-                </a:solidFill>
-                <a:latin typeface="Arial"/>
-              </a:rPr>
-              <a:t>best cell's verified F1:</a:t>
-            </a:r>
-          </a:p>
-          <a:p>
-            <a:pPr algn="ctr">
-              <a:spcAft>
-                <a:spcPts val="0"/>
-              </a:spcAft>
-            </a:pPr>
-            <a:r>
-              <a:rPr sz="2000" b="0" i="0">
-                <a:solidFill>
-                  <a:srgbClr val="1F2328"/>
-                </a:solidFill>
-                <a:latin typeface="Arial"/>
-              </a:rPr>
-              <a:t>within 2 km vs offshore</a:t>
-            </a:r>
-          </a:p>
-        </p:txBody>
-      </p:sp>
-      <p:sp>
-        <p:nvSpPr>
-          <p:cNvPr id="61" name="stat 2 value"/>
-          <p:cNvSpPr txBox="1"/>
-          <p:nvPr/>
-        </p:nvSpPr>
-        <p:spPr>
-          <a:xfrm>
-            <a:off x="24426672" y="28629864"/>
-            <a:ext cx="4483608" cy="822960"/>
-          </a:xfrm>
-          <a:prstGeom prst="rect">
-            <a:avLst/>
-          </a:prstGeom>
-          <a:noFill/>
-        </p:spPr>
-        <p:txBody>
-          <a:bodyPr wrap="square" anchor="t" lIns="0" rIns="0" tIns="0" bIns="0">
-            <a:spAutoFit/>
-          </a:bodyPr>
-          <a:lstStyle/>
-          <a:p>
-            <a:pPr algn="ctr">
-              <a:spcAft>
-                <a:spcPts val="0"/>
-              </a:spcAft>
-            </a:pPr>
-            <a:r>
-              <a:rPr sz="5200" b="1" i="0">
-                <a:solidFill>
-                  <a:srgbClr val="14213D"/>
-                </a:solidFill>
-                <a:latin typeface="Arial"/>
-              </a:rPr>
-              <a:t>≤ 0.021</a:t>
-            </a:r>
-          </a:p>
-        </p:txBody>
-      </p:sp>
-      <p:sp>
-        <p:nvSpPr>
-          <p:cNvPr id="62" name="stat 2 label"/>
-          <p:cNvSpPr txBox="1"/>
-          <p:nvPr/>
-        </p:nvSpPr>
-        <p:spPr>
-          <a:xfrm>
-            <a:off x="24426672" y="29498544"/>
-            <a:ext cx="4483608" cy="777240"/>
-          </a:xfrm>
-          <a:prstGeom prst="rect">
-            <a:avLst/>
-          </a:prstGeom>
-          <a:noFill/>
-        </p:spPr>
-        <p:txBody>
-          <a:bodyPr wrap="square" anchor="t" lIns="0" rIns="0" tIns="0" bIns="0">
-            <a:spAutoFit/>
-          </a:bodyPr>
-          <a:lstStyle/>
-          <a:p>
-            <a:pPr algn="ctr">
-              <a:spcAft>
-                <a:spcPts val="0"/>
-              </a:spcAft>
-            </a:pPr>
-            <a:r>
-              <a:rPr sz="2000" b="0" i="0">
-                <a:solidFill>
-                  <a:srgbClr val="1F2328"/>
-                </a:solidFill>
-                <a:latin typeface="Arial"/>
-              </a:rPr>
-              <a:t>near-shore recall,</a:t>
-            </a:r>
-          </a:p>
-          <a:p>
-            <a:pPr algn="ctr">
-              <a:spcAft>
-                <a:spcPts val="0"/>
-              </a:spcAft>
-            </a:pPr>
-            <a:r>
-              <a:rPr sz="2000" b="0" i="0">
-                <a:solidFill>
-                  <a:srgbClr val="1F2328"/>
-                </a:solidFill>
-                <a:latin typeface="Arial"/>
-              </a:rPr>
-              <a:t>every cell</a:t>
-            </a:r>
-          </a:p>
-        </p:txBody>
-      </p:sp>
-      <p:sp>
-        <p:nvSpPr>
-          <p:cNvPr id="63" name="stat 3 value"/>
-          <p:cNvSpPr txBox="1"/>
-          <p:nvPr/>
-        </p:nvSpPr>
-        <p:spPr>
-          <a:xfrm>
-            <a:off x="28910280" y="28629864"/>
-            <a:ext cx="4483608" cy="822960"/>
-          </a:xfrm>
-          <a:prstGeom prst="rect">
-            <a:avLst/>
-          </a:prstGeom>
-          <a:noFill/>
-        </p:spPr>
-        <p:txBody>
-          <a:bodyPr wrap="square" anchor="t" lIns="0" rIns="0" tIns="0" bIns="0">
-            <a:spAutoFit/>
-          </a:bodyPr>
-          <a:lstStyle/>
-          <a:p>
-            <a:pPr algn="ctr">
-              <a:spcAft>
-                <a:spcPts val="0"/>
-              </a:spcAft>
-            </a:pPr>
-            <a:r>
-              <a:rPr sz="5200" b="1" i="0">
-                <a:solidFill>
-                  <a:srgbClr val="14213D"/>
-                </a:solidFill>
-                <a:latin typeface="Arial"/>
-              </a:rPr>
-              <a:t>0.4% vs 31%</a:t>
-            </a:r>
-          </a:p>
-        </p:txBody>
-      </p:sp>
-      <p:sp>
-        <p:nvSpPr>
-          <p:cNvPr id="64" name="stat 3 label"/>
-          <p:cNvSpPr txBox="1"/>
-          <p:nvPr/>
-        </p:nvSpPr>
-        <p:spPr>
-          <a:xfrm>
-            <a:off x="28910280" y="29498544"/>
-            <a:ext cx="4483608" cy="777240"/>
-          </a:xfrm>
-          <a:prstGeom prst="rect">
-            <a:avLst/>
-          </a:prstGeom>
-          <a:noFill/>
-        </p:spPr>
-        <p:txBody>
-          <a:bodyPr wrap="square" anchor="t" lIns="0" rIns="0" tIns="0" bIns="0">
-            <a:spAutoFit/>
-          </a:bodyPr>
-          <a:lstStyle/>
-          <a:p>
-            <a:pPr algn="ctr">
-              <a:spcAft>
-                <a:spcPts val="0"/>
-              </a:spcAft>
-            </a:pPr>
-            <a:r>
-              <a:rPr sz="2000" b="0" i="0">
-                <a:solidFill>
-                  <a:srgbClr val="1F2328"/>
-                </a:solidFill>
-                <a:latin typeface="Arial"/>
-              </a:rPr>
-              <a:t>vessels within 2 km of shore:</a:t>
-            </a:r>
-          </a:p>
-          <a:p>
-            <a:pPr algn="ctr">
-              <a:spcAft>
-                <a:spcPts val="0"/>
-              </a:spcAft>
-            </a:pPr>
-            <a:r>
-              <a:rPr sz="2000" b="0" i="0">
-                <a:solidFill>
-                  <a:srgbClr val="1F2328"/>
-                </a:solidFill>
-                <a:latin typeface="Arial"/>
-              </a:rPr>
-              <a:t>training vs verified labels</a:t>
-            </a:r>
-          </a:p>
-        </p:txBody>
-      </p:sp>
-      <p:sp>
-        <p:nvSpPr>
-          <p:cNvPr id="65" name="stat note"/>
-          <p:cNvSpPr txBox="1"/>
-          <p:nvPr/>
-        </p:nvSpPr>
-        <p:spPr>
-          <a:xfrm>
-            <a:off x="19943064" y="30412944"/>
-            <a:ext cx="13450824" cy="822960"/>
-          </a:xfrm>
-          <a:prstGeom prst="rect">
-            <a:avLst/>
-          </a:prstGeom>
-          <a:noFill/>
-        </p:spPr>
-        <p:txBody>
-          <a:bodyPr wrap="square" anchor="t" lIns="0" rIns="0" tIns="0" bIns="0">
-            <a:spAutoFit/>
-          </a:bodyPr>
-          <a:lstStyle/>
-          <a:p>
-            <a:pPr algn="l">
-              <a:spcAft>
-                <a:spcPts val="800"/>
-              </a:spcAft>
-            </a:pPr>
-            <a:r>
-              <a:rPr sz="2000" b="0" i="0">
-                <a:solidFill>
-                  <a:srgbClr val="1F2328"/>
-                </a:solidFill>
-                <a:latin typeface="Arial"/>
-              </a:rPr>
-              <a:t>The machine-made training labels place almost no vessels near shore, and the detectors almost never fire there: the best cell puts 34 of its 4,302 predictions within 2 km. Precision stays at 0.639–0.909 in every cell.</a:t>
-            </a:r>
-          </a:p>
-        </p:txBody>
-      </p:sp>
-      <p:sp>
-        <p:nvSpPr>
-          <p:cNvPr id="66" name="heading: Findings"/>
-          <p:cNvSpPr txBox="1"/>
-          <p:nvPr/>
-        </p:nvSpPr>
-        <p:spPr>
-          <a:xfrm>
-            <a:off x="34299144" y="6702552"/>
-            <a:ext cx="8805672" cy="685800"/>
-          </a:xfrm>
-          <a:prstGeom prst="rect">
-            <a:avLst/>
-          </a:prstGeom>
-          <a:noFill/>
-        </p:spPr>
-        <p:txBody>
-          <a:bodyPr wrap="square" anchor="b" lIns="0" rIns="0" tIns="0" bIns="0">
-            <a:spAutoFit/>
-          </a:bodyPr>
-          <a:lstStyle/>
-          <a:p>
-            <a:pPr algn="ctr">
-              <a:spcAft>
-                <a:spcPts val="0"/>
-              </a:spcAft>
-            </a:pPr>
-            <a:r>
               <a:rPr sz="4200" b="1" i="0">
                 <a:solidFill>
                   <a:srgbClr val="14213D"/>
@@ -6375,7 +6350,7 @@
       </p:sp>
       <p:cxnSp>
         <p:nvCxnSpPr>
-          <p:cNvPr id="67" name="rule: Findings"/>
+          <p:cNvPr id="62" name="rule: Findings"/>
           <p:cNvCxnSpPr/>
           <p:nvPr/>
         </p:nvCxnSpPr>
@@ -6410,7 +6385,7 @@
       </p:cxnSp>
       <p:sp>
         <p:nvSpPr>
-          <p:cNvPr id="68" name="hero number"/>
+          <p:cNvPr id="63" name="hero number"/>
           <p:cNvSpPr txBox="1"/>
           <p:nvPr/>
         </p:nvSpPr>
@@ -6449,7 +6424,7 @@
       </p:sp>
       <p:sp>
         <p:nvSpPr>
-          <p:cNvPr id="69" name="hero caption"/>
+          <p:cNvPr id="64" name="hero caption"/>
           <p:cNvSpPr txBox="1"/>
           <p:nvPr/>
         </p:nvSpPr>
@@ -6488,7 +6463,7 @@
       </p:sp>
       <p:sp>
         <p:nvSpPr>
-          <p:cNvPr id="70" name="findings"/>
+          <p:cNvPr id="65" name="findings"/>
           <p:cNvSpPr txBox="1"/>
           <p:nvPr/>
         </p:nvSpPr>
@@ -6631,7 +6606,7 @@
       </p:sp>
       <p:sp>
         <p:nvSpPr>
-          <p:cNvPr id="71" name="heading: Limits"/>
+          <p:cNvPr id="66" name="heading: Limits"/>
           <p:cNvSpPr txBox="1"/>
           <p:nvPr/>
         </p:nvSpPr>
@@ -6670,7 +6645,7 @@
       </p:sp>
       <p:cxnSp>
         <p:nvCxnSpPr>
-          <p:cNvPr id="72" name="rule: Limits"/>
+          <p:cNvPr id="67" name="rule: Limits"/>
           <p:cNvCxnSpPr/>
           <p:nvPr/>
         </p:nvCxnSpPr>
@@ -6705,7 +6680,7 @@
       </p:cxnSp>
       <p:sp>
         <p:nvSpPr>
-          <p:cNvPr id="73" name="limits"/>
+          <p:cNvPr id="68" name="limits"/>
           <p:cNvSpPr txBox="1"/>
           <p:nvPr/>
         </p:nvSpPr>
@@ -6816,7 +6791,7 @@
       </p:sp>
       <p:sp>
         <p:nvSpPr>
-          <p:cNvPr id="74" name="heading: Open questions &amp; next steps"/>
+          <p:cNvPr id="69" name="heading: Open questions &amp; next steps"/>
           <p:cNvSpPr txBox="1"/>
           <p:nvPr/>
         </p:nvSpPr>
@@ -6855,7 +6830,7 @@
       </p:sp>
       <p:cxnSp>
         <p:nvCxnSpPr>
-          <p:cNvPr id="75" name="rule: Open questions &amp; next steps"/>
+          <p:cNvPr id="70" name="rule: Open questions &amp; next steps"/>
           <p:cNvCxnSpPr/>
           <p:nvPr/>
         </p:nvCxnSpPr>
@@ -6890,7 +6865,7 @@
       </p:cxnSp>
       <p:sp>
         <p:nvSpPr>
-          <p:cNvPr id="76" name="open questions"/>
+          <p:cNvPr id="71" name="open questions"/>
           <p:cNvSpPr txBox="1"/>
           <p:nvPr/>
         </p:nvSpPr>

--- a/docs/poster/poster.pptx
+++ b/docs/poster/poster.pptx
@@ -5665,7 +5665,7 @@
         <p:spPr>
           <a:xfrm>
             <a:off x="19687032" y="6702552"/>
-            <a:ext cx="13962888" cy="685800"/>
+            <a:ext cx="12243816" cy="685800"/>
           </a:xfrm>
           <a:prstGeom prst="rect">
             <a:avLst/>
@@ -5704,7 +5704,7 @@
         <p:spPr>
           <a:xfrm>
             <a:off x="19687032" y="7479792"/>
-            <a:ext cx="13962888" cy="0"/>
+            <a:ext cx="12243816" cy="0"/>
           </a:xfrm>
           <a:prstGeom prst="line">
             <a:avLst/>
@@ -5747,7 +5747,7 @@
         <p:spPr>
           <a:xfrm>
             <a:off x="20034504" y="7754112"/>
-            <a:ext cx="13267944" cy="9211221"/>
+            <a:ext cx="11548872" cy="8698722"/>
           </a:xfrm>
           <a:prstGeom prst="rect">
             <a:avLst/>
@@ -5762,8 +5762,8 @@
         </p:nvSpPr>
         <p:spPr>
           <a:xfrm>
-            <a:off x="19943064" y="17102493"/>
-            <a:ext cx="13450824" cy="914400"/>
+            <a:off x="19943064" y="16589994"/>
+            <a:ext cx="11731752" cy="914400"/>
           </a:xfrm>
           <a:prstGeom prst="rect">
             <a:avLst/>
@@ -5795,14 +5795,14 @@
       </p:sp>
       <p:sp>
         <p:nvSpPr>
-          <p:cNvPr id="53" name="heading: SAR vs. optical depends on backbone and budget"/>
+          <p:cNvPr id="53" name="heading: SAR vs. optical: no stable winner"/>
           <p:cNvSpPr txBox="1"/>
           <p:nvPr/>
         </p:nvSpPr>
         <p:spPr>
           <a:xfrm>
-            <a:off x="19687032" y="18717768"/>
-            <a:ext cx="13962888" cy="685800"/>
+            <a:off x="19687032" y="18242280"/>
+            <a:ext cx="12243816" cy="685800"/>
           </a:xfrm>
           <a:prstGeom prst="rect">
             <a:avLst/>
@@ -5827,21 +5827,21 @@
                 </a:solidFill>
                 <a:latin typeface="Arial"/>
               </a:rPr>
-              <a:t>SAR vs. optical depends on backbone and budget</a:t>
+              <a:t>SAR vs. optical: no stable winner</a:t>
             </a:r>
           </a:p>
         </p:txBody>
       </p:sp>
       <p:cxnSp>
         <p:nvCxnSpPr>
-          <p:cNvPr id="54" name="rule: SAR vs. optical depends on backbone and budget"/>
+          <p:cNvPr id="54" name="rule: SAR vs. optical: no stable winner"/>
           <p:cNvCxnSpPr/>
           <p:nvPr/>
         </p:nvCxnSpPr>
         <p:spPr>
           <a:xfrm>
-            <a:off x="19687032" y="19495008"/>
-            <a:ext cx="13962888" cy="0"/>
+            <a:off x="19687032" y="19019520"/>
+            <a:ext cx="12243816" cy="0"/>
           </a:xfrm>
           <a:prstGeom prst="line">
             <a:avLst/>
@@ -5883,8 +5883,8 @@
         </p:blipFill>
         <p:spPr>
           <a:xfrm>
-            <a:off x="20034504" y="19769328"/>
-            <a:ext cx="13267944" cy="5539106"/>
+            <a:off x="20034504" y="19293840"/>
+            <a:ext cx="11548872" cy="5374421"/>
           </a:xfrm>
           <a:prstGeom prst="rect">
             <a:avLst/>
@@ -5899,8 +5899,8 @@
         </p:nvSpPr>
         <p:spPr>
           <a:xfrm>
-            <a:off x="19943064" y="25445594"/>
-            <a:ext cx="13450824" cy="1463040"/>
+            <a:off x="19943064" y="24805421"/>
+            <a:ext cx="11731752" cy="1463040"/>
           </a:xfrm>
           <a:prstGeom prst="rect">
             <a:avLst/>
@@ -5947,8 +5947,8 @@
         </p:nvSpPr>
         <p:spPr>
           <a:xfrm>
-            <a:off x="19687032" y="27038808"/>
-            <a:ext cx="13962888" cy="685800"/>
+            <a:off x="19687032" y="27221688"/>
+            <a:ext cx="12243816" cy="685800"/>
           </a:xfrm>
           <a:prstGeom prst="rect">
             <a:avLst/>
@@ -5986,8 +5986,8 @@
         </p:nvCxnSpPr>
         <p:spPr>
           <a:xfrm>
-            <a:off x="19687032" y="27816048"/>
-            <a:ext cx="13962888" cy="0"/>
+            <a:off x="19687032" y="27998928"/>
+            <a:ext cx="12243816" cy="0"/>
           </a:xfrm>
           <a:prstGeom prst="line">
             <a:avLst/>
@@ -6021,8 +6021,8 @@
         </p:nvSpPr>
         <p:spPr>
           <a:xfrm>
-            <a:off x="19943064" y="28090368"/>
-            <a:ext cx="6588251" cy="3547871"/>
+            <a:off x="19943064" y="28273248"/>
+            <a:ext cx="5728716" cy="3364991"/>
           </a:xfrm>
           <a:prstGeom prst="rect">
             <a:avLst/>
@@ -6169,8 +6169,8 @@
         </p:nvSpPr>
         <p:spPr>
           <a:xfrm>
-            <a:off x="26805636" y="28090368"/>
-            <a:ext cx="6588251" cy="3547871"/>
+            <a:off x="25946100" y="28273248"/>
+            <a:ext cx="5728716" cy="3364991"/>
           </a:xfrm>
           <a:prstGeom prst="rect">
             <a:avLst/>
@@ -6317,8 +6317,8 @@
         </p:nvSpPr>
         <p:spPr>
           <a:xfrm>
-            <a:off x="34299144" y="6702552"/>
-            <a:ext cx="8805672" cy="685800"/>
+            <a:off x="32580072" y="6702552"/>
+            <a:ext cx="10524744" cy="685800"/>
           </a:xfrm>
           <a:prstGeom prst="rect">
             <a:avLst/>
@@ -6356,8 +6356,8 @@
         </p:nvCxnSpPr>
         <p:spPr>
           <a:xfrm>
-            <a:off x="34299144" y="7479792"/>
-            <a:ext cx="8805672" cy="0"/>
+            <a:off x="32580072" y="7479792"/>
+            <a:ext cx="10524744" cy="0"/>
           </a:xfrm>
           <a:prstGeom prst="line">
             <a:avLst/>
@@ -6385,14 +6385,14 @@
       </p:cxnSp>
       <p:sp>
         <p:nvSpPr>
-          <p:cNvPr id="63" name="hero number"/>
+          <p:cNvPr id="63" name="findings"/>
           <p:cNvSpPr txBox="1"/>
           <p:nvPr/>
         </p:nvSpPr>
         <p:spPr>
           <a:xfrm>
-            <a:off x="34555176" y="7662672"/>
-            <a:ext cx="8293608" cy="1005840"/>
+            <a:off x="32836104" y="7754112"/>
+            <a:ext cx="10012680" cy="9345167"/>
           </a:xfrm>
           <a:prstGeom prst="rect">
             <a:avLst/>
@@ -6405,87 +6405,9 @@
           </a:bodyPr>
           <a:lstStyle/>
           <a:p>
-            <a:pPr algn="ctr">
-              <a:spcAft>
-                <a:spcPts val="0"/>
-              </a:spcAft>
-            </a:pPr>
-            <a:r>
-              <a:rPr sz="6000" b="1" i="0">
-                <a:solidFill>
-                  <a:srgbClr val="009E73"/>
-                </a:solidFill>
-                <a:latin typeface="Arial"/>
-              </a:rPr>
-              <a:t>12 / 12</a:t>
-            </a:r>
-          </a:p>
-        </p:txBody>
-      </p:sp>
-      <p:sp>
-        <p:nvSpPr>
-          <p:cNvPr id="64" name="hero caption"/>
-          <p:cNvSpPr txBox="1"/>
-          <p:nvPr/>
-        </p:nvSpPr>
-        <p:spPr>
-          <a:xfrm>
-            <a:off x="34555176" y="8714232"/>
-            <a:ext cx="8293608" cy="1005840"/>
-          </a:xfrm>
-          <a:prstGeom prst="rect">
-            <a:avLst/>
-          </a:prstGeom>
-          <a:noFill/>
-        </p:spPr>
-        <p:txBody>
-          <a:bodyPr wrap="square" anchor="t" lIns="0" rIns="0" tIns="0" bIns="0">
-            <a:spAutoFit/>
-          </a:bodyPr>
-          <a:lstStyle/>
-          <a:p>
-            <a:pPr algn="ctr">
-              <a:spcAft>
-                <a:spcPts val="800"/>
-              </a:spcAft>
-            </a:pPr>
-            <a:r>
-              <a:rPr sz="2900" b="0" i="0">
-                <a:solidFill>
-                  <a:srgbClr val="1F2328"/>
-                </a:solidFill>
-                <a:latin typeface="Arial"/>
-              </a:rPr>
-              <a:t>pretrained-vs-random comparisons at 12 training scenes have a 95% interval above zero.</a:t>
-            </a:r>
-          </a:p>
-        </p:txBody>
-      </p:sp>
-      <p:sp>
-        <p:nvSpPr>
-          <p:cNvPr id="65" name="findings"/>
-          <p:cNvSpPr txBox="1"/>
-          <p:nvPr/>
-        </p:nvSpPr>
-        <p:spPr>
-          <a:xfrm>
-            <a:off x="34555176" y="9994392"/>
-            <a:ext cx="8293608" cy="9025128"/>
-          </a:xfrm>
-          <a:prstGeom prst="rect">
-            <a:avLst/>
-          </a:prstGeom>
-          <a:noFill/>
-        </p:spPr>
-        <p:txBody>
-          <a:bodyPr wrap="square" anchor="t" lIns="0" rIns="0" tIns="0" bIns="0">
-            <a:spAutoFit/>
-          </a:bodyPr>
-          <a:lstStyle/>
-          <a:p>
             <a:pPr algn="l" marL="411480" indent="-411480">
               <a:spcAft>
-                <a:spcPts val="1200"/>
+                <a:spcPts val="1000"/>
               </a:spcAft>
               <a:buClr>
                 <a:srgbClr val="14213D"/>
@@ -6515,7 +6437,7 @@
           <a:p>
             <a:pPr algn="l" marL="411480" indent="-411480">
               <a:spcAft>
-                <a:spcPts val="1200"/>
+                <a:spcPts val="1000"/>
               </a:spcAft>
               <a:buClr>
                 <a:srgbClr val="14213D"/>
@@ -6545,7 +6467,7 @@
           <a:p>
             <a:pPr algn="l" marL="411480" indent="-411480">
               <a:spcAft>
-                <a:spcPts val="1200"/>
+                <a:spcPts val="1000"/>
               </a:spcAft>
               <a:buClr>
                 <a:srgbClr val="14213D"/>
@@ -6570,6 +6492,36 @@
                 <a:latin typeface="Arial"/>
               </a:rPr>
               <a:t> With a seeded 3-channel stem instead of band slicing, BigEarthNet-S2 beats random at every budget (+0.025 to +0.063 test F1).</a:t>
+            </a:r>
+          </a:p>
+          <a:p>
+            <a:pPr algn="l" marL="411480" indent="-411480">
+              <a:spcAft>
+                <a:spcPts val="1000"/>
+              </a:spcAft>
+              <a:buClr>
+                <a:srgbClr val="14213D"/>
+              </a:buClr>
+              <a:buFont typeface="Arial"/>
+              <a:buAutoNum type="arabicPlain"/>
+            </a:pPr>
+            <a:r>
+              <a:rPr sz="2900" b="1" i="0">
+                <a:solidFill>
+                  <a:srgbClr val="1F2328"/>
+                </a:solidFill>
+                <a:latin typeface="Arial"/>
+              </a:rPr>
+              <a:t>No detector works near shore:</a:t>
+            </a:r>
+            <a:r>
+              <a:rPr sz="2900" b="0" i="0">
+                <a:solidFill>
+                  <a:srgbClr val="1F2328"/>
+                </a:solidFill>
+                <a:latin typeface="Arial"/>
+              </a:rPr>
+              <a:t> recall ≤ 0.021 within 2 km in every cell. Training labels put 0.4% of vessels there; the verified set, 31%.</a:t>
             </a:r>
           </a:p>
           <a:p>
@@ -6590,7 +6542,7 @@
                 </a:solidFill>
                 <a:latin typeface="Arial"/>
               </a:rPr>
-              <a:t>No detector works near shore:</a:t>
+              <a:t>ImageNet is the strongest default.</a:t>
             </a:r>
             <a:r>
               <a:rPr sz="2900" b="0" i="0">
@@ -6599,21 +6551,21 @@
                 </a:solidFill>
                 <a:latin typeface="Arial"/>
               </a:rPr>
-              <a:t> recall ≤ 0.021 within 2 km in every cell. Training labels put 0.4% of vessels there; the verified set, 31%.</a:t>
-            </a:r>
-          </a:p>
-        </p:txBody>
-      </p:sp>
-      <p:sp>
-        <p:nvSpPr>
-          <p:cNvPr id="66" name="heading: Limits"/>
+              <a:t> ImageNet beats SAR pretraining in 7 of 16 comparisons (SAR wins 3). The best cell on both test (0.888) and verified F1 (0.574) is the ImageNet ConvNeXt with 111 scenes.</a:t>
+            </a:r>
+          </a:p>
+        </p:txBody>
+      </p:sp>
+      <p:sp>
+        <p:nvSpPr>
+          <p:cNvPr id="64" name="heading: Limits"/>
           <p:cNvSpPr txBox="1"/>
           <p:nvPr/>
         </p:nvSpPr>
         <p:spPr>
           <a:xfrm>
-            <a:off x="34299144" y="19056096"/>
-            <a:ext cx="8805672" cy="685800"/>
+            <a:off x="32580072" y="17172432"/>
+            <a:ext cx="10524744" cy="685800"/>
           </a:xfrm>
           <a:prstGeom prst="rect">
             <a:avLst/>
@@ -6645,14 +6597,14 @@
       </p:sp>
       <p:cxnSp>
         <p:nvCxnSpPr>
-          <p:cNvPr id="67" name="rule: Limits"/>
+          <p:cNvPr id="65" name="rule: Limits"/>
           <p:cNvCxnSpPr/>
           <p:nvPr/>
         </p:nvCxnSpPr>
         <p:spPr>
           <a:xfrm>
-            <a:off x="34299144" y="19833336"/>
-            <a:ext cx="8805672" cy="0"/>
+            <a:off x="32580072" y="17949672"/>
+            <a:ext cx="10524744" cy="0"/>
           </a:xfrm>
           <a:prstGeom prst="line">
             <a:avLst/>
@@ -6680,14 +6632,14 @@
       </p:cxnSp>
       <p:sp>
         <p:nvSpPr>
-          <p:cNvPr id="68" name="limits"/>
+          <p:cNvPr id="66" name="limits"/>
           <p:cNvSpPr txBox="1"/>
           <p:nvPr/>
         </p:nvSpPr>
         <p:spPr>
           <a:xfrm>
-            <a:off x="34555176" y="20107656"/>
-            <a:ext cx="8293608" cy="6044183"/>
+            <a:off x="32836104" y="18223992"/>
+            <a:ext cx="10012680" cy="6556247"/>
           </a:xfrm>
           <a:prstGeom prst="rect">
             <a:avLst/>
@@ -6787,103 +6739,6 @@
               <a:t>Checkpoints differ in objective and corpus, not only domain.</a:t>
             </a:r>
           </a:p>
-        </p:txBody>
-      </p:sp>
-      <p:sp>
-        <p:nvSpPr>
-          <p:cNvPr id="69" name="heading: Open questions &amp; next steps"/>
-          <p:cNvSpPr txBox="1"/>
-          <p:nvPr/>
-        </p:nvSpPr>
-        <p:spPr>
-          <a:xfrm>
-            <a:off x="34299144" y="26289000"/>
-            <a:ext cx="8805672" cy="685800"/>
-          </a:xfrm>
-          <a:prstGeom prst="rect">
-            <a:avLst/>
-          </a:prstGeom>
-          <a:noFill/>
-        </p:spPr>
-        <p:txBody>
-          <a:bodyPr wrap="square" anchor="b" lIns="0" rIns="0" tIns="0" bIns="0">
-            <a:spAutoFit/>
-          </a:bodyPr>
-          <a:lstStyle/>
-          <a:p>
-            <a:pPr algn="ctr">
-              <a:spcAft>
-                <a:spcPts val="0"/>
-              </a:spcAft>
-            </a:pPr>
-            <a:r>
-              <a:rPr sz="4200" b="1" i="0">
-                <a:solidFill>
-                  <a:srgbClr val="14213D"/>
-                </a:solidFill>
-                <a:latin typeface="Arial"/>
-              </a:rPr>
-              <a:t>Open questions &amp; next steps</a:t>
-            </a:r>
-          </a:p>
-        </p:txBody>
-      </p:sp>
-      <p:cxnSp>
-        <p:nvCxnSpPr>
-          <p:cNvPr id="70" name="rule: Open questions &amp; next steps"/>
-          <p:cNvCxnSpPr/>
-          <p:nvPr/>
-        </p:nvCxnSpPr>
-        <p:spPr>
-          <a:xfrm>
-            <a:off x="34299144" y="27066240"/>
-            <a:ext cx="8805672" cy="0"/>
-          </a:xfrm>
-          <a:prstGeom prst="line">
-            <a:avLst/>
-          </a:prstGeom>
-          <a:ln w="57150">
-            <a:solidFill>
-              <a:srgbClr val="B8BEC8"/>
-            </a:solidFill>
-          </a:ln>
-        </p:spPr>
-        <p:style>
-          <a:lnRef idx="2">
-            <a:schemeClr val="accent1"/>
-          </a:lnRef>
-          <a:fillRef idx="0">
-            <a:schemeClr val="accent1"/>
-          </a:fillRef>
-          <a:effectRef idx="1">
-            <a:schemeClr val="accent1"/>
-          </a:effectRef>
-          <a:fontRef idx="minor">
-            <a:schemeClr val="tx1"/>
-          </a:fontRef>
-        </p:style>
-      </p:cxnSp>
-      <p:sp>
-        <p:nvSpPr>
-          <p:cNvPr id="71" name="open questions"/>
-          <p:cNvSpPr txBox="1"/>
-          <p:nvPr/>
-        </p:nvSpPr>
-        <p:spPr>
-          <a:xfrm>
-            <a:off x="34555176" y="27340560"/>
-            <a:ext cx="8293608" cy="4297679"/>
-          </a:xfrm>
-          <a:prstGeom prst="rect">
-            <a:avLst/>
-          </a:prstGeom>
-          <a:noFill/>
-        </p:spPr>
-        <p:txBody>
-          <a:bodyPr wrap="square" anchor="t" lIns="0" rIns="0" tIns="0" bIns="0">
-            <a:spAutoFit/>
-          </a:bodyPr>
-          <a:lstStyle/>
           <a:p>
             <a:pPr algn="l" marL="347472" indent="-347472">
               <a:spcAft>
@@ -6903,7 +6758,148 @@
                 </a:solidFill>
                 <a:latin typeface="Arial"/>
               </a:rPr>
+              <a:t>In-region test: Sentinel-1 revisits put some test scenes near training scenes, so test F1 measures in-region generalization, not generalization to new regions.</a:t>
+            </a:r>
+          </a:p>
+        </p:txBody>
+      </p:sp>
+      <p:sp>
+        <p:nvSpPr>
+          <p:cNvPr id="67" name="heading: Open questions &amp; next steps"/>
+          <p:cNvSpPr txBox="1"/>
+          <p:nvPr/>
+        </p:nvSpPr>
+        <p:spPr>
+          <a:xfrm>
+            <a:off x="32580072" y="24862536"/>
+            <a:ext cx="10524744" cy="685800"/>
+          </a:xfrm>
+          <a:prstGeom prst="rect">
+            <a:avLst/>
+          </a:prstGeom>
+          <a:noFill/>
+        </p:spPr>
+        <p:txBody>
+          <a:bodyPr wrap="square" anchor="b" lIns="0" rIns="0" tIns="0" bIns="0">
+            <a:spAutoFit/>
+          </a:bodyPr>
+          <a:lstStyle/>
+          <a:p>
+            <a:pPr algn="ctr">
+              <a:spcAft>
+                <a:spcPts val="0"/>
+              </a:spcAft>
+            </a:pPr>
+            <a:r>
+              <a:rPr sz="4200" b="1" i="0">
+                <a:solidFill>
+                  <a:srgbClr val="14213D"/>
+                </a:solidFill>
+                <a:latin typeface="Arial"/>
+              </a:rPr>
+              <a:t>Open questions &amp; next steps</a:t>
+            </a:r>
+          </a:p>
+        </p:txBody>
+      </p:sp>
+      <p:cxnSp>
+        <p:nvCxnSpPr>
+          <p:cNvPr id="68" name="rule: Open questions &amp; next steps"/>
+          <p:cNvCxnSpPr/>
+          <p:nvPr/>
+        </p:nvCxnSpPr>
+        <p:spPr>
+          <a:xfrm>
+            <a:off x="32580072" y="25639776"/>
+            <a:ext cx="10524744" cy="0"/>
+          </a:xfrm>
+          <a:prstGeom prst="line">
+            <a:avLst/>
+          </a:prstGeom>
+          <a:ln w="57150">
+            <a:solidFill>
+              <a:srgbClr val="B8BEC8"/>
+            </a:solidFill>
+          </a:ln>
+        </p:spPr>
+        <p:style>
+          <a:lnRef idx="2">
+            <a:schemeClr val="accent1"/>
+          </a:lnRef>
+          <a:fillRef idx="0">
+            <a:schemeClr val="accent1"/>
+          </a:fillRef>
+          <a:effectRef idx="1">
+            <a:schemeClr val="accent1"/>
+          </a:effectRef>
+          <a:fontRef idx="minor">
+            <a:schemeClr val="tx1"/>
+          </a:fontRef>
+        </p:style>
+      </p:cxnSp>
+      <p:sp>
+        <p:nvSpPr>
+          <p:cNvPr id="69" name="open questions"/>
+          <p:cNvSpPr txBox="1"/>
+          <p:nvPr/>
+        </p:nvSpPr>
+        <p:spPr>
+          <a:xfrm>
+            <a:off x="32836104" y="25914096"/>
+            <a:ext cx="10012680" cy="5724143"/>
+          </a:xfrm>
+          <a:prstGeom prst="rect">
+            <a:avLst/>
+          </a:prstGeom>
+          <a:noFill/>
+        </p:spPr>
+        <p:txBody>
+          <a:bodyPr wrap="square" anchor="t" lIns="0" rIns="0" tIns="0" bIns="0">
+            <a:spAutoFit/>
+          </a:bodyPr>
+          <a:lstStyle/>
+          <a:p>
+            <a:pPr algn="l" marL="347472" indent="-347472">
+              <a:spcAft>
+                <a:spcPts val="800"/>
+              </a:spcAft>
+              <a:buSzPct val="70000"/>
+              <a:buClr>
+                <a:srgbClr val="14213D"/>
+              </a:buClr>
+              <a:buFont typeface="Arial"/>
+              <a:buChar char="■"/>
+            </a:pPr>
+            <a:r>
+              <a:rPr sz="2900" b="0" i="0">
+                <a:solidFill>
+                  <a:srgbClr val="1F2328"/>
+                </a:solidFill>
+                <a:latin typeface="Arial"/>
+              </a:rPr>
               <a:t>How do geospatial foundation models pretrained jointly on SAR and optical imagery fare against these single-source checkpoints?</a:t>
+            </a:r>
+          </a:p>
+          <a:p>
+            <a:pPr algn="l" marL="347472" indent="-347472">
+              <a:spcAft>
+                <a:spcPts val="800"/>
+              </a:spcAft>
+              <a:buSzPct val="70000"/>
+              <a:buClr>
+                <a:srgbClr val="14213D"/>
+              </a:buClr>
+              <a:buFont typeface="Arial"/>
+              <a:buChar char="■"/>
+            </a:pPr>
+            <a:r>
+              <a:rPr sz="2900" b="0" i="0">
+                <a:solidFill>
+                  <a:srgbClr val="1F2328"/>
+                </a:solidFill>
+                <a:latin typeface="Arial"/>
+              </a:rPr>
+              <a:t>Does SAR pretraining still trail ImageNet when both use the same objective, architecture and number of pretraining images?</a:t>
             </a:r>
           </a:p>
           <a:p>
